--- a/docs/proposal/onepass-architecture-proposal-2026-05-13.pptx
+++ b/docs/proposal/onepass-architecture-proposal-2026-05-13.pptx
@@ -14,6 +14,9 @@
     <p:sldId id="262" r:id="rId13"/>
     <p:sldId id="263" r:id="rId14"/>
     <p:sldId id="264" r:id="rId15"/>
+    <p:sldId id="265" r:id="rId16"/>
+    <p:sldId id="266" r:id="rId17"/>
+    <p:sldId id="267" r:id="rId18"/>
   </p:sldIdLst>
   <p:sldSz cx="12188952" cy="6858000" type="screen4x3"/>
   <p:notesSz cx="6858000" cy="9144000"/>
@@ -3612,6 +3615,7583 @@
                 </a:solidFill>
               </a:rPr>
               <a:t>Build ✓  397 Tests ✓</a:t>
+            </a:r>
+          </a:p>
+        </p:txBody>
+      </p:sp>
+    </p:spTree>
+  </p:cSld>
+  <p:clrMapOvr>
+    <a:masterClrMapping/>
+  </p:clrMapOvr>
+</p:sld>
+</file>
+
+<file path=ppt/slides/slide10.xml><?xml version="1.0" encoding="utf-8"?>
+<p:sld xmlns:a="http://schemas.openxmlformats.org/drawingml/2006/main" xmlns:p="http://schemas.openxmlformats.org/presentationml/2006/main" xmlns:r="http://schemas.openxmlformats.org/officeDocument/2006/relationships">
+  <p:cSld>
+    <p:bg>
+      <p:bgPr>
+        <a:solidFill>
+          <a:srgbClr val="0F2D52"/>
+        </a:solidFill>
+        <a:effectLst/>
+      </p:bgPr>
+    </p:bg>
+    <p:spTree>
+      <p:nvGrpSpPr>
+        <p:cNvPr id="1" name=""/>
+        <p:cNvGrpSpPr/>
+        <p:nvPr/>
+      </p:nvGrpSpPr>
+      <p:grpSpPr/>
+      <p:sp>
+        <p:nvSpPr>
+          <p:cNvPr id="2" name="Rectangle 1"/>
+          <p:cNvSpPr/>
+          <p:nvPr/>
+        </p:nvSpPr>
+        <p:spPr>
+          <a:xfrm>
+            <a:off x="0" y="0"/>
+            <a:ext cx="411480" cy="6858000"/>
+          </a:xfrm>
+          <a:prstGeom prst="rect">
+            <a:avLst/>
+          </a:prstGeom>
+          <a:solidFill>
+            <a:srgbClr val="00B072"/>
+          </a:solidFill>
+          <a:ln>
+            <a:noFill/>
+          </a:ln>
+        </p:spPr>
+        <p:style>
+          <a:lnRef idx="1">
+            <a:schemeClr val="accent1"/>
+          </a:lnRef>
+          <a:fillRef idx="3">
+            <a:schemeClr val="accent1"/>
+          </a:fillRef>
+          <a:effectRef idx="2">
+            <a:schemeClr val="accent1"/>
+          </a:effectRef>
+          <a:fontRef idx="minor">
+            <a:schemeClr val="lt1"/>
+          </a:fontRef>
+        </p:style>
+        <p:txBody>
+          <a:bodyPr rtlCol="0" anchor="ctr"/>
+          <a:lstStyle/>
+          <a:p>
+            <a:pPr algn="ctr"/>
+          </a:p>
+        </p:txBody>
+      </p:sp>
+      <p:sp>
+        <p:nvSpPr>
+          <p:cNvPr id="3" name="TextBox 2"/>
+          <p:cNvSpPr txBox="1"/>
+          <p:nvPr/>
+        </p:nvSpPr>
+        <p:spPr>
+          <a:xfrm>
+            <a:off x="731520" y="256032"/>
+            <a:ext cx="4572000" cy="411480"/>
+          </a:xfrm>
+          <a:prstGeom prst="rect">
+            <a:avLst/>
+          </a:prstGeom>
+          <a:noFill/>
+        </p:spPr>
+        <p:txBody>
+          <a:bodyPr wrap="square">
+            <a:spAutoFit/>
+          </a:bodyPr>
+          <a:lstStyle/>
+          <a:p>
+            <a:pPr algn="l"/>
+            <a:r>
+              <a:rPr sz="1200" b="1" i="0">
+                <a:solidFill>
+                  <a:srgbClr val="00B072"/>
+                </a:solidFill>
+              </a:rPr>
+              <a:t>07  영향 분석</a:t>
+            </a:r>
+          </a:p>
+        </p:txBody>
+      </p:sp>
+      <p:sp>
+        <p:nvSpPr>
+          <p:cNvPr id="4" name="TextBox 3"/>
+          <p:cNvSpPr txBox="1"/>
+          <p:nvPr/>
+        </p:nvSpPr>
+        <p:spPr>
+          <a:xfrm>
+            <a:off x="731520" y="640080"/>
+            <a:ext cx="10972800" cy="594360"/>
+          </a:xfrm>
+          <a:prstGeom prst="rect">
+            <a:avLst/>
+          </a:prstGeom>
+          <a:noFill/>
+        </p:spPr>
+        <p:txBody>
+          <a:bodyPr wrap="square">
+            <a:spAutoFit/>
+          </a:bodyPr>
+          <a:lstStyle/>
+          <a:p>
+            <a:pPr algn="l"/>
+            <a:r>
+              <a:rPr sz="2600" b="1" i="0">
+                <a:solidFill>
+                  <a:srgbClr val="FFFFFF"/>
+                </a:solidFill>
+              </a:rPr>
+              <a:t>전환해도 여러분이 만든 코드는 그대로입니다</a:t>
+            </a:r>
+          </a:p>
+        </p:txBody>
+      </p:sp>
+      <p:sp>
+        <p:nvSpPr>
+          <p:cNvPr id="5" name="Rectangle 4"/>
+          <p:cNvSpPr/>
+          <p:nvPr/>
+        </p:nvSpPr>
+        <p:spPr>
+          <a:xfrm>
+            <a:off x="731520" y="1298448"/>
+            <a:ext cx="10698480" cy="45720"/>
+          </a:xfrm>
+          <a:prstGeom prst="rect">
+            <a:avLst/>
+          </a:prstGeom>
+          <a:solidFill>
+            <a:srgbClr val="2A4A7A"/>
+          </a:solidFill>
+          <a:ln>
+            <a:noFill/>
+          </a:ln>
+        </p:spPr>
+        <p:style>
+          <a:lnRef idx="1">
+            <a:schemeClr val="accent1"/>
+          </a:lnRef>
+          <a:fillRef idx="3">
+            <a:schemeClr val="accent1"/>
+          </a:fillRef>
+          <a:effectRef idx="2">
+            <a:schemeClr val="accent1"/>
+          </a:effectRef>
+          <a:fontRef idx="minor">
+            <a:schemeClr val="lt1"/>
+          </a:fontRef>
+        </p:style>
+        <p:txBody>
+          <a:bodyPr rtlCol="0" anchor="ctr"/>
+          <a:lstStyle/>
+          <a:p>
+            <a:pPr algn="ctr"/>
+          </a:p>
+        </p:txBody>
+      </p:sp>
+      <p:sp>
+        <p:nvSpPr>
+          <p:cNvPr id="6" name="Rectangle 5"/>
+          <p:cNvSpPr/>
+          <p:nvPr/>
+        </p:nvSpPr>
+        <p:spPr>
+          <a:xfrm>
+            <a:off x="731520" y="1417320"/>
+            <a:ext cx="10698480" cy="658368"/>
+          </a:xfrm>
+          <a:prstGeom prst="rect">
+            <a:avLst/>
+          </a:prstGeom>
+          <a:solidFill>
+            <a:srgbClr val="003A2A"/>
+          </a:solidFill>
+          <a:ln>
+            <a:noFill/>
+          </a:ln>
+        </p:spPr>
+        <p:style>
+          <a:lnRef idx="1">
+            <a:schemeClr val="accent1"/>
+          </a:lnRef>
+          <a:fillRef idx="3">
+            <a:schemeClr val="accent1"/>
+          </a:fillRef>
+          <a:effectRef idx="2">
+            <a:schemeClr val="accent1"/>
+          </a:effectRef>
+          <a:fontRef idx="minor">
+            <a:schemeClr val="lt1"/>
+          </a:fontRef>
+        </p:style>
+        <p:txBody>
+          <a:bodyPr rtlCol="0" anchor="ctr"/>
+          <a:lstStyle/>
+          <a:p>
+            <a:pPr algn="ctr"/>
+          </a:p>
+        </p:txBody>
+      </p:sp>
+      <p:sp>
+        <p:nvSpPr>
+          <p:cNvPr id="7" name="Rectangle 6"/>
+          <p:cNvSpPr/>
+          <p:nvPr/>
+        </p:nvSpPr>
+        <p:spPr>
+          <a:xfrm>
+            <a:off x="731520" y="1417320"/>
+            <a:ext cx="109728" cy="658368"/>
+          </a:xfrm>
+          <a:prstGeom prst="rect">
+            <a:avLst/>
+          </a:prstGeom>
+          <a:solidFill>
+            <a:srgbClr val="00B072"/>
+          </a:solidFill>
+          <a:ln>
+            <a:noFill/>
+          </a:ln>
+        </p:spPr>
+        <p:style>
+          <a:lnRef idx="1">
+            <a:schemeClr val="accent1"/>
+          </a:lnRef>
+          <a:fillRef idx="3">
+            <a:schemeClr val="accent1"/>
+          </a:fillRef>
+          <a:effectRef idx="2">
+            <a:schemeClr val="accent1"/>
+          </a:effectRef>
+          <a:fontRef idx="minor">
+            <a:schemeClr val="lt1"/>
+          </a:fontRef>
+        </p:style>
+        <p:txBody>
+          <a:bodyPr rtlCol="0" anchor="ctr"/>
+          <a:lstStyle/>
+          <a:p>
+            <a:pPr algn="ctr"/>
+          </a:p>
+        </p:txBody>
+      </p:sp>
+      <p:sp>
+        <p:nvSpPr>
+          <p:cNvPr id="8" name="TextBox 7"/>
+          <p:cNvSpPr txBox="1"/>
+          <p:nvPr/>
+        </p:nvSpPr>
+        <p:spPr>
+          <a:xfrm>
+            <a:off x="960120" y="1490472"/>
+            <a:ext cx="10332720" cy="475488"/>
+          </a:xfrm>
+          <a:prstGeom prst="rect">
+            <a:avLst/>
+          </a:prstGeom>
+          <a:noFill/>
+        </p:spPr>
+        <p:txBody>
+          <a:bodyPr wrap="square">
+            <a:spAutoFit/>
+          </a:bodyPr>
+          <a:lstStyle/>
+          <a:p>
+            <a:pPr algn="l"/>
+            <a:r>
+              <a:rPr sz="1400" b="1" i="0">
+                <a:solidFill>
+                  <a:srgbClr val="00B072"/>
+                </a:solidFill>
+              </a:rPr>
+              <a:t>이번 전환은 각 팀이 만든 비즈니스 로직에 손대지 않습니다.  연결 방식만 바꿉니다.</a:t>
+            </a:r>
+          </a:p>
+        </p:txBody>
+      </p:sp>
+      <p:sp>
+        <p:nvSpPr>
+          <p:cNvPr id="9" name="Rectangle 8"/>
+          <p:cNvSpPr/>
+          <p:nvPr/>
+        </p:nvSpPr>
+        <p:spPr>
+          <a:xfrm>
+            <a:off x="731520" y="2176272"/>
+            <a:ext cx="3547872" cy="4343400"/>
+          </a:xfrm>
+          <a:prstGeom prst="rect">
+            <a:avLst/>
+          </a:prstGeom>
+          <a:solidFill>
+            <a:srgbClr val="0D2344"/>
+          </a:solidFill>
+          <a:ln>
+            <a:noFill/>
+          </a:ln>
+        </p:spPr>
+        <p:style>
+          <a:lnRef idx="1">
+            <a:schemeClr val="accent1"/>
+          </a:lnRef>
+          <a:fillRef idx="3">
+            <a:schemeClr val="accent1"/>
+          </a:fillRef>
+          <a:effectRef idx="2">
+            <a:schemeClr val="accent1"/>
+          </a:effectRef>
+          <a:fontRef idx="minor">
+            <a:schemeClr val="lt1"/>
+          </a:fontRef>
+        </p:style>
+        <p:txBody>
+          <a:bodyPr rtlCol="0" anchor="ctr"/>
+          <a:lstStyle/>
+          <a:p>
+            <a:pPr algn="ctr"/>
+          </a:p>
+        </p:txBody>
+      </p:sp>
+      <p:sp>
+        <p:nvSpPr>
+          <p:cNvPr id="10" name="Rectangle 9"/>
+          <p:cNvSpPr/>
+          <p:nvPr/>
+        </p:nvSpPr>
+        <p:spPr>
+          <a:xfrm>
+            <a:off x="731520" y="2176272"/>
+            <a:ext cx="3547872" cy="621792"/>
+          </a:xfrm>
+          <a:prstGeom prst="rect">
+            <a:avLst/>
+          </a:prstGeom>
+          <a:solidFill>
+            <a:srgbClr val="00AED6"/>
+          </a:solidFill>
+          <a:ln>
+            <a:noFill/>
+          </a:ln>
+        </p:spPr>
+        <p:style>
+          <a:lnRef idx="1">
+            <a:schemeClr val="accent1"/>
+          </a:lnRef>
+          <a:fillRef idx="3">
+            <a:schemeClr val="accent1"/>
+          </a:fillRef>
+          <a:effectRef idx="2">
+            <a:schemeClr val="accent1"/>
+          </a:effectRef>
+          <a:fontRef idx="minor">
+            <a:schemeClr val="lt1"/>
+          </a:fontRef>
+        </p:style>
+        <p:txBody>
+          <a:bodyPr rtlCol="0" anchor="ctr"/>
+          <a:lstStyle/>
+          <a:p>
+            <a:pPr algn="ctr"/>
+          </a:p>
+        </p:txBody>
+      </p:sp>
+      <p:sp>
+        <p:nvSpPr>
+          <p:cNvPr id="11" name="TextBox 10"/>
+          <p:cNvSpPr txBox="1"/>
+          <p:nvPr/>
+        </p:nvSpPr>
+        <p:spPr>
+          <a:xfrm>
+            <a:off x="731520" y="2176272"/>
+            <a:ext cx="2286000" cy="347472"/>
+          </a:xfrm>
+          <a:prstGeom prst="rect">
+            <a:avLst/>
+          </a:prstGeom>
+          <a:noFill/>
+        </p:spPr>
+        <p:txBody>
+          <a:bodyPr wrap="square">
+            <a:spAutoFit/>
+          </a:bodyPr>
+          <a:lstStyle/>
+          <a:p>
+            <a:pPr algn="ctr"/>
+            <a:r>
+              <a:rPr sz="1400" b="1" i="0">
+                <a:solidFill>
+                  <a:srgbClr val="FFFFFF"/>
+                </a:solidFill>
+              </a:rPr>
+              <a:t>FE 팀</a:t>
+            </a:r>
+          </a:p>
+        </p:txBody>
+      </p:sp>
+      <p:sp>
+        <p:nvSpPr>
+          <p:cNvPr id="12" name="Rectangle 11"/>
+          <p:cNvSpPr/>
+          <p:nvPr/>
+        </p:nvSpPr>
+        <p:spPr>
+          <a:xfrm>
+            <a:off x="3063240" y="2221992"/>
+            <a:ext cx="1170432" cy="256032"/>
+          </a:xfrm>
+          <a:prstGeom prst="rect">
+            <a:avLst/>
+          </a:prstGeom>
+          <a:solidFill>
+            <a:srgbClr val="000000"/>
+          </a:solidFill>
+          <a:ln>
+            <a:noFill/>
+          </a:ln>
+        </p:spPr>
+        <p:style>
+          <a:lnRef idx="1">
+            <a:schemeClr val="accent1"/>
+          </a:lnRef>
+          <a:fillRef idx="3">
+            <a:schemeClr val="accent1"/>
+          </a:fillRef>
+          <a:effectRef idx="2">
+            <a:schemeClr val="accent1"/>
+          </a:effectRef>
+          <a:fontRef idx="minor">
+            <a:schemeClr val="lt1"/>
+          </a:fontRef>
+        </p:style>
+        <p:txBody>
+          <a:bodyPr rtlCol="0" anchor="ctr"/>
+          <a:lstStyle/>
+          <a:p>
+            <a:pPr algn="ctr"/>
+          </a:p>
+        </p:txBody>
+      </p:sp>
+      <p:sp>
+        <p:nvSpPr>
+          <p:cNvPr id="13" name="TextBox 12"/>
+          <p:cNvSpPr txBox="1"/>
+          <p:nvPr/>
+        </p:nvSpPr>
+        <p:spPr>
+          <a:xfrm>
+            <a:off x="3063240" y="2221992"/>
+            <a:ext cx="1170432" cy="256032"/>
+          </a:xfrm>
+          <a:prstGeom prst="rect">
+            <a:avLst/>
+          </a:prstGeom>
+          <a:noFill/>
+        </p:spPr>
+        <p:txBody>
+          <a:bodyPr wrap="square">
+            <a:spAutoFit/>
+          </a:bodyPr>
+          <a:lstStyle/>
+          <a:p>
+            <a:pPr algn="ctr"/>
+            <a:r>
+              <a:rPr sz="900" b="1" i="0">
+                <a:solidFill>
+                  <a:srgbClr val="00AED6"/>
+                </a:solidFill>
+              </a:rPr>
+              <a:t>변경 최소</a:t>
+            </a:r>
+          </a:p>
+        </p:txBody>
+      </p:sp>
+      <p:sp>
+        <p:nvSpPr>
+          <p:cNvPr id="14" name="TextBox 13"/>
+          <p:cNvSpPr txBox="1"/>
+          <p:nvPr/>
+        </p:nvSpPr>
+        <p:spPr>
+          <a:xfrm>
+            <a:off x="777240" y="2212848"/>
+            <a:ext cx="411480" cy="457200"/>
+          </a:xfrm>
+          <a:prstGeom prst="rect">
+            <a:avLst/>
+          </a:prstGeom>
+          <a:noFill/>
+        </p:spPr>
+        <p:txBody>
+          <a:bodyPr wrap="square">
+            <a:spAutoFit/>
+          </a:bodyPr>
+          <a:lstStyle/>
+          <a:p>
+            <a:pPr algn="l"/>
+            <a:r>
+              <a:rPr sz="1600" b="0" i="0">
+                <a:solidFill>
+                  <a:srgbClr val="FFFFFF"/>
+                </a:solidFill>
+              </a:rPr>
+              <a:t>🔵</a:t>
+            </a:r>
+          </a:p>
+        </p:txBody>
+      </p:sp>
+      <p:sp>
+        <p:nvSpPr>
+          <p:cNvPr id="15" name="TextBox 14"/>
+          <p:cNvSpPr txBox="1"/>
+          <p:nvPr/>
+        </p:nvSpPr>
+        <p:spPr>
+          <a:xfrm>
+            <a:off x="822960" y="2871216"/>
+            <a:ext cx="3383280" cy="292608"/>
+          </a:xfrm>
+          <a:prstGeom prst="rect">
+            <a:avLst/>
+          </a:prstGeom>
+          <a:noFill/>
+        </p:spPr>
+        <p:txBody>
+          <a:bodyPr wrap="square">
+            <a:spAutoFit/>
+          </a:bodyPr>
+          <a:lstStyle/>
+          <a:p>
+            <a:pPr algn="l"/>
+            <a:r>
+              <a:rPr sz="1000" b="1" i="0">
+                <a:solidFill>
+                  <a:srgbClr val="00B072"/>
+                </a:solidFill>
+              </a:rPr>
+              <a:t>✅ 그대로 유지</a:t>
+            </a:r>
+          </a:p>
+        </p:txBody>
+      </p:sp>
+      <p:sp>
+        <p:nvSpPr>
+          <p:cNvPr id="16" name="TextBox 15"/>
+          <p:cNvSpPr txBox="1"/>
+          <p:nvPr/>
+        </p:nvSpPr>
+        <p:spPr>
+          <a:xfrm>
+            <a:off x="822960" y="3163824"/>
+            <a:ext cx="3429000" cy="283464"/>
+          </a:xfrm>
+          <a:prstGeom prst="rect">
+            <a:avLst/>
+          </a:prstGeom>
+          <a:noFill/>
+        </p:spPr>
+        <p:txBody>
+          <a:bodyPr wrap="square">
+            <a:spAutoFit/>
+          </a:bodyPr>
+          <a:lstStyle/>
+          <a:p>
+            <a:pPr algn="l"/>
+            <a:r>
+              <a:rPr sz="950" b="0" i="0">
+                <a:solidFill>
+                  <a:srgbClr val="88FFCC"/>
+                </a:solidFill>
+              </a:rPr>
+              <a:t>  화면 UI / UX 컴포넌트 전체 유지</a:t>
+            </a:r>
+          </a:p>
+        </p:txBody>
+      </p:sp>
+      <p:sp>
+        <p:nvSpPr>
+          <p:cNvPr id="17" name="TextBox 16"/>
+          <p:cNvSpPr txBox="1"/>
+          <p:nvPr/>
+        </p:nvSpPr>
+        <p:spPr>
+          <a:xfrm>
+            <a:off x="822960" y="3465576"/>
+            <a:ext cx="3429000" cy="283464"/>
+          </a:xfrm>
+          <a:prstGeom prst="rect">
+            <a:avLst/>
+          </a:prstGeom>
+          <a:noFill/>
+        </p:spPr>
+        <p:txBody>
+          <a:bodyPr wrap="square">
+            <a:spAutoFit/>
+          </a:bodyPr>
+          <a:lstStyle/>
+          <a:p>
+            <a:pPr algn="l"/>
+            <a:r>
+              <a:rPr sz="950" b="0" i="0">
+                <a:solidFill>
+                  <a:srgbClr val="88FFCC"/>
+                </a:solidFill>
+              </a:rPr>
+              <a:t>  비즈니스 로직 (Step1 ~ Step6) 그대로</a:t>
+            </a:r>
+          </a:p>
+        </p:txBody>
+      </p:sp>
+      <p:sp>
+        <p:nvSpPr>
+          <p:cNvPr id="18" name="TextBox 17"/>
+          <p:cNvSpPr txBox="1"/>
+          <p:nvPr/>
+        </p:nvSpPr>
+        <p:spPr>
+          <a:xfrm>
+            <a:off x="822960" y="3767328"/>
+            <a:ext cx="3429000" cy="283464"/>
+          </a:xfrm>
+          <a:prstGeom prst="rect">
+            <a:avLst/>
+          </a:prstGeom>
+          <a:noFill/>
+        </p:spPr>
+        <p:txBody>
+          <a:bodyPr wrap="square">
+            <a:spAutoFit/>
+          </a:bodyPr>
+          <a:lstStyle/>
+          <a:p>
+            <a:pPr algn="l"/>
+            <a:r>
+              <a:rPr sz="950" b="0" i="0">
+                <a:solidFill>
+                  <a:srgbClr val="88FFCC"/>
+                </a:solidFill>
+              </a:rPr>
+              <a:t>  API 파라미터·응답 형식 동일</a:t>
+            </a:r>
+          </a:p>
+        </p:txBody>
+      </p:sp>
+      <p:sp>
+        <p:nvSpPr>
+          <p:cNvPr id="19" name="TextBox 18"/>
+          <p:cNvSpPr txBox="1"/>
+          <p:nvPr/>
+        </p:nvSpPr>
+        <p:spPr>
+          <a:xfrm>
+            <a:off x="822960" y="4069080"/>
+            <a:ext cx="3429000" cy="283464"/>
+          </a:xfrm>
+          <a:prstGeom prst="rect">
+            <a:avLst/>
+          </a:prstGeom>
+          <a:noFill/>
+        </p:spPr>
+        <p:txBody>
+          <a:bodyPr wrap="square">
+            <a:spAutoFit/>
+          </a:bodyPr>
+          <a:lstStyle/>
+          <a:p>
+            <a:pPr algn="l"/>
+            <a:r>
+              <a:rPr sz="950" b="0" i="0">
+                <a:solidFill>
+                  <a:srgbClr val="88FFCC"/>
+                </a:solidFill>
+              </a:rPr>
+              <a:t>  26개 API 시그니처 Q-IM이 그대로 유지</a:t>
+            </a:r>
+          </a:p>
+        </p:txBody>
+      </p:sp>
+      <p:sp>
+        <p:nvSpPr>
+          <p:cNvPr id="20" name="Rectangle 19"/>
+          <p:cNvSpPr/>
+          <p:nvPr/>
+        </p:nvSpPr>
+        <p:spPr>
+          <a:xfrm>
+            <a:off x="822960" y="4407408"/>
+            <a:ext cx="3364992" cy="27432"/>
+          </a:xfrm>
+          <a:prstGeom prst="rect">
+            <a:avLst/>
+          </a:prstGeom>
+          <a:solidFill>
+            <a:srgbClr val="2A4A7A"/>
+          </a:solidFill>
+          <a:ln>
+            <a:noFill/>
+          </a:ln>
+        </p:spPr>
+        <p:style>
+          <a:lnRef idx="1">
+            <a:schemeClr val="accent1"/>
+          </a:lnRef>
+          <a:fillRef idx="3">
+            <a:schemeClr val="accent1"/>
+          </a:fillRef>
+          <a:effectRef idx="2">
+            <a:schemeClr val="accent1"/>
+          </a:effectRef>
+          <a:fontRef idx="minor">
+            <a:schemeClr val="lt1"/>
+          </a:fontRef>
+        </p:style>
+        <p:txBody>
+          <a:bodyPr rtlCol="0" anchor="ctr"/>
+          <a:lstStyle/>
+          <a:p>
+            <a:pPr algn="ctr"/>
+          </a:p>
+        </p:txBody>
+      </p:sp>
+      <p:sp>
+        <p:nvSpPr>
+          <p:cNvPr id="21" name="TextBox 20"/>
+          <p:cNvSpPr txBox="1"/>
+          <p:nvPr/>
+        </p:nvSpPr>
+        <p:spPr>
+          <a:xfrm>
+            <a:off x="822960" y="4480560"/>
+            <a:ext cx="3383280" cy="292608"/>
+          </a:xfrm>
+          <a:prstGeom prst="rect">
+            <a:avLst/>
+          </a:prstGeom>
+          <a:noFill/>
+        </p:spPr>
+        <p:txBody>
+          <a:bodyPr wrap="square">
+            <a:spAutoFit/>
+          </a:bodyPr>
+          <a:lstStyle/>
+          <a:p>
+            <a:pPr algn="l"/>
+            <a:r>
+              <a:rPr sz="1000" b="1" i="0">
+                <a:solidFill>
+                  <a:srgbClr val="F58A07"/>
+                </a:solidFill>
+              </a:rPr>
+              <a:t>🔧 변경되는 것</a:t>
+            </a:r>
+          </a:p>
+        </p:txBody>
+      </p:sp>
+      <p:sp>
+        <p:nvSpPr>
+          <p:cNvPr id="22" name="TextBox 21"/>
+          <p:cNvSpPr txBox="1"/>
+          <p:nvPr/>
+        </p:nvSpPr>
+        <p:spPr>
+          <a:xfrm>
+            <a:off x="822960" y="4809744"/>
+            <a:ext cx="3429000" cy="283464"/>
+          </a:xfrm>
+          <a:prstGeom prst="rect">
+            <a:avLst/>
+          </a:prstGeom>
+          <a:noFill/>
+        </p:spPr>
+        <p:txBody>
+          <a:bodyPr wrap="square">
+            <a:spAutoFit/>
+          </a:bodyPr>
+          <a:lstStyle/>
+          <a:p>
+            <a:pPr algn="l"/>
+            <a:r>
+              <a:rPr sz="950" b="0" i="0">
+                <a:solidFill>
+                  <a:srgbClr val="FFCC88"/>
+                </a:solidFill>
+              </a:rPr>
+              <a:t>extInstance.ts  baseURL 1줄 변경</a:t>
+            </a:r>
+          </a:p>
+        </p:txBody>
+      </p:sp>
+      <p:sp>
+        <p:nvSpPr>
+          <p:cNvPr id="23" name="TextBox 22"/>
+          <p:cNvSpPr txBox="1"/>
+          <p:nvPr/>
+        </p:nvSpPr>
+        <p:spPr>
+          <a:xfrm>
+            <a:off x="822960" y="5111496"/>
+            <a:ext cx="3429000" cy="283464"/>
+          </a:xfrm>
+          <a:prstGeom prst="rect">
+            <a:avLst/>
+          </a:prstGeom>
+          <a:noFill/>
+        </p:spPr>
+        <p:txBody>
+          <a:bodyPr wrap="square">
+            <a:spAutoFit/>
+          </a:bodyPr>
+          <a:lstStyle/>
+          <a:p>
+            <a:pPr algn="l"/>
+            <a:r>
+              <a:rPr sz="950" b="0" i="0">
+                <a:solidFill>
+                  <a:srgbClr val="AA9977"/>
+                </a:solidFill>
+              </a:rPr>
+              <a:t>  Q-IM 직접 → ido 경유 (같은 경로명)</a:t>
+            </a:r>
+          </a:p>
+        </p:txBody>
+      </p:sp>
+      <p:sp>
+        <p:nvSpPr>
+          <p:cNvPr id="24" name="TextBox 23"/>
+          <p:cNvSpPr txBox="1"/>
+          <p:nvPr/>
+        </p:nvSpPr>
+        <p:spPr>
+          <a:xfrm>
+            <a:off x="822960" y="5413248"/>
+            <a:ext cx="3429000" cy="283464"/>
+          </a:xfrm>
+          <a:prstGeom prst="rect">
+            <a:avLst/>
+          </a:prstGeom>
+          <a:noFill/>
+        </p:spPr>
+        <p:txBody>
+          <a:bodyPr wrap="square">
+            <a:spAutoFit/>
+          </a:bodyPr>
+          <a:lstStyle/>
+          <a:p>
+            <a:pPr algn="l"/>
+            <a:r>
+              <a:rPr sz="950" b="0" i="0">
+                <a:solidFill>
+                  <a:srgbClr val="FFCC88"/>
+                </a:solidFill>
+              </a:rPr>
+              <a:t>SKIP_AUTH / AES_GCM_KEY 환경변수 제거</a:t>
+            </a:r>
+          </a:p>
+        </p:txBody>
+      </p:sp>
+      <p:sp>
+        <p:nvSpPr>
+          <p:cNvPr id="25" name="TextBox 24"/>
+          <p:cNvSpPr txBox="1"/>
+          <p:nvPr/>
+        </p:nvSpPr>
+        <p:spPr>
+          <a:xfrm>
+            <a:off x="822960" y="5715000"/>
+            <a:ext cx="3429000" cy="283464"/>
+          </a:xfrm>
+          <a:prstGeom prst="rect">
+            <a:avLst/>
+          </a:prstGeom>
+          <a:noFill/>
+        </p:spPr>
+        <p:txBody>
+          <a:bodyPr wrap="square">
+            <a:spAutoFit/>
+          </a:bodyPr>
+          <a:lstStyle/>
+          <a:p>
+            <a:pPr algn="l"/>
+            <a:r>
+              <a:rPr sz="950" b="0" i="0">
+                <a:solidFill>
+                  <a:srgbClr val="FFCC88"/>
+                </a:solidFill>
+              </a:rPr>
+              <a:t>Math.random() → BE API 1회 호출로 교체</a:t>
+            </a:r>
+          </a:p>
+        </p:txBody>
+      </p:sp>
+      <p:sp>
+        <p:nvSpPr>
+          <p:cNvPr id="26" name="Rectangle 25"/>
+          <p:cNvSpPr/>
+          <p:nvPr/>
+        </p:nvSpPr>
+        <p:spPr>
+          <a:xfrm>
+            <a:off x="4480559" y="2176272"/>
+            <a:ext cx="3547872" cy="4343400"/>
+          </a:xfrm>
+          <a:prstGeom prst="rect">
+            <a:avLst/>
+          </a:prstGeom>
+          <a:solidFill>
+            <a:srgbClr val="0D2344"/>
+          </a:solidFill>
+          <a:ln>
+            <a:noFill/>
+          </a:ln>
+        </p:spPr>
+        <p:style>
+          <a:lnRef idx="1">
+            <a:schemeClr val="accent1"/>
+          </a:lnRef>
+          <a:fillRef idx="3">
+            <a:schemeClr val="accent1"/>
+          </a:fillRef>
+          <a:effectRef idx="2">
+            <a:schemeClr val="accent1"/>
+          </a:effectRef>
+          <a:fontRef idx="minor">
+            <a:schemeClr val="lt1"/>
+          </a:fontRef>
+        </p:style>
+        <p:txBody>
+          <a:bodyPr rtlCol="0" anchor="ctr"/>
+          <a:lstStyle/>
+          <a:p>
+            <a:pPr algn="ctr"/>
+          </a:p>
+        </p:txBody>
+      </p:sp>
+      <p:sp>
+        <p:nvSpPr>
+          <p:cNvPr id="27" name="Rectangle 26"/>
+          <p:cNvSpPr/>
+          <p:nvPr/>
+        </p:nvSpPr>
+        <p:spPr>
+          <a:xfrm>
+            <a:off x="4480559" y="2176272"/>
+            <a:ext cx="3547872" cy="621792"/>
+          </a:xfrm>
+          <a:prstGeom prst="rect">
+            <a:avLst/>
+          </a:prstGeom>
+          <a:solidFill>
+            <a:srgbClr val="F58A07"/>
+          </a:solidFill>
+          <a:ln>
+            <a:noFill/>
+          </a:ln>
+        </p:spPr>
+        <p:style>
+          <a:lnRef idx="1">
+            <a:schemeClr val="accent1"/>
+          </a:lnRef>
+          <a:fillRef idx="3">
+            <a:schemeClr val="accent1"/>
+          </a:fillRef>
+          <a:effectRef idx="2">
+            <a:schemeClr val="accent1"/>
+          </a:effectRef>
+          <a:fontRef idx="minor">
+            <a:schemeClr val="lt1"/>
+          </a:fontRef>
+        </p:style>
+        <p:txBody>
+          <a:bodyPr rtlCol="0" anchor="ctr"/>
+          <a:lstStyle/>
+          <a:p>
+            <a:pPr algn="ctr"/>
+          </a:p>
+        </p:txBody>
+      </p:sp>
+      <p:sp>
+        <p:nvSpPr>
+          <p:cNvPr id="28" name="TextBox 27"/>
+          <p:cNvSpPr txBox="1"/>
+          <p:nvPr/>
+        </p:nvSpPr>
+        <p:spPr>
+          <a:xfrm>
+            <a:off x="4480559" y="2176272"/>
+            <a:ext cx="2286000" cy="347472"/>
+          </a:xfrm>
+          <a:prstGeom prst="rect">
+            <a:avLst/>
+          </a:prstGeom>
+          <a:noFill/>
+        </p:spPr>
+        <p:txBody>
+          <a:bodyPr wrap="square">
+            <a:spAutoFit/>
+          </a:bodyPr>
+          <a:lstStyle/>
+          <a:p>
+            <a:pPr algn="ctr"/>
+            <a:r>
+              <a:rPr sz="1400" b="1" i="0">
+                <a:solidFill>
+                  <a:srgbClr val="FFFFFF"/>
+                </a:solidFill>
+              </a:rPr>
+              <a:t>Q-IM 팀</a:t>
+            </a:r>
+          </a:p>
+        </p:txBody>
+      </p:sp>
+      <p:sp>
+        <p:nvSpPr>
+          <p:cNvPr id="29" name="Rectangle 28"/>
+          <p:cNvSpPr/>
+          <p:nvPr/>
+        </p:nvSpPr>
+        <p:spPr>
+          <a:xfrm>
+            <a:off x="6812279" y="2221992"/>
+            <a:ext cx="1170432" cy="256032"/>
+          </a:xfrm>
+          <a:prstGeom prst="rect">
+            <a:avLst/>
+          </a:prstGeom>
+          <a:solidFill>
+            <a:srgbClr val="000000"/>
+          </a:solidFill>
+          <a:ln>
+            <a:noFill/>
+          </a:ln>
+        </p:spPr>
+        <p:style>
+          <a:lnRef idx="1">
+            <a:schemeClr val="accent1"/>
+          </a:lnRef>
+          <a:fillRef idx="3">
+            <a:schemeClr val="accent1"/>
+          </a:fillRef>
+          <a:effectRef idx="2">
+            <a:schemeClr val="accent1"/>
+          </a:effectRef>
+          <a:fontRef idx="minor">
+            <a:schemeClr val="lt1"/>
+          </a:fontRef>
+        </p:style>
+        <p:txBody>
+          <a:bodyPr rtlCol="0" anchor="ctr"/>
+          <a:lstStyle/>
+          <a:p>
+            <a:pPr algn="ctr"/>
+          </a:p>
+        </p:txBody>
+      </p:sp>
+      <p:sp>
+        <p:nvSpPr>
+          <p:cNvPr id="30" name="TextBox 29"/>
+          <p:cNvSpPr txBox="1"/>
+          <p:nvPr/>
+        </p:nvSpPr>
+        <p:spPr>
+          <a:xfrm>
+            <a:off x="6812279" y="2221992"/>
+            <a:ext cx="1170432" cy="256032"/>
+          </a:xfrm>
+          <a:prstGeom prst="rect">
+            <a:avLst/>
+          </a:prstGeom>
+          <a:noFill/>
+        </p:spPr>
+        <p:txBody>
+          <a:bodyPr wrap="square">
+            <a:spAutoFit/>
+          </a:bodyPr>
+          <a:lstStyle/>
+          <a:p>
+            <a:pPr algn="ctr"/>
+            <a:r>
+              <a:rPr sz="900" b="1" i="0">
+                <a:solidFill>
+                  <a:srgbClr val="F58A07"/>
+                </a:solidFill>
+              </a:rPr>
+              <a:t>변경 없음</a:t>
+            </a:r>
+          </a:p>
+        </p:txBody>
+      </p:sp>
+      <p:sp>
+        <p:nvSpPr>
+          <p:cNvPr id="31" name="TextBox 30"/>
+          <p:cNvSpPr txBox="1"/>
+          <p:nvPr/>
+        </p:nvSpPr>
+        <p:spPr>
+          <a:xfrm>
+            <a:off x="4526279" y="2212848"/>
+            <a:ext cx="411480" cy="457200"/>
+          </a:xfrm>
+          <a:prstGeom prst="rect">
+            <a:avLst/>
+          </a:prstGeom>
+          <a:noFill/>
+        </p:spPr>
+        <p:txBody>
+          <a:bodyPr wrap="square">
+            <a:spAutoFit/>
+          </a:bodyPr>
+          <a:lstStyle/>
+          <a:p>
+            <a:pPr algn="l"/>
+            <a:r>
+              <a:rPr sz="1600" b="0" i="0">
+                <a:solidFill>
+                  <a:srgbClr val="FFFFFF"/>
+                </a:solidFill>
+              </a:rPr>
+              <a:t>🟠</a:t>
+            </a:r>
+          </a:p>
+        </p:txBody>
+      </p:sp>
+      <p:sp>
+        <p:nvSpPr>
+          <p:cNvPr id="32" name="TextBox 31"/>
+          <p:cNvSpPr txBox="1"/>
+          <p:nvPr/>
+        </p:nvSpPr>
+        <p:spPr>
+          <a:xfrm>
+            <a:off x="4571999" y="2871216"/>
+            <a:ext cx="3383280" cy="292608"/>
+          </a:xfrm>
+          <a:prstGeom prst="rect">
+            <a:avLst/>
+          </a:prstGeom>
+          <a:noFill/>
+        </p:spPr>
+        <p:txBody>
+          <a:bodyPr wrap="square">
+            <a:spAutoFit/>
+          </a:bodyPr>
+          <a:lstStyle/>
+          <a:p>
+            <a:pPr algn="l"/>
+            <a:r>
+              <a:rPr sz="1000" b="1" i="0">
+                <a:solidFill>
+                  <a:srgbClr val="00B072"/>
+                </a:solidFill>
+              </a:rPr>
+              <a:t>✅ 그대로 유지</a:t>
+            </a:r>
+          </a:p>
+        </p:txBody>
+      </p:sp>
+      <p:sp>
+        <p:nvSpPr>
+          <p:cNvPr id="33" name="TextBox 32"/>
+          <p:cNvSpPr txBox="1"/>
+          <p:nvPr/>
+        </p:nvSpPr>
+        <p:spPr>
+          <a:xfrm>
+            <a:off x="4571999" y="3163824"/>
+            <a:ext cx="3429000" cy="283464"/>
+          </a:xfrm>
+          <a:prstGeom prst="rect">
+            <a:avLst/>
+          </a:prstGeom>
+          <a:noFill/>
+        </p:spPr>
+        <p:txBody>
+          <a:bodyPr wrap="square">
+            <a:spAutoFit/>
+          </a:bodyPr>
+          <a:lstStyle/>
+          <a:p>
+            <a:pPr algn="l"/>
+            <a:r>
+              <a:rPr sz="950" b="0" i="0">
+                <a:solidFill>
+                  <a:srgbClr val="88FFCC"/>
+                </a:solidFill>
+              </a:rPr>
+              <a:t>  Q-IM 내부 로직 코드 변경 없음</a:t>
+            </a:r>
+          </a:p>
+        </p:txBody>
+      </p:sp>
+      <p:sp>
+        <p:nvSpPr>
+          <p:cNvPr id="34" name="TextBox 33"/>
+          <p:cNvSpPr txBox="1"/>
+          <p:nvPr/>
+        </p:nvSpPr>
+        <p:spPr>
+          <a:xfrm>
+            <a:off x="4571999" y="3465576"/>
+            <a:ext cx="3429000" cy="283464"/>
+          </a:xfrm>
+          <a:prstGeom prst="rect">
+            <a:avLst/>
+          </a:prstGeom>
+          <a:noFill/>
+        </p:spPr>
+        <p:txBody>
+          <a:bodyPr wrap="square">
+            <a:spAutoFit/>
+          </a:bodyPr>
+          <a:lstStyle/>
+          <a:p>
+            <a:pPr algn="l"/>
+            <a:r>
+              <a:rPr sz="950" b="0" i="0">
+                <a:solidFill>
+                  <a:srgbClr val="88FFCC"/>
+                </a:solidFill>
+              </a:rPr>
+              <a:t>  API 엔드포인트 전체 유지</a:t>
+            </a:r>
+          </a:p>
+        </p:txBody>
+      </p:sp>
+      <p:sp>
+        <p:nvSpPr>
+          <p:cNvPr id="35" name="TextBox 34"/>
+          <p:cNvSpPr txBox="1"/>
+          <p:nvPr/>
+        </p:nvSpPr>
+        <p:spPr>
+          <a:xfrm>
+            <a:off x="4571999" y="3767328"/>
+            <a:ext cx="3429000" cy="283464"/>
+          </a:xfrm>
+          <a:prstGeom prst="rect">
+            <a:avLst/>
+          </a:prstGeom>
+          <a:noFill/>
+        </p:spPr>
+        <p:txBody>
+          <a:bodyPr wrap="square">
+            <a:spAutoFit/>
+          </a:bodyPr>
+          <a:lstStyle/>
+          <a:p>
+            <a:pPr algn="l"/>
+            <a:r>
+              <a:rPr sz="950" b="0" i="0">
+                <a:solidFill>
+                  <a:srgbClr val="88FFCC"/>
+                </a:solidFill>
+              </a:rPr>
+              <a:t>  DB 스키마·데이터 모델 그대로</a:t>
+            </a:r>
+          </a:p>
+        </p:txBody>
+      </p:sp>
+      <p:sp>
+        <p:nvSpPr>
+          <p:cNvPr id="36" name="TextBox 35"/>
+          <p:cNvSpPr txBox="1"/>
+          <p:nvPr/>
+        </p:nvSpPr>
+        <p:spPr>
+          <a:xfrm>
+            <a:off x="4571999" y="4069080"/>
+            <a:ext cx="3429000" cy="283464"/>
+          </a:xfrm>
+          <a:prstGeom prst="rect">
+            <a:avLst/>
+          </a:prstGeom>
+          <a:noFill/>
+        </p:spPr>
+        <p:txBody>
+          <a:bodyPr wrap="square">
+            <a:spAutoFit/>
+          </a:bodyPr>
+          <a:lstStyle/>
+          <a:p>
+            <a:pPr algn="l"/>
+            <a:r>
+              <a:rPr sz="950" b="0" i="0">
+                <a:solidFill>
+                  <a:srgbClr val="88FFCC"/>
+                </a:solidFill>
+              </a:rPr>
+              <a:t>  기존 인증·회원·프로비저닝 로직 보존</a:t>
+            </a:r>
+          </a:p>
+        </p:txBody>
+      </p:sp>
+      <p:sp>
+        <p:nvSpPr>
+          <p:cNvPr id="37" name="Rectangle 36"/>
+          <p:cNvSpPr/>
+          <p:nvPr/>
+        </p:nvSpPr>
+        <p:spPr>
+          <a:xfrm>
+            <a:off x="4571999" y="4407408"/>
+            <a:ext cx="3364992" cy="27432"/>
+          </a:xfrm>
+          <a:prstGeom prst="rect">
+            <a:avLst/>
+          </a:prstGeom>
+          <a:solidFill>
+            <a:srgbClr val="2A4A7A"/>
+          </a:solidFill>
+          <a:ln>
+            <a:noFill/>
+          </a:ln>
+        </p:spPr>
+        <p:style>
+          <a:lnRef idx="1">
+            <a:schemeClr val="accent1"/>
+          </a:lnRef>
+          <a:fillRef idx="3">
+            <a:schemeClr val="accent1"/>
+          </a:fillRef>
+          <a:effectRef idx="2">
+            <a:schemeClr val="accent1"/>
+          </a:effectRef>
+          <a:fontRef idx="minor">
+            <a:schemeClr val="lt1"/>
+          </a:fontRef>
+        </p:style>
+        <p:txBody>
+          <a:bodyPr rtlCol="0" anchor="ctr"/>
+          <a:lstStyle/>
+          <a:p>
+            <a:pPr algn="ctr"/>
+          </a:p>
+        </p:txBody>
+      </p:sp>
+      <p:sp>
+        <p:nvSpPr>
+          <p:cNvPr id="38" name="TextBox 37"/>
+          <p:cNvSpPr txBox="1"/>
+          <p:nvPr/>
+        </p:nvSpPr>
+        <p:spPr>
+          <a:xfrm>
+            <a:off x="4571999" y="4480560"/>
+            <a:ext cx="3383280" cy="292608"/>
+          </a:xfrm>
+          <a:prstGeom prst="rect">
+            <a:avLst/>
+          </a:prstGeom>
+          <a:noFill/>
+        </p:spPr>
+        <p:txBody>
+          <a:bodyPr wrap="square">
+            <a:spAutoFit/>
+          </a:bodyPr>
+          <a:lstStyle/>
+          <a:p>
+            <a:pPr algn="l"/>
+            <a:r>
+              <a:rPr sz="1000" b="1" i="0">
+                <a:solidFill>
+                  <a:srgbClr val="F58A07"/>
+                </a:solidFill>
+              </a:rPr>
+              <a:t>🔧 변경되는 것</a:t>
+            </a:r>
+          </a:p>
+        </p:txBody>
+      </p:sp>
+      <p:sp>
+        <p:nvSpPr>
+          <p:cNvPr id="39" name="TextBox 38"/>
+          <p:cNvSpPr txBox="1"/>
+          <p:nvPr/>
+        </p:nvSpPr>
+        <p:spPr>
+          <a:xfrm>
+            <a:off x="4571999" y="4809744"/>
+            <a:ext cx="3429000" cy="283464"/>
+          </a:xfrm>
+          <a:prstGeom prst="rect">
+            <a:avLst/>
+          </a:prstGeom>
+          <a:noFill/>
+        </p:spPr>
+        <p:txBody>
+          <a:bodyPr wrap="square">
+            <a:spAutoFit/>
+          </a:bodyPr>
+          <a:lstStyle/>
+          <a:p>
+            <a:pPr algn="l"/>
+            <a:r>
+              <a:rPr sz="950" b="0" i="0">
+                <a:solidFill>
+                  <a:srgbClr val="FFCC88"/>
+                </a:solidFill>
+              </a:rPr>
+              <a:t>호출자가 FE → ido로 바뀜 (내부 변경 없음)</a:t>
+            </a:r>
+          </a:p>
+        </p:txBody>
+      </p:sp>
+      <p:sp>
+        <p:nvSpPr>
+          <p:cNvPr id="40" name="TextBox 39"/>
+          <p:cNvSpPr txBox="1"/>
+          <p:nvPr/>
+        </p:nvSpPr>
+        <p:spPr>
+          <a:xfrm>
+            <a:off x="4571999" y="5111496"/>
+            <a:ext cx="3429000" cy="283464"/>
+          </a:xfrm>
+          <a:prstGeom prst="rect">
+            <a:avLst/>
+          </a:prstGeom>
+          <a:noFill/>
+        </p:spPr>
+        <p:txBody>
+          <a:bodyPr wrap="square">
+            <a:spAutoFit/>
+          </a:bodyPr>
+          <a:lstStyle/>
+          <a:p>
+            <a:pPr algn="l"/>
+            <a:r>
+              <a:rPr sz="950" b="0" i="0">
+                <a:solidFill>
+                  <a:srgbClr val="FFCC88"/>
+                </a:solidFill>
+              </a:rPr>
+              <a:t>관리자 기능: ido Admin API가 흡수</a:t>
+            </a:r>
+          </a:p>
+        </p:txBody>
+      </p:sp>
+      <p:sp>
+        <p:nvSpPr>
+          <p:cNvPr id="41" name="TextBox 40"/>
+          <p:cNvSpPr txBox="1"/>
+          <p:nvPr/>
+        </p:nvSpPr>
+        <p:spPr>
+          <a:xfrm>
+            <a:off x="4571999" y="5413248"/>
+            <a:ext cx="3429000" cy="283464"/>
+          </a:xfrm>
+          <a:prstGeom prst="rect">
+            <a:avLst/>
+          </a:prstGeom>
+          <a:noFill/>
+        </p:spPr>
+        <p:txBody>
+          <a:bodyPr wrap="square">
+            <a:spAutoFit/>
+          </a:bodyPr>
+          <a:lstStyle/>
+          <a:p>
+            <a:pPr algn="l"/>
+            <a:r>
+              <a:rPr sz="950" b="0" i="0">
+                <a:solidFill>
+                  <a:srgbClr val="AA9977"/>
+                </a:solidFill>
+              </a:rPr>
+              <a:t>  (Q-IM 관리자 UI → ido 관리자 UI로 이동)</a:t>
+            </a:r>
+          </a:p>
+        </p:txBody>
+      </p:sp>
+      <p:sp>
+        <p:nvSpPr>
+          <p:cNvPr id="42" name="TextBox 41"/>
+          <p:cNvSpPr txBox="1"/>
+          <p:nvPr/>
+        </p:nvSpPr>
+        <p:spPr>
+          <a:xfrm>
+            <a:off x="4571999" y="5715000"/>
+            <a:ext cx="3429000" cy="283464"/>
+          </a:xfrm>
+          <a:prstGeom prst="rect">
+            <a:avLst/>
+          </a:prstGeom>
+          <a:noFill/>
+        </p:spPr>
+        <p:txBody>
+          <a:bodyPr wrap="square">
+            <a:spAutoFit/>
+          </a:bodyPr>
+          <a:lstStyle/>
+          <a:p>
+            <a:pPr algn="l"/>
+            <a:r>
+              <a:rPr sz="950" b="0" i="0">
+                <a:solidFill>
+                  <a:srgbClr val="FFCC88"/>
+                </a:solidFill>
+              </a:rPr>
+              <a:t>신규 개발 없음 — 검토·확인 작업만</a:t>
+            </a:r>
+          </a:p>
+        </p:txBody>
+      </p:sp>
+      <p:sp>
+        <p:nvSpPr>
+          <p:cNvPr id="43" name="Rectangle 42"/>
+          <p:cNvSpPr/>
+          <p:nvPr/>
+        </p:nvSpPr>
+        <p:spPr>
+          <a:xfrm>
+            <a:off x="8229598" y="2176272"/>
+            <a:ext cx="3547872" cy="4343400"/>
+          </a:xfrm>
+          <a:prstGeom prst="rect">
+            <a:avLst/>
+          </a:prstGeom>
+          <a:solidFill>
+            <a:srgbClr val="0D2344"/>
+          </a:solidFill>
+          <a:ln>
+            <a:noFill/>
+          </a:ln>
+        </p:spPr>
+        <p:style>
+          <a:lnRef idx="1">
+            <a:schemeClr val="accent1"/>
+          </a:lnRef>
+          <a:fillRef idx="3">
+            <a:schemeClr val="accent1"/>
+          </a:fillRef>
+          <a:effectRef idx="2">
+            <a:schemeClr val="accent1"/>
+          </a:effectRef>
+          <a:fontRef idx="minor">
+            <a:schemeClr val="lt1"/>
+          </a:fontRef>
+        </p:style>
+        <p:txBody>
+          <a:bodyPr rtlCol="0" anchor="ctr"/>
+          <a:lstStyle/>
+          <a:p>
+            <a:pPr algn="ctr"/>
+          </a:p>
+        </p:txBody>
+      </p:sp>
+      <p:sp>
+        <p:nvSpPr>
+          <p:cNvPr id="44" name="Rectangle 43"/>
+          <p:cNvSpPr/>
+          <p:nvPr/>
+        </p:nvSpPr>
+        <p:spPr>
+          <a:xfrm>
+            <a:off x="8229598" y="2176272"/>
+            <a:ext cx="3547872" cy="621792"/>
+          </a:xfrm>
+          <a:prstGeom prst="rect">
+            <a:avLst/>
+          </a:prstGeom>
+          <a:solidFill>
+            <a:srgbClr val="1A5CBF"/>
+          </a:solidFill>
+          <a:ln>
+            <a:noFill/>
+          </a:ln>
+        </p:spPr>
+        <p:style>
+          <a:lnRef idx="1">
+            <a:schemeClr val="accent1"/>
+          </a:lnRef>
+          <a:fillRef idx="3">
+            <a:schemeClr val="accent1"/>
+          </a:fillRef>
+          <a:effectRef idx="2">
+            <a:schemeClr val="accent1"/>
+          </a:effectRef>
+          <a:fontRef idx="minor">
+            <a:schemeClr val="lt1"/>
+          </a:fontRef>
+        </p:style>
+        <p:txBody>
+          <a:bodyPr rtlCol="0" anchor="ctr"/>
+          <a:lstStyle/>
+          <a:p>
+            <a:pPr algn="ctr"/>
+          </a:p>
+        </p:txBody>
+      </p:sp>
+      <p:sp>
+        <p:nvSpPr>
+          <p:cNvPr id="45" name="TextBox 44"/>
+          <p:cNvSpPr txBox="1"/>
+          <p:nvPr/>
+        </p:nvSpPr>
+        <p:spPr>
+          <a:xfrm>
+            <a:off x="8229598" y="2176272"/>
+            <a:ext cx="2286000" cy="347472"/>
+          </a:xfrm>
+          <a:prstGeom prst="rect">
+            <a:avLst/>
+          </a:prstGeom>
+          <a:noFill/>
+        </p:spPr>
+        <p:txBody>
+          <a:bodyPr wrap="square">
+            <a:spAutoFit/>
+          </a:bodyPr>
+          <a:lstStyle/>
+          <a:p>
+            <a:pPr algn="ctr"/>
+            <a:r>
+              <a:rPr sz="1400" b="1" i="0">
+                <a:solidFill>
+                  <a:srgbClr val="FFFFFF"/>
+                </a:solidFill>
+              </a:rPr>
+              <a:t>ido / BE 팀</a:t>
+            </a:r>
+          </a:p>
+        </p:txBody>
+      </p:sp>
+      <p:sp>
+        <p:nvSpPr>
+          <p:cNvPr id="46" name="Rectangle 45"/>
+          <p:cNvSpPr/>
+          <p:nvPr/>
+        </p:nvSpPr>
+        <p:spPr>
+          <a:xfrm>
+            <a:off x="10561318" y="2221992"/>
+            <a:ext cx="1170432" cy="256032"/>
+          </a:xfrm>
+          <a:prstGeom prst="rect">
+            <a:avLst/>
+          </a:prstGeom>
+          <a:solidFill>
+            <a:srgbClr val="000000"/>
+          </a:solidFill>
+          <a:ln>
+            <a:noFill/>
+          </a:ln>
+        </p:spPr>
+        <p:style>
+          <a:lnRef idx="1">
+            <a:schemeClr val="accent1"/>
+          </a:lnRef>
+          <a:fillRef idx="3">
+            <a:schemeClr val="accent1"/>
+          </a:fillRef>
+          <a:effectRef idx="2">
+            <a:schemeClr val="accent1"/>
+          </a:effectRef>
+          <a:fontRef idx="minor">
+            <a:schemeClr val="lt1"/>
+          </a:fontRef>
+        </p:style>
+        <p:txBody>
+          <a:bodyPr rtlCol="0" anchor="ctr"/>
+          <a:lstStyle/>
+          <a:p>
+            <a:pPr algn="ctr"/>
+          </a:p>
+        </p:txBody>
+      </p:sp>
+      <p:sp>
+        <p:nvSpPr>
+          <p:cNvPr id="47" name="TextBox 46"/>
+          <p:cNvSpPr txBox="1"/>
+          <p:nvPr/>
+        </p:nvSpPr>
+        <p:spPr>
+          <a:xfrm>
+            <a:off x="10561318" y="2221992"/>
+            <a:ext cx="1170432" cy="256032"/>
+          </a:xfrm>
+          <a:prstGeom prst="rect">
+            <a:avLst/>
+          </a:prstGeom>
+          <a:noFill/>
+        </p:spPr>
+        <p:txBody>
+          <a:bodyPr wrap="square">
+            <a:spAutoFit/>
+          </a:bodyPr>
+          <a:lstStyle/>
+          <a:p>
+            <a:pPr algn="ctr"/>
+            <a:r>
+              <a:rPr sz="900" b="1" i="0">
+                <a:solidFill>
+                  <a:srgbClr val="1A5CBF"/>
+                </a:solidFill>
+              </a:rPr>
+              <a:t>소규모 추가</a:t>
+            </a:r>
+          </a:p>
+        </p:txBody>
+      </p:sp>
+      <p:sp>
+        <p:nvSpPr>
+          <p:cNvPr id="48" name="TextBox 47"/>
+          <p:cNvSpPr txBox="1"/>
+          <p:nvPr/>
+        </p:nvSpPr>
+        <p:spPr>
+          <a:xfrm>
+            <a:off x="8275318" y="2212848"/>
+            <a:ext cx="411480" cy="457200"/>
+          </a:xfrm>
+          <a:prstGeom prst="rect">
+            <a:avLst/>
+          </a:prstGeom>
+          <a:noFill/>
+        </p:spPr>
+        <p:txBody>
+          <a:bodyPr wrap="square">
+            <a:spAutoFit/>
+          </a:bodyPr>
+          <a:lstStyle/>
+          <a:p>
+            <a:pPr algn="l"/>
+            <a:r>
+              <a:rPr sz="1600" b="0" i="0">
+                <a:solidFill>
+                  <a:srgbClr val="FFFFFF"/>
+                </a:solidFill>
+              </a:rPr>
+              <a:t>🔷</a:t>
+            </a:r>
+          </a:p>
+        </p:txBody>
+      </p:sp>
+      <p:sp>
+        <p:nvSpPr>
+          <p:cNvPr id="49" name="TextBox 48"/>
+          <p:cNvSpPr txBox="1"/>
+          <p:nvPr/>
+        </p:nvSpPr>
+        <p:spPr>
+          <a:xfrm>
+            <a:off x="8321038" y="2871216"/>
+            <a:ext cx="3383280" cy="292608"/>
+          </a:xfrm>
+          <a:prstGeom prst="rect">
+            <a:avLst/>
+          </a:prstGeom>
+          <a:noFill/>
+        </p:spPr>
+        <p:txBody>
+          <a:bodyPr wrap="square">
+            <a:spAutoFit/>
+          </a:bodyPr>
+          <a:lstStyle/>
+          <a:p>
+            <a:pPr algn="l"/>
+            <a:r>
+              <a:rPr sz="1000" b="1" i="0">
+                <a:solidFill>
+                  <a:srgbClr val="00B072"/>
+                </a:solidFill>
+              </a:rPr>
+              <a:t>✅ 그대로 유지</a:t>
+            </a:r>
+          </a:p>
+        </p:txBody>
+      </p:sp>
+      <p:sp>
+        <p:nvSpPr>
+          <p:cNvPr id="50" name="TextBox 49"/>
+          <p:cNvSpPr txBox="1"/>
+          <p:nvPr/>
+        </p:nvSpPr>
+        <p:spPr>
+          <a:xfrm>
+            <a:off x="8321038" y="3163824"/>
+            <a:ext cx="3429000" cy="283464"/>
+          </a:xfrm>
+          <a:prstGeom prst="rect">
+            <a:avLst/>
+          </a:prstGeom>
+          <a:noFill/>
+        </p:spPr>
+        <p:txBody>
+          <a:bodyPr wrap="square">
+            <a:spAutoFit/>
+          </a:bodyPr>
+          <a:lstStyle/>
+          <a:p>
+            <a:pPr algn="l"/>
+            <a:r>
+              <a:rPr sz="950" b="0" i="0">
+                <a:solidFill>
+                  <a:srgbClr val="88FFCC"/>
+                </a:solidFill>
+              </a:rPr>
+              <a:t>  기존 7개 Auth API 구현 그대로 유지</a:t>
+            </a:r>
+          </a:p>
+        </p:txBody>
+      </p:sp>
+      <p:sp>
+        <p:nvSpPr>
+          <p:cNvPr id="51" name="TextBox 50"/>
+          <p:cNvSpPr txBox="1"/>
+          <p:nvPr/>
+        </p:nvSpPr>
+        <p:spPr>
+          <a:xfrm>
+            <a:off x="8321038" y="3465576"/>
+            <a:ext cx="3429000" cy="283464"/>
+          </a:xfrm>
+          <a:prstGeom prst="rect">
+            <a:avLst/>
+          </a:prstGeom>
+          <a:noFill/>
+        </p:spPr>
+        <p:txBody>
+          <a:bodyPr wrap="square">
+            <a:spAutoFit/>
+          </a:bodyPr>
+          <a:lstStyle/>
+          <a:p>
+            <a:pPr algn="l"/>
+            <a:r>
+              <a:rPr sz="950" b="0" i="0">
+                <a:solidFill>
+                  <a:srgbClr val="88FFCC"/>
+                </a:solidFill>
+              </a:rPr>
+              <a:t>  Kafka·Outbox 패턴 이미 구현 완료</a:t>
+            </a:r>
+          </a:p>
+        </p:txBody>
+      </p:sp>
+      <p:sp>
+        <p:nvSpPr>
+          <p:cNvPr id="52" name="TextBox 51"/>
+          <p:cNvSpPr txBox="1"/>
+          <p:nvPr/>
+        </p:nvSpPr>
+        <p:spPr>
+          <a:xfrm>
+            <a:off x="8321038" y="3767328"/>
+            <a:ext cx="3429000" cy="283464"/>
+          </a:xfrm>
+          <a:prstGeom prst="rect">
+            <a:avLst/>
+          </a:prstGeom>
+          <a:noFill/>
+        </p:spPr>
+        <p:txBody>
+          <a:bodyPr wrap="square">
+            <a:spAutoFit/>
+          </a:bodyPr>
+          <a:lstStyle/>
+          <a:p>
+            <a:pPr algn="l"/>
+            <a:r>
+              <a:rPr sz="950" b="0" i="0">
+                <a:solidFill>
+                  <a:srgbClr val="88FFCC"/>
+                </a:solidFill>
+              </a:rPr>
+              <a:t>  AgencyAdminController 9개 API 완성</a:t>
+            </a:r>
+          </a:p>
+        </p:txBody>
+      </p:sp>
+      <p:sp>
+        <p:nvSpPr>
+          <p:cNvPr id="53" name="TextBox 52"/>
+          <p:cNvSpPr txBox="1"/>
+          <p:nvPr/>
+        </p:nvSpPr>
+        <p:spPr>
+          <a:xfrm>
+            <a:off x="8321038" y="4069080"/>
+            <a:ext cx="3429000" cy="283464"/>
+          </a:xfrm>
+          <a:prstGeom prst="rect">
+            <a:avLst/>
+          </a:prstGeom>
+          <a:noFill/>
+        </p:spPr>
+        <p:txBody>
+          <a:bodyPr wrap="square">
+            <a:spAutoFit/>
+          </a:bodyPr>
+          <a:lstStyle/>
+          <a:p>
+            <a:pPr algn="l"/>
+            <a:r>
+              <a:rPr sz="950" b="0" i="0">
+                <a:solidFill>
+                  <a:srgbClr val="88FFCC"/>
+                </a:solidFill>
+              </a:rPr>
+              <a:t>  QimSpReceiverController proxy 완성</a:t>
+            </a:r>
+          </a:p>
+        </p:txBody>
+      </p:sp>
+      <p:sp>
+        <p:nvSpPr>
+          <p:cNvPr id="54" name="Rectangle 53"/>
+          <p:cNvSpPr/>
+          <p:nvPr/>
+        </p:nvSpPr>
+        <p:spPr>
+          <a:xfrm>
+            <a:off x="8321038" y="4407408"/>
+            <a:ext cx="3364992" cy="27432"/>
+          </a:xfrm>
+          <a:prstGeom prst="rect">
+            <a:avLst/>
+          </a:prstGeom>
+          <a:solidFill>
+            <a:srgbClr val="2A4A7A"/>
+          </a:solidFill>
+          <a:ln>
+            <a:noFill/>
+          </a:ln>
+        </p:spPr>
+        <p:style>
+          <a:lnRef idx="1">
+            <a:schemeClr val="accent1"/>
+          </a:lnRef>
+          <a:fillRef idx="3">
+            <a:schemeClr val="accent1"/>
+          </a:fillRef>
+          <a:effectRef idx="2">
+            <a:schemeClr val="accent1"/>
+          </a:effectRef>
+          <a:fontRef idx="minor">
+            <a:schemeClr val="lt1"/>
+          </a:fontRef>
+        </p:style>
+        <p:txBody>
+          <a:bodyPr rtlCol="0" anchor="ctr"/>
+          <a:lstStyle/>
+          <a:p>
+            <a:pPr algn="ctr"/>
+          </a:p>
+        </p:txBody>
+      </p:sp>
+      <p:sp>
+        <p:nvSpPr>
+          <p:cNvPr id="55" name="TextBox 54"/>
+          <p:cNvSpPr txBox="1"/>
+          <p:nvPr/>
+        </p:nvSpPr>
+        <p:spPr>
+          <a:xfrm>
+            <a:off x="8321038" y="4480560"/>
+            <a:ext cx="3383280" cy="292608"/>
+          </a:xfrm>
+          <a:prstGeom prst="rect">
+            <a:avLst/>
+          </a:prstGeom>
+          <a:noFill/>
+        </p:spPr>
+        <p:txBody>
+          <a:bodyPr wrap="square">
+            <a:spAutoFit/>
+          </a:bodyPr>
+          <a:lstStyle/>
+          <a:p>
+            <a:pPr algn="l"/>
+            <a:r>
+              <a:rPr sz="1000" b="1" i="0">
+                <a:solidFill>
+                  <a:srgbClr val="F58A07"/>
+                </a:solidFill>
+              </a:rPr>
+              <a:t>🔧 변경되는 것</a:t>
+            </a:r>
+          </a:p>
+        </p:txBody>
+      </p:sp>
+      <p:sp>
+        <p:nvSpPr>
+          <p:cNvPr id="56" name="TextBox 55"/>
+          <p:cNvSpPr txBox="1"/>
+          <p:nvPr/>
+        </p:nvSpPr>
+        <p:spPr>
+          <a:xfrm>
+            <a:off x="8321038" y="4809744"/>
+            <a:ext cx="3429000" cy="283464"/>
+          </a:xfrm>
+          <a:prstGeom prst="rect">
+            <a:avLst/>
+          </a:prstGeom>
+          <a:noFill/>
+        </p:spPr>
+        <p:txBody>
+          <a:bodyPr wrap="square">
+            <a:spAutoFit/>
+          </a:bodyPr>
+          <a:lstStyle/>
+          <a:p>
+            <a:pPr algn="l"/>
+            <a:r>
+              <a:rPr sz="950" b="0" i="0">
+                <a:solidFill>
+                  <a:srgbClr val="FFCC88"/>
+                </a:solidFill>
+              </a:rPr>
+              <a:t>/api/ext/** → Q-IM forward proxy 라우팅 추가</a:t>
+            </a:r>
+          </a:p>
+        </p:txBody>
+      </p:sp>
+      <p:sp>
+        <p:nvSpPr>
+          <p:cNvPr id="57" name="TextBox 56"/>
+          <p:cNvSpPr txBox="1"/>
+          <p:nvPr/>
+        </p:nvSpPr>
+        <p:spPr>
+          <a:xfrm>
+            <a:off x="8321038" y="5111496"/>
+            <a:ext cx="3429000" cy="283464"/>
+          </a:xfrm>
+          <a:prstGeom prst="rect">
+            <a:avLst/>
+          </a:prstGeom>
+          <a:noFill/>
+        </p:spPr>
+        <p:txBody>
+          <a:bodyPr wrap="square">
+            <a:spAutoFit/>
+          </a:bodyPr>
+          <a:lstStyle/>
+          <a:p>
+            <a:pPr algn="l"/>
+            <a:r>
+              <a:rPr sz="950" b="0" i="0">
+                <a:solidFill>
+                  <a:srgbClr val="AA9977"/>
+                </a:solidFill>
+              </a:rPr>
+              <a:t>  (QimSpReceiverController 패턴 재사용)</a:t>
+            </a:r>
+          </a:p>
+        </p:txBody>
+      </p:sp>
+      <p:sp>
+        <p:nvSpPr>
+          <p:cNvPr id="58" name="TextBox 57"/>
+          <p:cNvSpPr txBox="1"/>
+          <p:nvPr/>
+        </p:nvSpPr>
+        <p:spPr>
+          <a:xfrm>
+            <a:off x="8321038" y="5413248"/>
+            <a:ext cx="3429000" cy="283464"/>
+          </a:xfrm>
+          <a:prstGeom prst="rect">
+            <a:avLst/>
+          </a:prstGeom>
+          <a:noFill/>
+        </p:spPr>
+        <p:txBody>
+          <a:bodyPr wrap="square">
+            <a:spAutoFit/>
+          </a:bodyPr>
+          <a:lstStyle/>
+          <a:p>
+            <a:pPr algn="l"/>
+            <a:r>
+              <a:rPr sz="950" b="0" i="0">
+                <a:solidFill>
+                  <a:srgbClr val="FFCC88"/>
+                </a:solidFill>
+              </a:rPr>
+              <a:t>extInstance 26개 API forward 설정</a:t>
+            </a:r>
+          </a:p>
+        </p:txBody>
+      </p:sp>
+      <p:sp>
+        <p:nvSpPr>
+          <p:cNvPr id="59" name="TextBox 58"/>
+          <p:cNvSpPr txBox="1"/>
+          <p:nvPr/>
+        </p:nvSpPr>
+        <p:spPr>
+          <a:xfrm>
+            <a:off x="8321038" y="5715000"/>
+            <a:ext cx="3429000" cy="283464"/>
+          </a:xfrm>
+          <a:prstGeom prst="rect">
+            <a:avLst/>
+          </a:prstGeom>
+          <a:noFill/>
+        </p:spPr>
+        <p:txBody>
+          <a:bodyPr wrap="square">
+            <a:spAutoFit/>
+          </a:bodyPr>
+          <a:lstStyle/>
+          <a:p>
+            <a:pPr algn="l"/>
+            <a:r>
+              <a:rPr sz="950" b="0" i="0">
+                <a:solidFill>
+                  <a:srgbClr val="FFCC88"/>
+                </a:solidFill>
+              </a:rPr>
+              <a:t>인프라팀과 webpack proxy 경로 합의</a:t>
+            </a:r>
+          </a:p>
+        </p:txBody>
+      </p:sp>
+      <p:sp>
+        <p:nvSpPr>
+          <p:cNvPr id="60" name="Rectangle 59"/>
+          <p:cNvSpPr/>
+          <p:nvPr/>
+        </p:nvSpPr>
+        <p:spPr>
+          <a:xfrm>
+            <a:off x="731520" y="6510528"/>
+            <a:ext cx="10698480" cy="274320"/>
+          </a:xfrm>
+          <a:prstGeom prst="rect">
+            <a:avLst/>
+          </a:prstGeom>
+          <a:solidFill>
+            <a:srgbClr val="003A2A"/>
+          </a:solidFill>
+          <a:ln>
+            <a:noFill/>
+          </a:ln>
+        </p:spPr>
+        <p:style>
+          <a:lnRef idx="1">
+            <a:schemeClr val="accent1"/>
+          </a:lnRef>
+          <a:fillRef idx="3">
+            <a:schemeClr val="accent1"/>
+          </a:fillRef>
+          <a:effectRef idx="2">
+            <a:schemeClr val="accent1"/>
+          </a:effectRef>
+          <a:fontRef idx="minor">
+            <a:schemeClr val="lt1"/>
+          </a:fontRef>
+        </p:style>
+        <p:txBody>
+          <a:bodyPr rtlCol="0" anchor="ctr"/>
+          <a:lstStyle/>
+          <a:p>
+            <a:pPr algn="ctr"/>
+          </a:p>
+        </p:txBody>
+      </p:sp>
+      <p:sp>
+        <p:nvSpPr>
+          <p:cNvPr id="61" name="TextBox 60"/>
+          <p:cNvSpPr txBox="1"/>
+          <p:nvPr/>
+        </p:nvSpPr>
+        <p:spPr>
+          <a:xfrm>
+            <a:off x="777240" y="6519672"/>
+            <a:ext cx="10607040" cy="246888"/>
+          </a:xfrm>
+          <a:prstGeom prst="rect">
+            <a:avLst/>
+          </a:prstGeom>
+          <a:noFill/>
+        </p:spPr>
+        <p:txBody>
+          <a:bodyPr wrap="square">
+            <a:spAutoFit/>
+          </a:bodyPr>
+          <a:lstStyle/>
+          <a:p>
+            <a:pPr algn="ctr"/>
+            <a:r>
+              <a:rPr sz="1100" b="1" i="0">
+                <a:solidFill>
+                  <a:srgbClr val="00B072"/>
+                </a:solidFill>
+              </a:rPr>
+              <a:t>코드 재사용률 약 95%  |  각 팀 순 추가 개발량: FE ~3일  ·  Q-IM ~0일  ·  ido/BE ~5일  ·  인프라 ~1일</a:t>
+            </a:r>
+          </a:p>
+        </p:txBody>
+      </p:sp>
+    </p:spTree>
+  </p:cSld>
+  <p:clrMapOvr>
+    <a:masterClrMapping/>
+  </p:clrMapOvr>
+</p:sld>
+</file>
+
+<file path=ppt/slides/slide11.xml><?xml version="1.0" encoding="utf-8"?>
+<p:sld xmlns:a="http://schemas.openxmlformats.org/drawingml/2006/main" xmlns:p="http://schemas.openxmlformats.org/presentationml/2006/main" xmlns:r="http://schemas.openxmlformats.org/officeDocument/2006/relationships">
+  <p:cSld>
+    <p:bg>
+      <p:bgPr>
+        <a:solidFill>
+          <a:srgbClr val="0F2D52"/>
+        </a:solidFill>
+        <a:effectLst/>
+      </p:bgPr>
+    </p:bg>
+    <p:spTree>
+      <p:nvGrpSpPr>
+        <p:cNvPr id="1" name=""/>
+        <p:cNvGrpSpPr/>
+        <p:nvPr/>
+      </p:nvGrpSpPr>
+      <p:grpSpPr/>
+      <p:sp>
+        <p:nvSpPr>
+          <p:cNvPr id="2" name="Rectangle 1"/>
+          <p:cNvSpPr/>
+          <p:nvPr/>
+        </p:nvSpPr>
+        <p:spPr>
+          <a:xfrm>
+            <a:off x="0" y="0"/>
+            <a:ext cx="411480" cy="6858000"/>
+          </a:xfrm>
+          <a:prstGeom prst="rect">
+            <a:avLst/>
+          </a:prstGeom>
+          <a:solidFill>
+            <a:srgbClr val="00AED6"/>
+          </a:solidFill>
+          <a:ln>
+            <a:noFill/>
+          </a:ln>
+        </p:spPr>
+        <p:style>
+          <a:lnRef idx="1">
+            <a:schemeClr val="accent1"/>
+          </a:lnRef>
+          <a:fillRef idx="3">
+            <a:schemeClr val="accent1"/>
+          </a:fillRef>
+          <a:effectRef idx="2">
+            <a:schemeClr val="accent1"/>
+          </a:effectRef>
+          <a:fontRef idx="minor">
+            <a:schemeClr val="lt1"/>
+          </a:fontRef>
+        </p:style>
+        <p:txBody>
+          <a:bodyPr rtlCol="0" anchor="ctr"/>
+          <a:lstStyle/>
+          <a:p>
+            <a:pPr algn="ctr"/>
+          </a:p>
+        </p:txBody>
+      </p:sp>
+      <p:sp>
+        <p:nvSpPr>
+          <p:cNvPr id="3" name="TextBox 2"/>
+          <p:cNvSpPr txBox="1"/>
+          <p:nvPr/>
+        </p:nvSpPr>
+        <p:spPr>
+          <a:xfrm>
+            <a:off x="731520" y="256032"/>
+            <a:ext cx="4572000" cy="411480"/>
+          </a:xfrm>
+          <a:prstGeom prst="rect">
+            <a:avLst/>
+          </a:prstGeom>
+          <a:noFill/>
+        </p:spPr>
+        <p:txBody>
+          <a:bodyPr wrap="square">
+            <a:spAutoFit/>
+          </a:bodyPr>
+          <a:lstStyle/>
+          <a:p>
+            <a:pPr algn="l"/>
+            <a:r>
+              <a:rPr sz="1200" b="1" i="0">
+                <a:solidFill>
+                  <a:srgbClr val="00AED6"/>
+                </a:solidFill>
+              </a:rPr>
+              <a:t>08  전환 비용</a:t>
+            </a:r>
+          </a:p>
+        </p:txBody>
+      </p:sp>
+      <p:sp>
+        <p:nvSpPr>
+          <p:cNvPr id="4" name="TextBox 3"/>
+          <p:cNvSpPr txBox="1"/>
+          <p:nvPr/>
+        </p:nvSpPr>
+        <p:spPr>
+          <a:xfrm>
+            <a:off x="731520" y="640080"/>
+            <a:ext cx="10972800" cy="594360"/>
+          </a:xfrm>
+          <a:prstGeom prst="rect">
+            <a:avLst/>
+          </a:prstGeom>
+          <a:noFill/>
+        </p:spPr>
+        <p:txBody>
+          <a:bodyPr wrap="square">
+            <a:spAutoFit/>
+          </a:bodyPr>
+          <a:lstStyle/>
+          <a:p>
+            <a:pPr algn="l"/>
+            <a:r>
+              <a:rPr sz="2800" b="1" i="0">
+                <a:solidFill>
+                  <a:srgbClr val="FFFFFF"/>
+                </a:solidFill>
+              </a:rPr>
+              <a:t>이미 만들어진 것을 연결만 합니다</a:t>
+            </a:r>
+          </a:p>
+        </p:txBody>
+      </p:sp>
+      <p:sp>
+        <p:nvSpPr>
+          <p:cNvPr id="5" name="Rectangle 4"/>
+          <p:cNvSpPr/>
+          <p:nvPr/>
+        </p:nvSpPr>
+        <p:spPr>
+          <a:xfrm>
+            <a:off x="731520" y="1298448"/>
+            <a:ext cx="10698480" cy="45720"/>
+          </a:xfrm>
+          <a:prstGeom prst="rect">
+            <a:avLst/>
+          </a:prstGeom>
+          <a:solidFill>
+            <a:srgbClr val="2A4A7A"/>
+          </a:solidFill>
+          <a:ln>
+            <a:noFill/>
+          </a:ln>
+        </p:spPr>
+        <p:style>
+          <a:lnRef idx="1">
+            <a:schemeClr val="accent1"/>
+          </a:lnRef>
+          <a:fillRef idx="3">
+            <a:schemeClr val="accent1"/>
+          </a:fillRef>
+          <a:effectRef idx="2">
+            <a:schemeClr val="accent1"/>
+          </a:effectRef>
+          <a:fontRef idx="minor">
+            <a:schemeClr val="lt1"/>
+          </a:fontRef>
+        </p:style>
+        <p:txBody>
+          <a:bodyPr rtlCol="0" anchor="ctr"/>
+          <a:lstStyle/>
+          <a:p>
+            <a:pPr algn="ctr"/>
+          </a:p>
+        </p:txBody>
+      </p:sp>
+      <p:sp>
+        <p:nvSpPr>
+          <p:cNvPr id="6" name="Rectangle 5"/>
+          <p:cNvSpPr/>
+          <p:nvPr/>
+        </p:nvSpPr>
+        <p:spPr>
+          <a:xfrm>
+            <a:off x="731520" y="1444752"/>
+            <a:ext cx="5212080" cy="5120640"/>
+          </a:xfrm>
+          <a:prstGeom prst="rect">
+            <a:avLst/>
+          </a:prstGeom>
+          <a:solidFill>
+            <a:srgbClr val="0A1A38"/>
+          </a:solidFill>
+          <a:ln>
+            <a:noFill/>
+          </a:ln>
+        </p:spPr>
+        <p:style>
+          <a:lnRef idx="1">
+            <a:schemeClr val="accent1"/>
+          </a:lnRef>
+          <a:fillRef idx="3">
+            <a:schemeClr val="accent1"/>
+          </a:fillRef>
+          <a:effectRef idx="2">
+            <a:schemeClr val="accent1"/>
+          </a:effectRef>
+          <a:fontRef idx="minor">
+            <a:schemeClr val="lt1"/>
+          </a:fontRef>
+        </p:style>
+        <p:txBody>
+          <a:bodyPr rtlCol="0" anchor="ctr"/>
+          <a:lstStyle/>
+          <a:p>
+            <a:pPr algn="ctr"/>
+          </a:p>
+        </p:txBody>
+      </p:sp>
+      <p:sp>
+        <p:nvSpPr>
+          <p:cNvPr id="7" name="Rectangle 6"/>
+          <p:cNvSpPr/>
+          <p:nvPr/>
+        </p:nvSpPr>
+        <p:spPr>
+          <a:xfrm>
+            <a:off x="731520" y="1444752"/>
+            <a:ext cx="5212080" cy="384048"/>
+          </a:xfrm>
+          <a:prstGeom prst="rect">
+            <a:avLst/>
+          </a:prstGeom>
+          <a:solidFill>
+            <a:srgbClr val="00AED6"/>
+          </a:solidFill>
+          <a:ln>
+            <a:noFill/>
+          </a:ln>
+        </p:spPr>
+        <p:style>
+          <a:lnRef idx="1">
+            <a:schemeClr val="accent1"/>
+          </a:lnRef>
+          <a:fillRef idx="3">
+            <a:schemeClr val="accent1"/>
+          </a:fillRef>
+          <a:effectRef idx="2">
+            <a:schemeClr val="accent1"/>
+          </a:effectRef>
+          <a:fontRef idx="minor">
+            <a:schemeClr val="lt1"/>
+          </a:fontRef>
+        </p:style>
+        <p:txBody>
+          <a:bodyPr rtlCol="0" anchor="ctr"/>
+          <a:lstStyle/>
+          <a:p>
+            <a:pPr algn="ctr"/>
+          </a:p>
+        </p:txBody>
+      </p:sp>
+      <p:sp>
+        <p:nvSpPr>
+          <p:cNvPr id="8" name="TextBox 7"/>
+          <p:cNvSpPr txBox="1"/>
+          <p:nvPr/>
+        </p:nvSpPr>
+        <p:spPr>
+          <a:xfrm>
+            <a:off x="749808" y="1463040"/>
+            <a:ext cx="5175504" cy="347472"/>
+          </a:xfrm>
+          <a:prstGeom prst="rect">
+            <a:avLst/>
+          </a:prstGeom>
+          <a:noFill/>
+        </p:spPr>
+        <p:txBody>
+          <a:bodyPr wrap="square">
+            <a:spAutoFit/>
+          </a:bodyPr>
+          <a:lstStyle/>
+          <a:p>
+            <a:pPr algn="ctr"/>
+            <a:r>
+              <a:rPr sz="1200" b="1" i="0">
+                <a:solidFill>
+                  <a:srgbClr val="0F2D52"/>
+                </a:solidFill>
+              </a:rPr>
+              <a:t>Q-IM 관리자 → ido 관리자로 흡수</a:t>
+            </a:r>
+          </a:p>
+        </p:txBody>
+      </p:sp>
+      <p:sp>
+        <p:nvSpPr>
+          <p:cNvPr id="9" name="TextBox 8"/>
+          <p:cNvSpPr txBox="1"/>
+          <p:nvPr/>
+        </p:nvSpPr>
+        <p:spPr>
+          <a:xfrm>
+            <a:off x="822960" y="1901952"/>
+            <a:ext cx="5029200" cy="320040"/>
+          </a:xfrm>
+          <a:prstGeom prst="rect">
+            <a:avLst/>
+          </a:prstGeom>
+          <a:noFill/>
+        </p:spPr>
+        <p:txBody>
+          <a:bodyPr wrap="square">
+            <a:spAutoFit/>
+          </a:bodyPr>
+          <a:lstStyle/>
+          <a:p>
+            <a:pPr algn="l"/>
+            <a:r>
+              <a:rPr sz="1050" b="1" i="0">
+                <a:solidFill>
+                  <a:srgbClr val="00AED6"/>
+                </a:solidFill>
+              </a:rPr>
+              <a:t>ido AgencyAdminController — 이미 구현 완료</a:t>
+            </a:r>
+          </a:p>
+        </p:txBody>
+      </p:sp>
+      <p:sp>
+        <p:nvSpPr>
+          <p:cNvPr id="10" name="Rectangle 9"/>
+          <p:cNvSpPr/>
+          <p:nvPr/>
+        </p:nvSpPr>
+        <p:spPr>
+          <a:xfrm>
+            <a:off x="822960" y="2286000"/>
+            <a:ext cx="457200" cy="256032"/>
+          </a:xfrm>
+          <a:prstGeom prst="rect">
+            <a:avLst/>
+          </a:prstGeom>
+          <a:solidFill>
+            <a:srgbClr val="1A5CBF"/>
+          </a:solidFill>
+          <a:ln>
+            <a:noFill/>
+          </a:ln>
+        </p:spPr>
+        <p:style>
+          <a:lnRef idx="1">
+            <a:schemeClr val="accent1"/>
+          </a:lnRef>
+          <a:fillRef idx="3">
+            <a:schemeClr val="accent1"/>
+          </a:fillRef>
+          <a:effectRef idx="2">
+            <a:schemeClr val="accent1"/>
+          </a:effectRef>
+          <a:fontRef idx="minor">
+            <a:schemeClr val="lt1"/>
+          </a:fontRef>
+        </p:style>
+        <p:txBody>
+          <a:bodyPr rtlCol="0" anchor="ctr"/>
+          <a:lstStyle/>
+          <a:p>
+            <a:pPr algn="ctr"/>
+          </a:p>
+        </p:txBody>
+      </p:sp>
+      <p:sp>
+        <p:nvSpPr>
+          <p:cNvPr id="11" name="TextBox 10"/>
+          <p:cNvSpPr txBox="1"/>
+          <p:nvPr/>
+        </p:nvSpPr>
+        <p:spPr>
+          <a:xfrm>
+            <a:off x="822960" y="2286000"/>
+            <a:ext cx="457200" cy="256032"/>
+          </a:xfrm>
+          <a:prstGeom prst="rect">
+            <a:avLst/>
+          </a:prstGeom>
+          <a:noFill/>
+        </p:spPr>
+        <p:txBody>
+          <a:bodyPr wrap="square">
+            <a:spAutoFit/>
+          </a:bodyPr>
+          <a:lstStyle/>
+          <a:p>
+            <a:pPr algn="ctr"/>
+            <a:r>
+              <a:rPr sz="800" b="1" i="0">
+                <a:solidFill>
+                  <a:srgbClr val="FFFFFF"/>
+                </a:solidFill>
+              </a:rPr>
+              <a:t>POST</a:t>
+            </a:r>
+          </a:p>
+        </p:txBody>
+      </p:sp>
+      <p:sp>
+        <p:nvSpPr>
+          <p:cNvPr id="12" name="TextBox 11"/>
+          <p:cNvSpPr txBox="1"/>
+          <p:nvPr/>
+        </p:nvSpPr>
+        <p:spPr>
+          <a:xfrm>
+            <a:off x="1353312" y="2286000"/>
+            <a:ext cx="2926080" cy="256032"/>
+          </a:xfrm>
+          <a:prstGeom prst="rect">
+            <a:avLst/>
+          </a:prstGeom>
+          <a:noFill/>
+        </p:spPr>
+        <p:txBody>
+          <a:bodyPr wrap="square">
+            <a:spAutoFit/>
+          </a:bodyPr>
+          <a:lstStyle/>
+          <a:p>
+            <a:pPr algn="l"/>
+            <a:r>
+              <a:rPr sz="850" b="0" i="0">
+                <a:solidFill>
+                  <a:srgbClr val="88CCFF"/>
+                </a:solidFill>
+              </a:rPr>
+              <a:t>/api/v1/admin/agencies</a:t>
+            </a:r>
+          </a:p>
+        </p:txBody>
+      </p:sp>
+      <p:sp>
+        <p:nvSpPr>
+          <p:cNvPr id="13" name="TextBox 12"/>
+          <p:cNvSpPr txBox="1"/>
+          <p:nvPr/>
+        </p:nvSpPr>
+        <p:spPr>
+          <a:xfrm>
+            <a:off x="4297680" y="2286000"/>
+            <a:ext cx="1508760" cy="256032"/>
+          </a:xfrm>
+          <a:prstGeom prst="rect">
+            <a:avLst/>
+          </a:prstGeom>
+          <a:noFill/>
+        </p:spPr>
+        <p:txBody>
+          <a:bodyPr wrap="square">
+            <a:spAutoFit/>
+          </a:bodyPr>
+          <a:lstStyle/>
+          <a:p>
+            <a:pPr algn="l"/>
+            <a:r>
+              <a:rPr sz="850" b="0" i="0">
+                <a:solidFill>
+                  <a:srgbClr val="888899"/>
+                </a:solidFill>
+              </a:rPr>
+              <a:t>기관 등록</a:t>
+            </a:r>
+          </a:p>
+        </p:txBody>
+      </p:sp>
+      <p:sp>
+        <p:nvSpPr>
+          <p:cNvPr id="14" name="Rectangle 13"/>
+          <p:cNvSpPr/>
+          <p:nvPr/>
+        </p:nvSpPr>
+        <p:spPr>
+          <a:xfrm>
+            <a:off x="822960" y="2606040"/>
+            <a:ext cx="457200" cy="256032"/>
+          </a:xfrm>
+          <a:prstGeom prst="rect">
+            <a:avLst/>
+          </a:prstGeom>
+          <a:solidFill>
+            <a:srgbClr val="00B072"/>
+          </a:solidFill>
+          <a:ln>
+            <a:noFill/>
+          </a:ln>
+        </p:spPr>
+        <p:style>
+          <a:lnRef idx="1">
+            <a:schemeClr val="accent1"/>
+          </a:lnRef>
+          <a:fillRef idx="3">
+            <a:schemeClr val="accent1"/>
+          </a:fillRef>
+          <a:effectRef idx="2">
+            <a:schemeClr val="accent1"/>
+          </a:effectRef>
+          <a:fontRef idx="minor">
+            <a:schemeClr val="lt1"/>
+          </a:fontRef>
+        </p:style>
+        <p:txBody>
+          <a:bodyPr rtlCol="0" anchor="ctr"/>
+          <a:lstStyle/>
+          <a:p>
+            <a:pPr algn="ctr"/>
+          </a:p>
+        </p:txBody>
+      </p:sp>
+      <p:sp>
+        <p:nvSpPr>
+          <p:cNvPr id="15" name="TextBox 14"/>
+          <p:cNvSpPr txBox="1"/>
+          <p:nvPr/>
+        </p:nvSpPr>
+        <p:spPr>
+          <a:xfrm>
+            <a:off x="822960" y="2606040"/>
+            <a:ext cx="457200" cy="256032"/>
+          </a:xfrm>
+          <a:prstGeom prst="rect">
+            <a:avLst/>
+          </a:prstGeom>
+          <a:noFill/>
+        </p:spPr>
+        <p:txBody>
+          <a:bodyPr wrap="square">
+            <a:spAutoFit/>
+          </a:bodyPr>
+          <a:lstStyle/>
+          <a:p>
+            <a:pPr algn="ctr"/>
+            <a:r>
+              <a:rPr sz="800" b="1" i="0">
+                <a:solidFill>
+                  <a:srgbClr val="FFFFFF"/>
+                </a:solidFill>
+              </a:rPr>
+              <a:t>GET</a:t>
+            </a:r>
+          </a:p>
+        </p:txBody>
+      </p:sp>
+      <p:sp>
+        <p:nvSpPr>
+          <p:cNvPr id="16" name="TextBox 15"/>
+          <p:cNvSpPr txBox="1"/>
+          <p:nvPr/>
+        </p:nvSpPr>
+        <p:spPr>
+          <a:xfrm>
+            <a:off x="1353312" y="2606040"/>
+            <a:ext cx="2926080" cy="256032"/>
+          </a:xfrm>
+          <a:prstGeom prst="rect">
+            <a:avLst/>
+          </a:prstGeom>
+          <a:noFill/>
+        </p:spPr>
+        <p:txBody>
+          <a:bodyPr wrap="square">
+            <a:spAutoFit/>
+          </a:bodyPr>
+          <a:lstStyle/>
+          <a:p>
+            <a:pPr algn="l"/>
+            <a:r>
+              <a:rPr sz="850" b="0" i="0">
+                <a:solidFill>
+                  <a:srgbClr val="88CCFF"/>
+                </a:solidFill>
+              </a:rPr>
+              <a:t>/api/v1/admin/agencies</a:t>
+            </a:r>
+          </a:p>
+        </p:txBody>
+      </p:sp>
+      <p:sp>
+        <p:nvSpPr>
+          <p:cNvPr id="17" name="TextBox 16"/>
+          <p:cNvSpPr txBox="1"/>
+          <p:nvPr/>
+        </p:nvSpPr>
+        <p:spPr>
+          <a:xfrm>
+            <a:off x="4297680" y="2606040"/>
+            <a:ext cx="1508760" cy="256032"/>
+          </a:xfrm>
+          <a:prstGeom prst="rect">
+            <a:avLst/>
+          </a:prstGeom>
+          <a:noFill/>
+        </p:spPr>
+        <p:txBody>
+          <a:bodyPr wrap="square">
+            <a:spAutoFit/>
+          </a:bodyPr>
+          <a:lstStyle/>
+          <a:p>
+            <a:pPr algn="l"/>
+            <a:r>
+              <a:rPr sz="850" b="0" i="0">
+                <a:solidFill>
+                  <a:srgbClr val="888899"/>
+                </a:solidFill>
+              </a:rPr>
+              <a:t>기관 목록 조회</a:t>
+            </a:r>
+          </a:p>
+        </p:txBody>
+      </p:sp>
+      <p:sp>
+        <p:nvSpPr>
+          <p:cNvPr id="18" name="Rectangle 17"/>
+          <p:cNvSpPr/>
+          <p:nvPr/>
+        </p:nvSpPr>
+        <p:spPr>
+          <a:xfrm>
+            <a:off x="822960" y="2926080"/>
+            <a:ext cx="457200" cy="256032"/>
+          </a:xfrm>
+          <a:prstGeom prst="rect">
+            <a:avLst/>
+          </a:prstGeom>
+          <a:solidFill>
+            <a:srgbClr val="F58A07"/>
+          </a:solidFill>
+          <a:ln>
+            <a:noFill/>
+          </a:ln>
+        </p:spPr>
+        <p:style>
+          <a:lnRef idx="1">
+            <a:schemeClr val="accent1"/>
+          </a:lnRef>
+          <a:fillRef idx="3">
+            <a:schemeClr val="accent1"/>
+          </a:fillRef>
+          <a:effectRef idx="2">
+            <a:schemeClr val="accent1"/>
+          </a:effectRef>
+          <a:fontRef idx="minor">
+            <a:schemeClr val="lt1"/>
+          </a:fontRef>
+        </p:style>
+        <p:txBody>
+          <a:bodyPr rtlCol="0" anchor="ctr"/>
+          <a:lstStyle/>
+          <a:p>
+            <a:pPr algn="ctr"/>
+          </a:p>
+        </p:txBody>
+      </p:sp>
+      <p:sp>
+        <p:nvSpPr>
+          <p:cNvPr id="19" name="TextBox 18"/>
+          <p:cNvSpPr txBox="1"/>
+          <p:nvPr/>
+        </p:nvSpPr>
+        <p:spPr>
+          <a:xfrm>
+            <a:off x="822960" y="2926080"/>
+            <a:ext cx="457200" cy="256032"/>
+          </a:xfrm>
+          <a:prstGeom prst="rect">
+            <a:avLst/>
+          </a:prstGeom>
+          <a:noFill/>
+        </p:spPr>
+        <p:txBody>
+          <a:bodyPr wrap="square">
+            <a:spAutoFit/>
+          </a:bodyPr>
+          <a:lstStyle/>
+          <a:p>
+            <a:pPr algn="ctr"/>
+            <a:r>
+              <a:rPr sz="800" b="1" i="0">
+                <a:solidFill>
+                  <a:srgbClr val="FFFFFF"/>
+                </a:solidFill>
+              </a:rPr>
+              <a:t>PUT</a:t>
+            </a:r>
+          </a:p>
+        </p:txBody>
+      </p:sp>
+      <p:sp>
+        <p:nvSpPr>
+          <p:cNvPr id="20" name="TextBox 19"/>
+          <p:cNvSpPr txBox="1"/>
+          <p:nvPr/>
+        </p:nvSpPr>
+        <p:spPr>
+          <a:xfrm>
+            <a:off x="1353312" y="2926080"/>
+            <a:ext cx="2926080" cy="256032"/>
+          </a:xfrm>
+          <a:prstGeom prst="rect">
+            <a:avLst/>
+          </a:prstGeom>
+          <a:noFill/>
+        </p:spPr>
+        <p:txBody>
+          <a:bodyPr wrap="square">
+            <a:spAutoFit/>
+          </a:bodyPr>
+          <a:lstStyle/>
+          <a:p>
+            <a:pPr algn="l"/>
+            <a:r>
+              <a:rPr sz="850" b="0" i="0">
+                <a:solidFill>
+                  <a:srgbClr val="88CCFF"/>
+                </a:solidFill>
+              </a:rPr>
+              <a:t>/api/v1/admin/agencies/{code}</a:t>
+            </a:r>
+          </a:p>
+        </p:txBody>
+      </p:sp>
+      <p:sp>
+        <p:nvSpPr>
+          <p:cNvPr id="21" name="TextBox 20"/>
+          <p:cNvSpPr txBox="1"/>
+          <p:nvPr/>
+        </p:nvSpPr>
+        <p:spPr>
+          <a:xfrm>
+            <a:off x="4297680" y="2926080"/>
+            <a:ext cx="1508760" cy="256032"/>
+          </a:xfrm>
+          <a:prstGeom prst="rect">
+            <a:avLst/>
+          </a:prstGeom>
+          <a:noFill/>
+        </p:spPr>
+        <p:txBody>
+          <a:bodyPr wrap="square">
+            <a:spAutoFit/>
+          </a:bodyPr>
+          <a:lstStyle/>
+          <a:p>
+            <a:pPr algn="l"/>
+            <a:r>
+              <a:rPr sz="850" b="0" i="0">
+                <a:solidFill>
+                  <a:srgbClr val="888899"/>
+                </a:solidFill>
+              </a:rPr>
+              <a:t>기관 정보 수정</a:t>
+            </a:r>
+          </a:p>
+        </p:txBody>
+      </p:sp>
+      <p:sp>
+        <p:nvSpPr>
+          <p:cNvPr id="22" name="Rectangle 21"/>
+          <p:cNvSpPr/>
+          <p:nvPr/>
+        </p:nvSpPr>
+        <p:spPr>
+          <a:xfrm>
+            <a:off x="822960" y="3246120"/>
+            <a:ext cx="457200" cy="256032"/>
+          </a:xfrm>
+          <a:prstGeom prst="rect">
+            <a:avLst/>
+          </a:prstGeom>
+          <a:solidFill>
+            <a:srgbClr val="1A5CBF"/>
+          </a:solidFill>
+          <a:ln>
+            <a:noFill/>
+          </a:ln>
+        </p:spPr>
+        <p:style>
+          <a:lnRef idx="1">
+            <a:schemeClr val="accent1"/>
+          </a:lnRef>
+          <a:fillRef idx="3">
+            <a:schemeClr val="accent1"/>
+          </a:fillRef>
+          <a:effectRef idx="2">
+            <a:schemeClr val="accent1"/>
+          </a:effectRef>
+          <a:fontRef idx="minor">
+            <a:schemeClr val="lt1"/>
+          </a:fontRef>
+        </p:style>
+        <p:txBody>
+          <a:bodyPr rtlCol="0" anchor="ctr"/>
+          <a:lstStyle/>
+          <a:p>
+            <a:pPr algn="ctr"/>
+          </a:p>
+        </p:txBody>
+      </p:sp>
+      <p:sp>
+        <p:nvSpPr>
+          <p:cNvPr id="23" name="TextBox 22"/>
+          <p:cNvSpPr txBox="1"/>
+          <p:nvPr/>
+        </p:nvSpPr>
+        <p:spPr>
+          <a:xfrm>
+            <a:off x="822960" y="3246120"/>
+            <a:ext cx="457200" cy="256032"/>
+          </a:xfrm>
+          <a:prstGeom prst="rect">
+            <a:avLst/>
+          </a:prstGeom>
+          <a:noFill/>
+        </p:spPr>
+        <p:txBody>
+          <a:bodyPr wrap="square">
+            <a:spAutoFit/>
+          </a:bodyPr>
+          <a:lstStyle/>
+          <a:p>
+            <a:pPr algn="ctr"/>
+            <a:r>
+              <a:rPr sz="800" b="1" i="0">
+                <a:solidFill>
+                  <a:srgbClr val="FFFFFF"/>
+                </a:solidFill>
+              </a:rPr>
+              <a:t>POST</a:t>
+            </a:r>
+          </a:p>
+        </p:txBody>
+      </p:sp>
+      <p:sp>
+        <p:nvSpPr>
+          <p:cNvPr id="24" name="TextBox 23"/>
+          <p:cNvSpPr txBox="1"/>
+          <p:nvPr/>
+        </p:nvSpPr>
+        <p:spPr>
+          <a:xfrm>
+            <a:off x="1353312" y="3246120"/>
+            <a:ext cx="2926080" cy="256032"/>
+          </a:xfrm>
+          <a:prstGeom prst="rect">
+            <a:avLst/>
+          </a:prstGeom>
+          <a:noFill/>
+        </p:spPr>
+        <p:txBody>
+          <a:bodyPr wrap="square">
+            <a:spAutoFit/>
+          </a:bodyPr>
+          <a:lstStyle/>
+          <a:p>
+            <a:pPr algn="l"/>
+            <a:r>
+              <a:rPr sz="850" b="0" i="0">
+                <a:solidFill>
+                  <a:srgbClr val="88CCFF"/>
+                </a:solidFill>
+              </a:rPr>
+              <a:t>/api/v1/admin/agencies/{code}/activate</a:t>
+            </a:r>
+          </a:p>
+        </p:txBody>
+      </p:sp>
+      <p:sp>
+        <p:nvSpPr>
+          <p:cNvPr id="25" name="TextBox 24"/>
+          <p:cNvSpPr txBox="1"/>
+          <p:nvPr/>
+        </p:nvSpPr>
+        <p:spPr>
+          <a:xfrm>
+            <a:off x="4297680" y="3246120"/>
+            <a:ext cx="1508760" cy="256032"/>
+          </a:xfrm>
+          <a:prstGeom prst="rect">
+            <a:avLst/>
+          </a:prstGeom>
+          <a:noFill/>
+        </p:spPr>
+        <p:txBody>
+          <a:bodyPr wrap="square">
+            <a:spAutoFit/>
+          </a:bodyPr>
+          <a:lstStyle/>
+          <a:p>
+            <a:pPr algn="l"/>
+            <a:r>
+              <a:rPr sz="850" b="0" i="0">
+                <a:solidFill>
+                  <a:srgbClr val="888899"/>
+                </a:solidFill>
+              </a:rPr>
+              <a:t>기관 활성화</a:t>
+            </a:r>
+          </a:p>
+        </p:txBody>
+      </p:sp>
+      <p:sp>
+        <p:nvSpPr>
+          <p:cNvPr id="26" name="Rectangle 25"/>
+          <p:cNvSpPr/>
+          <p:nvPr/>
+        </p:nvSpPr>
+        <p:spPr>
+          <a:xfrm>
+            <a:off x="822960" y="3566160"/>
+            <a:ext cx="457200" cy="256032"/>
+          </a:xfrm>
+          <a:prstGeom prst="rect">
+            <a:avLst/>
+          </a:prstGeom>
+          <a:solidFill>
+            <a:srgbClr val="1A5CBF"/>
+          </a:solidFill>
+          <a:ln>
+            <a:noFill/>
+          </a:ln>
+        </p:spPr>
+        <p:style>
+          <a:lnRef idx="1">
+            <a:schemeClr val="accent1"/>
+          </a:lnRef>
+          <a:fillRef idx="3">
+            <a:schemeClr val="accent1"/>
+          </a:fillRef>
+          <a:effectRef idx="2">
+            <a:schemeClr val="accent1"/>
+          </a:effectRef>
+          <a:fontRef idx="minor">
+            <a:schemeClr val="lt1"/>
+          </a:fontRef>
+        </p:style>
+        <p:txBody>
+          <a:bodyPr rtlCol="0" anchor="ctr"/>
+          <a:lstStyle/>
+          <a:p>
+            <a:pPr algn="ctr"/>
+          </a:p>
+        </p:txBody>
+      </p:sp>
+      <p:sp>
+        <p:nvSpPr>
+          <p:cNvPr id="27" name="TextBox 26"/>
+          <p:cNvSpPr txBox="1"/>
+          <p:nvPr/>
+        </p:nvSpPr>
+        <p:spPr>
+          <a:xfrm>
+            <a:off x="822960" y="3566160"/>
+            <a:ext cx="457200" cy="256032"/>
+          </a:xfrm>
+          <a:prstGeom prst="rect">
+            <a:avLst/>
+          </a:prstGeom>
+          <a:noFill/>
+        </p:spPr>
+        <p:txBody>
+          <a:bodyPr wrap="square">
+            <a:spAutoFit/>
+          </a:bodyPr>
+          <a:lstStyle/>
+          <a:p>
+            <a:pPr algn="ctr"/>
+            <a:r>
+              <a:rPr sz="800" b="1" i="0">
+                <a:solidFill>
+                  <a:srgbClr val="FFFFFF"/>
+                </a:solidFill>
+              </a:rPr>
+              <a:t>POST</a:t>
+            </a:r>
+          </a:p>
+        </p:txBody>
+      </p:sp>
+      <p:sp>
+        <p:nvSpPr>
+          <p:cNvPr id="28" name="TextBox 27"/>
+          <p:cNvSpPr txBox="1"/>
+          <p:nvPr/>
+        </p:nvSpPr>
+        <p:spPr>
+          <a:xfrm>
+            <a:off x="1353312" y="3566160"/>
+            <a:ext cx="2926080" cy="256032"/>
+          </a:xfrm>
+          <a:prstGeom prst="rect">
+            <a:avLst/>
+          </a:prstGeom>
+          <a:noFill/>
+        </p:spPr>
+        <p:txBody>
+          <a:bodyPr wrap="square">
+            <a:spAutoFit/>
+          </a:bodyPr>
+          <a:lstStyle/>
+          <a:p>
+            <a:pPr algn="l"/>
+            <a:r>
+              <a:rPr sz="850" b="0" i="0">
+                <a:solidFill>
+                  <a:srgbClr val="88CCFF"/>
+                </a:solidFill>
+              </a:rPr>
+              <a:t>/api/v1/admin/agencies/{code}/deactivate</a:t>
+            </a:r>
+          </a:p>
+        </p:txBody>
+      </p:sp>
+      <p:sp>
+        <p:nvSpPr>
+          <p:cNvPr id="29" name="TextBox 28"/>
+          <p:cNvSpPr txBox="1"/>
+          <p:nvPr/>
+        </p:nvSpPr>
+        <p:spPr>
+          <a:xfrm>
+            <a:off x="4297680" y="3566160"/>
+            <a:ext cx="1508760" cy="256032"/>
+          </a:xfrm>
+          <a:prstGeom prst="rect">
+            <a:avLst/>
+          </a:prstGeom>
+          <a:noFill/>
+        </p:spPr>
+        <p:txBody>
+          <a:bodyPr wrap="square">
+            <a:spAutoFit/>
+          </a:bodyPr>
+          <a:lstStyle/>
+          <a:p>
+            <a:pPr algn="l"/>
+            <a:r>
+              <a:rPr sz="850" b="0" i="0">
+                <a:solidFill>
+                  <a:srgbClr val="888899"/>
+                </a:solidFill>
+              </a:rPr>
+              <a:t>기관 비활성화</a:t>
+            </a:r>
+          </a:p>
+        </p:txBody>
+      </p:sp>
+      <p:sp>
+        <p:nvSpPr>
+          <p:cNvPr id="30" name="Rectangle 29"/>
+          <p:cNvSpPr/>
+          <p:nvPr/>
+        </p:nvSpPr>
+        <p:spPr>
+          <a:xfrm>
+            <a:off x="822960" y="3886200"/>
+            <a:ext cx="457200" cy="256032"/>
+          </a:xfrm>
+          <a:prstGeom prst="rect">
+            <a:avLst/>
+          </a:prstGeom>
+          <a:solidFill>
+            <a:srgbClr val="1A5CBF"/>
+          </a:solidFill>
+          <a:ln>
+            <a:noFill/>
+          </a:ln>
+        </p:spPr>
+        <p:style>
+          <a:lnRef idx="1">
+            <a:schemeClr val="accent1"/>
+          </a:lnRef>
+          <a:fillRef idx="3">
+            <a:schemeClr val="accent1"/>
+          </a:fillRef>
+          <a:effectRef idx="2">
+            <a:schemeClr val="accent1"/>
+          </a:effectRef>
+          <a:fontRef idx="minor">
+            <a:schemeClr val="lt1"/>
+          </a:fontRef>
+        </p:style>
+        <p:txBody>
+          <a:bodyPr rtlCol="0" anchor="ctr"/>
+          <a:lstStyle/>
+          <a:p>
+            <a:pPr algn="ctr"/>
+          </a:p>
+        </p:txBody>
+      </p:sp>
+      <p:sp>
+        <p:nvSpPr>
+          <p:cNvPr id="31" name="TextBox 30"/>
+          <p:cNvSpPr txBox="1"/>
+          <p:nvPr/>
+        </p:nvSpPr>
+        <p:spPr>
+          <a:xfrm>
+            <a:off x="822960" y="3886200"/>
+            <a:ext cx="457200" cy="256032"/>
+          </a:xfrm>
+          <a:prstGeom prst="rect">
+            <a:avLst/>
+          </a:prstGeom>
+          <a:noFill/>
+        </p:spPr>
+        <p:txBody>
+          <a:bodyPr wrap="square">
+            <a:spAutoFit/>
+          </a:bodyPr>
+          <a:lstStyle/>
+          <a:p>
+            <a:pPr algn="ctr"/>
+            <a:r>
+              <a:rPr sz="800" b="1" i="0">
+                <a:solidFill>
+                  <a:srgbClr val="FFFFFF"/>
+                </a:solidFill>
+              </a:rPr>
+              <a:t>POST</a:t>
+            </a:r>
+          </a:p>
+        </p:txBody>
+      </p:sp>
+      <p:sp>
+        <p:nvSpPr>
+          <p:cNvPr id="32" name="TextBox 31"/>
+          <p:cNvSpPr txBox="1"/>
+          <p:nvPr/>
+        </p:nvSpPr>
+        <p:spPr>
+          <a:xfrm>
+            <a:off x="1353312" y="3886200"/>
+            <a:ext cx="2926080" cy="256032"/>
+          </a:xfrm>
+          <a:prstGeom prst="rect">
+            <a:avLst/>
+          </a:prstGeom>
+          <a:noFill/>
+        </p:spPr>
+        <p:txBody>
+          <a:bodyPr wrap="square">
+            <a:spAutoFit/>
+          </a:bodyPr>
+          <a:lstStyle/>
+          <a:p>
+            <a:pPr algn="l"/>
+            <a:r>
+              <a:rPr sz="850" b="0" i="0">
+                <a:solidFill>
+                  <a:srgbClr val="88CCFF"/>
+                </a:solidFill>
+              </a:rPr>
+              <a:t>/api/v1/admin/agencies/{code}/rotate-key</a:t>
+            </a:r>
+          </a:p>
+        </p:txBody>
+      </p:sp>
+      <p:sp>
+        <p:nvSpPr>
+          <p:cNvPr id="33" name="TextBox 32"/>
+          <p:cNvSpPr txBox="1"/>
+          <p:nvPr/>
+        </p:nvSpPr>
+        <p:spPr>
+          <a:xfrm>
+            <a:off x="4297680" y="3886200"/>
+            <a:ext cx="1508760" cy="256032"/>
+          </a:xfrm>
+          <a:prstGeom prst="rect">
+            <a:avLst/>
+          </a:prstGeom>
+          <a:noFill/>
+        </p:spPr>
+        <p:txBody>
+          <a:bodyPr wrap="square">
+            <a:spAutoFit/>
+          </a:bodyPr>
+          <a:lstStyle/>
+          <a:p>
+            <a:pPr algn="l"/>
+            <a:r>
+              <a:rPr sz="850" b="0" i="0">
+                <a:solidFill>
+                  <a:srgbClr val="888899"/>
+                </a:solidFill>
+              </a:rPr>
+              <a:t>API 키 로테이션</a:t>
+            </a:r>
+          </a:p>
+        </p:txBody>
+      </p:sp>
+      <p:sp>
+        <p:nvSpPr>
+          <p:cNvPr id="34" name="Rectangle 33"/>
+          <p:cNvSpPr/>
+          <p:nvPr/>
+        </p:nvSpPr>
+        <p:spPr>
+          <a:xfrm>
+            <a:off x="822960" y="4206240"/>
+            <a:ext cx="457200" cy="256032"/>
+          </a:xfrm>
+          <a:prstGeom prst="rect">
+            <a:avLst/>
+          </a:prstGeom>
+          <a:solidFill>
+            <a:srgbClr val="00B072"/>
+          </a:solidFill>
+          <a:ln>
+            <a:noFill/>
+          </a:ln>
+        </p:spPr>
+        <p:style>
+          <a:lnRef idx="1">
+            <a:schemeClr val="accent1"/>
+          </a:lnRef>
+          <a:fillRef idx="3">
+            <a:schemeClr val="accent1"/>
+          </a:fillRef>
+          <a:effectRef idx="2">
+            <a:schemeClr val="accent1"/>
+          </a:effectRef>
+          <a:fontRef idx="minor">
+            <a:schemeClr val="lt1"/>
+          </a:fontRef>
+        </p:style>
+        <p:txBody>
+          <a:bodyPr rtlCol="0" anchor="ctr"/>
+          <a:lstStyle/>
+          <a:p>
+            <a:pPr algn="ctr"/>
+          </a:p>
+        </p:txBody>
+      </p:sp>
+      <p:sp>
+        <p:nvSpPr>
+          <p:cNvPr id="35" name="TextBox 34"/>
+          <p:cNvSpPr txBox="1"/>
+          <p:nvPr/>
+        </p:nvSpPr>
+        <p:spPr>
+          <a:xfrm>
+            <a:off x="822960" y="4206240"/>
+            <a:ext cx="457200" cy="256032"/>
+          </a:xfrm>
+          <a:prstGeom prst="rect">
+            <a:avLst/>
+          </a:prstGeom>
+          <a:noFill/>
+        </p:spPr>
+        <p:txBody>
+          <a:bodyPr wrap="square">
+            <a:spAutoFit/>
+          </a:bodyPr>
+          <a:lstStyle/>
+          <a:p>
+            <a:pPr algn="ctr"/>
+            <a:r>
+              <a:rPr sz="800" b="1" i="0">
+                <a:solidFill>
+                  <a:srgbClr val="FFFFFF"/>
+                </a:solidFill>
+              </a:rPr>
+              <a:t>GET</a:t>
+            </a:r>
+          </a:p>
+        </p:txBody>
+      </p:sp>
+      <p:sp>
+        <p:nvSpPr>
+          <p:cNvPr id="36" name="TextBox 35"/>
+          <p:cNvSpPr txBox="1"/>
+          <p:nvPr/>
+        </p:nvSpPr>
+        <p:spPr>
+          <a:xfrm>
+            <a:off x="1353312" y="4206240"/>
+            <a:ext cx="2926080" cy="256032"/>
+          </a:xfrm>
+          <a:prstGeom prst="rect">
+            <a:avLst/>
+          </a:prstGeom>
+          <a:noFill/>
+        </p:spPr>
+        <p:txBody>
+          <a:bodyPr wrap="square">
+            <a:spAutoFit/>
+          </a:bodyPr>
+          <a:lstStyle/>
+          <a:p>
+            <a:pPr algn="l"/>
+            <a:r>
+              <a:rPr sz="850" b="0" i="0">
+                <a:solidFill>
+                  <a:srgbClr val="88CCFF"/>
+                </a:solidFill>
+              </a:rPr>
+              <a:t>/api/v1/admin/agencies/{code}/history</a:t>
+            </a:r>
+          </a:p>
+        </p:txBody>
+      </p:sp>
+      <p:sp>
+        <p:nvSpPr>
+          <p:cNvPr id="37" name="TextBox 36"/>
+          <p:cNvSpPr txBox="1"/>
+          <p:nvPr/>
+        </p:nvSpPr>
+        <p:spPr>
+          <a:xfrm>
+            <a:off x="4297680" y="4206240"/>
+            <a:ext cx="1508760" cy="256032"/>
+          </a:xfrm>
+          <a:prstGeom prst="rect">
+            <a:avLst/>
+          </a:prstGeom>
+          <a:noFill/>
+        </p:spPr>
+        <p:txBody>
+          <a:bodyPr wrap="square">
+            <a:spAutoFit/>
+          </a:bodyPr>
+          <a:lstStyle/>
+          <a:p>
+            <a:pPr algn="l"/>
+            <a:r>
+              <a:rPr sz="850" b="0" i="0">
+                <a:solidFill>
+                  <a:srgbClr val="888899"/>
+                </a:solidFill>
+              </a:rPr>
+              <a:t>변경 이력 조회</a:t>
+            </a:r>
+          </a:p>
+        </p:txBody>
+      </p:sp>
+      <p:sp>
+        <p:nvSpPr>
+          <p:cNvPr id="38" name="Rectangle 37"/>
+          <p:cNvSpPr/>
+          <p:nvPr/>
+        </p:nvSpPr>
+        <p:spPr>
+          <a:xfrm>
+            <a:off x="822960" y="4526280"/>
+            <a:ext cx="457200" cy="256032"/>
+          </a:xfrm>
+          <a:prstGeom prst="rect">
+            <a:avLst/>
+          </a:prstGeom>
+          <a:solidFill>
+            <a:srgbClr val="00B072"/>
+          </a:solidFill>
+          <a:ln>
+            <a:noFill/>
+          </a:ln>
+        </p:spPr>
+        <p:style>
+          <a:lnRef idx="1">
+            <a:schemeClr val="accent1"/>
+          </a:lnRef>
+          <a:fillRef idx="3">
+            <a:schemeClr val="accent1"/>
+          </a:fillRef>
+          <a:effectRef idx="2">
+            <a:schemeClr val="accent1"/>
+          </a:effectRef>
+          <a:fontRef idx="minor">
+            <a:schemeClr val="lt1"/>
+          </a:fontRef>
+        </p:style>
+        <p:txBody>
+          <a:bodyPr rtlCol="0" anchor="ctr"/>
+          <a:lstStyle/>
+          <a:p>
+            <a:pPr algn="ctr"/>
+          </a:p>
+        </p:txBody>
+      </p:sp>
+      <p:sp>
+        <p:nvSpPr>
+          <p:cNvPr id="39" name="TextBox 38"/>
+          <p:cNvSpPr txBox="1"/>
+          <p:nvPr/>
+        </p:nvSpPr>
+        <p:spPr>
+          <a:xfrm>
+            <a:off x="822960" y="4526280"/>
+            <a:ext cx="457200" cy="256032"/>
+          </a:xfrm>
+          <a:prstGeom prst="rect">
+            <a:avLst/>
+          </a:prstGeom>
+          <a:noFill/>
+        </p:spPr>
+        <p:txBody>
+          <a:bodyPr wrap="square">
+            <a:spAutoFit/>
+          </a:bodyPr>
+          <a:lstStyle/>
+          <a:p>
+            <a:pPr algn="ctr"/>
+            <a:r>
+              <a:rPr sz="800" b="1" i="0">
+                <a:solidFill>
+                  <a:srgbClr val="FFFFFF"/>
+                </a:solidFill>
+              </a:rPr>
+              <a:t>GET</a:t>
+            </a:r>
+          </a:p>
+        </p:txBody>
+      </p:sp>
+      <p:sp>
+        <p:nvSpPr>
+          <p:cNvPr id="40" name="TextBox 39"/>
+          <p:cNvSpPr txBox="1"/>
+          <p:nvPr/>
+        </p:nvSpPr>
+        <p:spPr>
+          <a:xfrm>
+            <a:off x="1353312" y="4526280"/>
+            <a:ext cx="2926080" cy="256032"/>
+          </a:xfrm>
+          <a:prstGeom prst="rect">
+            <a:avLst/>
+          </a:prstGeom>
+          <a:noFill/>
+        </p:spPr>
+        <p:txBody>
+          <a:bodyPr wrap="square">
+            <a:spAutoFit/>
+          </a:bodyPr>
+          <a:lstStyle/>
+          <a:p>
+            <a:pPr algn="l"/>
+            <a:r>
+              <a:rPr sz="850" b="0" i="0">
+                <a:solidFill>
+                  <a:srgbClr val="88CCFF"/>
+                </a:solidFill>
+              </a:rPr>
+              <a:t>/api/v1/admin/agencies/{code}/stats</a:t>
+            </a:r>
+          </a:p>
+        </p:txBody>
+      </p:sp>
+      <p:sp>
+        <p:nvSpPr>
+          <p:cNvPr id="41" name="TextBox 40"/>
+          <p:cNvSpPr txBox="1"/>
+          <p:nvPr/>
+        </p:nvSpPr>
+        <p:spPr>
+          <a:xfrm>
+            <a:off x="4297680" y="4526280"/>
+            <a:ext cx="1508760" cy="256032"/>
+          </a:xfrm>
+          <a:prstGeom prst="rect">
+            <a:avLst/>
+          </a:prstGeom>
+          <a:noFill/>
+        </p:spPr>
+        <p:txBody>
+          <a:bodyPr wrap="square">
+            <a:spAutoFit/>
+          </a:bodyPr>
+          <a:lstStyle/>
+          <a:p>
+            <a:pPr algn="l"/>
+            <a:r>
+              <a:rPr sz="850" b="0" i="0">
+                <a:solidFill>
+                  <a:srgbClr val="888899"/>
+                </a:solidFill>
+              </a:rPr>
+              <a:t>통계 조회</a:t>
+            </a:r>
+          </a:p>
+        </p:txBody>
+      </p:sp>
+      <p:sp>
+        <p:nvSpPr>
+          <p:cNvPr id="42" name="Rectangle 41"/>
+          <p:cNvSpPr/>
+          <p:nvPr/>
+        </p:nvSpPr>
+        <p:spPr>
+          <a:xfrm>
+            <a:off x="777240" y="4983480"/>
+            <a:ext cx="5120640" cy="1389888"/>
+          </a:xfrm>
+          <a:prstGeom prst="rect">
+            <a:avLst/>
+          </a:prstGeom>
+          <a:solidFill>
+            <a:srgbClr val="002A1A"/>
+          </a:solidFill>
+          <a:ln>
+            <a:noFill/>
+          </a:ln>
+        </p:spPr>
+        <p:style>
+          <a:lnRef idx="1">
+            <a:schemeClr val="accent1"/>
+          </a:lnRef>
+          <a:fillRef idx="3">
+            <a:schemeClr val="accent1"/>
+          </a:fillRef>
+          <a:effectRef idx="2">
+            <a:schemeClr val="accent1"/>
+          </a:effectRef>
+          <a:fontRef idx="minor">
+            <a:schemeClr val="lt1"/>
+          </a:fontRef>
+        </p:style>
+        <p:txBody>
+          <a:bodyPr rtlCol="0" anchor="ctr"/>
+          <a:lstStyle/>
+          <a:p>
+            <a:pPr algn="ctr"/>
+          </a:p>
+        </p:txBody>
+      </p:sp>
+      <p:sp>
+        <p:nvSpPr>
+          <p:cNvPr id="43" name="TextBox 42"/>
+          <p:cNvSpPr txBox="1"/>
+          <p:nvPr/>
+        </p:nvSpPr>
+        <p:spPr>
+          <a:xfrm>
+            <a:off x="822960" y="5029200"/>
+            <a:ext cx="5029200" cy="292608"/>
+          </a:xfrm>
+          <a:prstGeom prst="rect">
+            <a:avLst/>
+          </a:prstGeom>
+          <a:noFill/>
+        </p:spPr>
+        <p:txBody>
+          <a:bodyPr wrap="square">
+            <a:spAutoFit/>
+          </a:bodyPr>
+          <a:lstStyle/>
+          <a:p>
+            <a:pPr algn="l"/>
+            <a:r>
+              <a:rPr sz="1100" b="1" i="0">
+                <a:solidFill>
+                  <a:srgbClr val="00AED6"/>
+                </a:solidFill>
+              </a:rPr>
+              <a:t>Q-IM 관리자 기능</a:t>
+            </a:r>
+          </a:p>
+        </p:txBody>
+      </p:sp>
+      <p:sp>
+        <p:nvSpPr>
+          <p:cNvPr id="44" name="TextBox 43"/>
+          <p:cNvSpPr txBox="1"/>
+          <p:nvPr/>
+        </p:nvSpPr>
+        <p:spPr>
+          <a:xfrm>
+            <a:off x="822960" y="5358384"/>
+            <a:ext cx="5029200" cy="960120"/>
+          </a:xfrm>
+          <a:prstGeom prst="rect">
+            <a:avLst/>
+          </a:prstGeom>
+          <a:noFill/>
+        </p:spPr>
+        <p:txBody>
+          <a:bodyPr wrap="square">
+            <a:spAutoFit/>
+          </a:bodyPr>
+          <a:lstStyle/>
+          <a:p>
+            <a:pPr algn="l"/>
+            <a:r>
+              <a:rPr sz="1050" b="0" i="0">
+                <a:solidFill>
+                  <a:srgbClr val="88FFCC"/>
+                </a:solidFill>
+              </a:rPr>
+              <a:t>기관 등록·수정·활성화·API 키 관리 등 핵심 관리 기능이
+ido AgencyAdminController에 이미 구현되어 있습니다.
+Q-IM 관리자 UI를 ido 관리자 화면에서 동일하게 제공할 수 있어
+Q-IM 관리자 페이지는 ido로 자연스럽게 흡수됩니다.</a:t>
+            </a:r>
+          </a:p>
+        </p:txBody>
+      </p:sp>
+      <p:sp>
+        <p:nvSpPr>
+          <p:cNvPr id="45" name="Rectangle 44"/>
+          <p:cNvSpPr/>
+          <p:nvPr/>
+        </p:nvSpPr>
+        <p:spPr>
+          <a:xfrm>
+            <a:off x="6126480" y="1444752"/>
+            <a:ext cx="5303520" cy="5120640"/>
+          </a:xfrm>
+          <a:prstGeom prst="rect">
+            <a:avLst/>
+          </a:prstGeom>
+          <a:solidFill>
+            <a:srgbClr val="0A1A38"/>
+          </a:solidFill>
+          <a:ln>
+            <a:noFill/>
+          </a:ln>
+        </p:spPr>
+        <p:style>
+          <a:lnRef idx="1">
+            <a:schemeClr val="accent1"/>
+          </a:lnRef>
+          <a:fillRef idx="3">
+            <a:schemeClr val="accent1"/>
+          </a:fillRef>
+          <a:effectRef idx="2">
+            <a:schemeClr val="accent1"/>
+          </a:effectRef>
+          <a:fontRef idx="minor">
+            <a:schemeClr val="lt1"/>
+          </a:fontRef>
+        </p:style>
+        <p:txBody>
+          <a:bodyPr rtlCol="0" anchor="ctr"/>
+          <a:lstStyle/>
+          <a:p>
+            <a:pPr algn="ctr"/>
+          </a:p>
+        </p:txBody>
+      </p:sp>
+      <p:sp>
+        <p:nvSpPr>
+          <p:cNvPr id="46" name="Rectangle 45"/>
+          <p:cNvSpPr/>
+          <p:nvPr/>
+        </p:nvSpPr>
+        <p:spPr>
+          <a:xfrm>
+            <a:off x="6126480" y="1444752"/>
+            <a:ext cx="5303520" cy="384048"/>
+          </a:xfrm>
+          <a:prstGeom prst="rect">
+            <a:avLst/>
+          </a:prstGeom>
+          <a:solidFill>
+            <a:srgbClr val="1A5CBF"/>
+          </a:solidFill>
+          <a:ln>
+            <a:noFill/>
+          </a:ln>
+        </p:spPr>
+        <p:style>
+          <a:lnRef idx="1">
+            <a:schemeClr val="accent1"/>
+          </a:lnRef>
+          <a:fillRef idx="3">
+            <a:schemeClr val="accent1"/>
+          </a:fillRef>
+          <a:effectRef idx="2">
+            <a:schemeClr val="accent1"/>
+          </a:effectRef>
+          <a:fontRef idx="minor">
+            <a:schemeClr val="lt1"/>
+          </a:fontRef>
+        </p:style>
+        <p:txBody>
+          <a:bodyPr rtlCol="0" anchor="ctr"/>
+          <a:lstStyle/>
+          <a:p>
+            <a:pPr algn="ctr"/>
+          </a:p>
+        </p:txBody>
+      </p:sp>
+      <p:sp>
+        <p:nvSpPr>
+          <p:cNvPr id="47" name="TextBox 46"/>
+          <p:cNvSpPr txBox="1"/>
+          <p:nvPr/>
+        </p:nvSpPr>
+        <p:spPr>
+          <a:xfrm>
+            <a:off x="6144768" y="1463040"/>
+            <a:ext cx="5266944" cy="347472"/>
+          </a:xfrm>
+          <a:prstGeom prst="rect">
+            <a:avLst/>
+          </a:prstGeom>
+          <a:noFill/>
+        </p:spPr>
+        <p:txBody>
+          <a:bodyPr wrap="square">
+            <a:spAutoFit/>
+          </a:bodyPr>
+          <a:lstStyle/>
+          <a:p>
+            <a:pPr algn="ctr"/>
+            <a:r>
+              <a:rPr sz="1200" b="1" i="0">
+                <a:solidFill>
+                  <a:srgbClr val="FFFFFF"/>
+                </a:solidFill>
+              </a:rPr>
+              <a:t>API 전환 비용이 낮은 3가지 이유</a:t>
+            </a:r>
+          </a:p>
+        </p:txBody>
+      </p:sp>
+      <p:sp>
+        <p:nvSpPr>
+          <p:cNvPr id="48" name="Rectangle 47"/>
+          <p:cNvSpPr/>
+          <p:nvPr/>
+        </p:nvSpPr>
+        <p:spPr>
+          <a:xfrm>
+            <a:off x="6172200" y="1920240"/>
+            <a:ext cx="5212080" cy="1463040"/>
+          </a:xfrm>
+          <a:prstGeom prst="rect">
+            <a:avLst/>
+          </a:prstGeom>
+          <a:solidFill>
+            <a:srgbClr val="0D2344"/>
+          </a:solidFill>
+          <a:ln>
+            <a:noFill/>
+          </a:ln>
+        </p:spPr>
+        <p:style>
+          <a:lnRef idx="1">
+            <a:schemeClr val="accent1"/>
+          </a:lnRef>
+          <a:fillRef idx="3">
+            <a:schemeClr val="accent1"/>
+          </a:fillRef>
+          <a:effectRef idx="2">
+            <a:schemeClr val="accent1"/>
+          </a:effectRef>
+          <a:fontRef idx="minor">
+            <a:schemeClr val="lt1"/>
+          </a:fontRef>
+        </p:style>
+        <p:txBody>
+          <a:bodyPr rtlCol="0" anchor="ctr"/>
+          <a:lstStyle/>
+          <a:p>
+            <a:pPr algn="ctr"/>
+          </a:p>
+        </p:txBody>
+      </p:sp>
+      <p:sp>
+        <p:nvSpPr>
+          <p:cNvPr id="49" name="Rectangle 48"/>
+          <p:cNvSpPr/>
+          <p:nvPr/>
+        </p:nvSpPr>
+        <p:spPr>
+          <a:xfrm>
+            <a:off x="6172200" y="1920240"/>
+            <a:ext cx="347472" cy="1463040"/>
+          </a:xfrm>
+          <a:prstGeom prst="rect">
+            <a:avLst/>
+          </a:prstGeom>
+          <a:solidFill>
+            <a:srgbClr val="00AED6"/>
+          </a:solidFill>
+          <a:ln>
+            <a:noFill/>
+          </a:ln>
+        </p:spPr>
+        <p:style>
+          <a:lnRef idx="1">
+            <a:schemeClr val="accent1"/>
+          </a:lnRef>
+          <a:fillRef idx="3">
+            <a:schemeClr val="accent1"/>
+          </a:fillRef>
+          <a:effectRef idx="2">
+            <a:schemeClr val="accent1"/>
+          </a:effectRef>
+          <a:fontRef idx="minor">
+            <a:schemeClr val="lt1"/>
+          </a:fontRef>
+        </p:style>
+        <p:txBody>
+          <a:bodyPr rtlCol="0" anchor="ctr"/>
+          <a:lstStyle/>
+          <a:p>
+            <a:pPr algn="ctr"/>
+          </a:p>
+        </p:txBody>
+      </p:sp>
+      <p:sp>
+        <p:nvSpPr>
+          <p:cNvPr id="50" name="TextBox 49"/>
+          <p:cNvSpPr txBox="1"/>
+          <p:nvPr/>
+        </p:nvSpPr>
+        <p:spPr>
+          <a:xfrm>
+            <a:off x="6172200" y="2423160"/>
+            <a:ext cx="347472" cy="457200"/>
+          </a:xfrm>
+          <a:prstGeom prst="rect">
+            <a:avLst/>
+          </a:prstGeom>
+          <a:noFill/>
+        </p:spPr>
+        <p:txBody>
+          <a:bodyPr wrap="square">
+            <a:spAutoFit/>
+          </a:bodyPr>
+          <a:lstStyle/>
+          <a:p>
+            <a:pPr algn="ctr"/>
+            <a:r>
+              <a:rPr sz="1800" b="1" i="0">
+                <a:solidFill>
+                  <a:srgbClr val="FFFFFF"/>
+                </a:solidFill>
+              </a:rPr>
+              <a:t>①</a:t>
+            </a:r>
+          </a:p>
+        </p:txBody>
+      </p:sp>
+      <p:sp>
+        <p:nvSpPr>
+          <p:cNvPr id="51" name="TextBox 50"/>
+          <p:cNvSpPr txBox="1"/>
+          <p:nvPr/>
+        </p:nvSpPr>
+        <p:spPr>
+          <a:xfrm>
+            <a:off x="6583680" y="1975104"/>
+            <a:ext cx="4754880" cy="329184"/>
+          </a:xfrm>
+          <a:prstGeom prst="rect">
+            <a:avLst/>
+          </a:prstGeom>
+          <a:noFill/>
+        </p:spPr>
+        <p:txBody>
+          <a:bodyPr wrap="square">
+            <a:spAutoFit/>
+          </a:bodyPr>
+          <a:lstStyle/>
+          <a:p>
+            <a:pPr algn="l"/>
+            <a:r>
+              <a:rPr sz="1100" b="1" i="0">
+                <a:solidFill>
+                  <a:srgbClr val="00AED6"/>
+                </a:solidFill>
+              </a:rPr>
+              <a:t>FE baseURL 1줄 변경 → 26개 API 전환</a:t>
+            </a:r>
+          </a:p>
+        </p:txBody>
+      </p:sp>
+      <p:sp>
+        <p:nvSpPr>
+          <p:cNvPr id="52" name="TextBox 51"/>
+          <p:cNvSpPr txBox="1"/>
+          <p:nvPr/>
+        </p:nvSpPr>
+        <p:spPr>
+          <a:xfrm>
+            <a:off x="6583680" y="2331720"/>
+            <a:ext cx="4709160" cy="658368"/>
+          </a:xfrm>
+          <a:prstGeom prst="rect">
+            <a:avLst/>
+          </a:prstGeom>
+          <a:noFill/>
+        </p:spPr>
+        <p:txBody>
+          <a:bodyPr wrap="square">
+            <a:spAutoFit/>
+          </a:bodyPr>
+          <a:lstStyle/>
+          <a:p>
+            <a:pPr algn="l"/>
+            <a:r>
+              <a:rPr sz="950" b="0" i="0">
+                <a:solidFill>
+                  <a:srgbClr val="BBCCDD"/>
+                </a:solidFill>
+              </a:rPr>
+              <a:t>extInstance.ts의 baseURL 한 줄만 바꾸면
+26개 Q-IM 직접 호출이 모두 ido 경유로 전환됩니다.
+API 경로명·파라미터·응답 형식은 Q-IM이 그대로 유지하므로
+FE 비즈니스 로직은 수정이 필요 없습니다.</a:t>
+            </a:r>
+          </a:p>
+        </p:txBody>
+      </p:sp>
+      <p:sp>
+        <p:nvSpPr>
+          <p:cNvPr id="53" name="Rectangle 52"/>
+          <p:cNvSpPr/>
+          <p:nvPr/>
+        </p:nvSpPr>
+        <p:spPr>
+          <a:xfrm>
+            <a:off x="6583680" y="3035808"/>
+            <a:ext cx="4709160" cy="310896"/>
+          </a:xfrm>
+          <a:prstGeom prst="rect">
+            <a:avLst/>
+          </a:prstGeom>
+          <a:solidFill>
+            <a:srgbClr val="040E1C"/>
+          </a:solidFill>
+          <a:ln>
+            <a:noFill/>
+          </a:ln>
+        </p:spPr>
+        <p:style>
+          <a:lnRef idx="1">
+            <a:schemeClr val="accent1"/>
+          </a:lnRef>
+          <a:fillRef idx="3">
+            <a:schemeClr val="accent1"/>
+          </a:fillRef>
+          <a:effectRef idx="2">
+            <a:schemeClr val="accent1"/>
+          </a:effectRef>
+          <a:fontRef idx="minor">
+            <a:schemeClr val="lt1"/>
+          </a:fontRef>
+        </p:style>
+        <p:txBody>
+          <a:bodyPr rtlCol="0" anchor="ctr"/>
+          <a:lstStyle/>
+          <a:p>
+            <a:pPr algn="ctr"/>
+          </a:p>
+        </p:txBody>
+      </p:sp>
+      <p:sp>
+        <p:nvSpPr>
+          <p:cNvPr id="54" name="TextBox 53"/>
+          <p:cNvSpPr txBox="1"/>
+          <p:nvPr/>
+        </p:nvSpPr>
+        <p:spPr>
+          <a:xfrm>
+            <a:off x="6620256" y="3054096"/>
+            <a:ext cx="4645152" cy="274320"/>
+          </a:xfrm>
+          <a:prstGeom prst="rect">
+            <a:avLst/>
+          </a:prstGeom>
+          <a:noFill/>
+        </p:spPr>
+        <p:txBody>
+          <a:bodyPr wrap="square">
+            <a:spAutoFit/>
+          </a:bodyPr>
+          <a:lstStyle/>
+          <a:p>
+            <a:pPr algn="l"/>
+            <a:r>
+              <a:rPr sz="750" b="0" i="0">
+                <a:solidFill>
+                  <a:srgbClr val="88CCFF"/>
+                </a:solidFill>
+              </a:rPr>
+              <a:t>// extInstance.ts — 변경 전
+baseURL: process.env.EXT_API_ENDPOINT  // → Q-IM
+// 변경 후
+baseURL: process.env.BE_API_ENDPOINT   // → ido</a:t>
+            </a:r>
+          </a:p>
+        </p:txBody>
+      </p:sp>
+      <p:sp>
+        <p:nvSpPr>
+          <p:cNvPr id="55" name="Rectangle 54"/>
+          <p:cNvSpPr/>
+          <p:nvPr/>
+        </p:nvSpPr>
+        <p:spPr>
+          <a:xfrm>
+            <a:off x="6172200" y="3456432"/>
+            <a:ext cx="5212080" cy="1463040"/>
+          </a:xfrm>
+          <a:prstGeom prst="rect">
+            <a:avLst/>
+          </a:prstGeom>
+          <a:solidFill>
+            <a:srgbClr val="0D2344"/>
+          </a:solidFill>
+          <a:ln>
+            <a:noFill/>
+          </a:ln>
+        </p:spPr>
+        <p:style>
+          <a:lnRef idx="1">
+            <a:schemeClr val="accent1"/>
+          </a:lnRef>
+          <a:fillRef idx="3">
+            <a:schemeClr val="accent1"/>
+          </a:fillRef>
+          <a:effectRef idx="2">
+            <a:schemeClr val="accent1"/>
+          </a:effectRef>
+          <a:fontRef idx="minor">
+            <a:schemeClr val="lt1"/>
+          </a:fontRef>
+        </p:style>
+        <p:txBody>
+          <a:bodyPr rtlCol="0" anchor="ctr"/>
+          <a:lstStyle/>
+          <a:p>
+            <a:pPr algn="ctr"/>
+          </a:p>
+        </p:txBody>
+      </p:sp>
+      <p:sp>
+        <p:nvSpPr>
+          <p:cNvPr id="56" name="Rectangle 55"/>
+          <p:cNvSpPr/>
+          <p:nvPr/>
+        </p:nvSpPr>
+        <p:spPr>
+          <a:xfrm>
+            <a:off x="6172200" y="3456432"/>
+            <a:ext cx="347472" cy="1463040"/>
+          </a:xfrm>
+          <a:prstGeom prst="rect">
+            <a:avLst/>
+          </a:prstGeom>
+          <a:solidFill>
+            <a:srgbClr val="00B072"/>
+          </a:solidFill>
+          <a:ln>
+            <a:noFill/>
+          </a:ln>
+        </p:spPr>
+        <p:style>
+          <a:lnRef idx="1">
+            <a:schemeClr val="accent1"/>
+          </a:lnRef>
+          <a:fillRef idx="3">
+            <a:schemeClr val="accent1"/>
+          </a:fillRef>
+          <a:effectRef idx="2">
+            <a:schemeClr val="accent1"/>
+          </a:effectRef>
+          <a:fontRef idx="minor">
+            <a:schemeClr val="lt1"/>
+          </a:fontRef>
+        </p:style>
+        <p:txBody>
+          <a:bodyPr rtlCol="0" anchor="ctr"/>
+          <a:lstStyle/>
+          <a:p>
+            <a:pPr algn="ctr"/>
+          </a:p>
+        </p:txBody>
+      </p:sp>
+      <p:sp>
+        <p:nvSpPr>
+          <p:cNvPr id="57" name="TextBox 56"/>
+          <p:cNvSpPr txBox="1"/>
+          <p:nvPr/>
+        </p:nvSpPr>
+        <p:spPr>
+          <a:xfrm>
+            <a:off x="6172200" y="3959352"/>
+            <a:ext cx="347472" cy="457200"/>
+          </a:xfrm>
+          <a:prstGeom prst="rect">
+            <a:avLst/>
+          </a:prstGeom>
+          <a:noFill/>
+        </p:spPr>
+        <p:txBody>
+          <a:bodyPr wrap="square">
+            <a:spAutoFit/>
+          </a:bodyPr>
+          <a:lstStyle/>
+          <a:p>
+            <a:pPr algn="ctr"/>
+            <a:r>
+              <a:rPr sz="1800" b="1" i="0">
+                <a:solidFill>
+                  <a:srgbClr val="FFFFFF"/>
+                </a:solidFill>
+              </a:rPr>
+              <a:t>②</a:t>
+            </a:r>
+          </a:p>
+        </p:txBody>
+      </p:sp>
+      <p:sp>
+        <p:nvSpPr>
+          <p:cNvPr id="58" name="TextBox 57"/>
+          <p:cNvSpPr txBox="1"/>
+          <p:nvPr/>
+        </p:nvSpPr>
+        <p:spPr>
+          <a:xfrm>
+            <a:off x="6583680" y="3511296"/>
+            <a:ext cx="4754880" cy="329184"/>
+          </a:xfrm>
+          <a:prstGeom prst="rect">
+            <a:avLst/>
+          </a:prstGeom>
+          <a:noFill/>
+        </p:spPr>
+        <p:txBody>
+          <a:bodyPr wrap="square">
+            <a:spAutoFit/>
+          </a:bodyPr>
+          <a:lstStyle/>
+          <a:p>
+            <a:pPr algn="l"/>
+            <a:r>
+              <a:rPr sz="1100" b="1" i="0">
+                <a:solidFill>
+                  <a:srgbClr val="00B072"/>
+                </a:solidFill>
+              </a:rPr>
+              <a:t>QimSpReceiverController — proxy 패턴 이미 구현</a:t>
+            </a:r>
+          </a:p>
+        </p:txBody>
+      </p:sp>
+      <p:sp>
+        <p:nvSpPr>
+          <p:cNvPr id="59" name="TextBox 58"/>
+          <p:cNvSpPr txBox="1"/>
+          <p:nvPr/>
+        </p:nvSpPr>
+        <p:spPr>
+          <a:xfrm>
+            <a:off x="6583680" y="3867912"/>
+            <a:ext cx="4709160" cy="658368"/>
+          </a:xfrm>
+          <a:prstGeom prst="rect">
+            <a:avLst/>
+          </a:prstGeom>
+          <a:noFill/>
+        </p:spPr>
+        <p:txBody>
+          <a:bodyPr wrap="square">
+            <a:spAutoFit/>
+          </a:bodyPr>
+          <a:lstStyle/>
+          <a:p>
+            <a:pPr algn="l"/>
+            <a:r>
+              <a:rPr sz="950" b="0" i="0">
+                <a:solidFill>
+                  <a:srgbClr val="BBCCDD"/>
+                </a:solidFill>
+              </a:rPr>
+              <a:t>ido에 이미 /api/qim/sp/v1/ proxy 패턴이 구현되어 있습니다.
+/api/ext/** forward proxy도 동일한 패턴으로
+낮은 비용에 적용 가능합니다.</a:t>
+            </a:r>
+          </a:p>
+        </p:txBody>
+      </p:sp>
+      <p:sp>
+        <p:nvSpPr>
+          <p:cNvPr id="60" name="Rectangle 59"/>
+          <p:cNvSpPr/>
+          <p:nvPr/>
+        </p:nvSpPr>
+        <p:spPr>
+          <a:xfrm>
+            <a:off x="6583680" y="4572000"/>
+            <a:ext cx="4709160" cy="310896"/>
+          </a:xfrm>
+          <a:prstGeom prst="rect">
+            <a:avLst/>
+          </a:prstGeom>
+          <a:solidFill>
+            <a:srgbClr val="040E1C"/>
+          </a:solidFill>
+          <a:ln>
+            <a:noFill/>
+          </a:ln>
+        </p:spPr>
+        <p:style>
+          <a:lnRef idx="1">
+            <a:schemeClr val="accent1"/>
+          </a:lnRef>
+          <a:fillRef idx="3">
+            <a:schemeClr val="accent1"/>
+          </a:fillRef>
+          <a:effectRef idx="2">
+            <a:schemeClr val="accent1"/>
+          </a:effectRef>
+          <a:fontRef idx="minor">
+            <a:schemeClr val="lt1"/>
+          </a:fontRef>
+        </p:style>
+        <p:txBody>
+          <a:bodyPr rtlCol="0" anchor="ctr"/>
+          <a:lstStyle/>
+          <a:p>
+            <a:pPr algn="ctr"/>
+          </a:p>
+        </p:txBody>
+      </p:sp>
+      <p:sp>
+        <p:nvSpPr>
+          <p:cNvPr id="61" name="TextBox 60"/>
+          <p:cNvSpPr txBox="1"/>
+          <p:nvPr/>
+        </p:nvSpPr>
+        <p:spPr>
+          <a:xfrm>
+            <a:off x="6620256" y="4590288"/>
+            <a:ext cx="4645152" cy="274320"/>
+          </a:xfrm>
+          <a:prstGeom prst="rect">
+            <a:avLst/>
+          </a:prstGeom>
+          <a:noFill/>
+        </p:spPr>
+        <p:txBody>
+          <a:bodyPr wrap="square">
+            <a:spAutoFit/>
+          </a:bodyPr>
+          <a:lstStyle/>
+          <a:p>
+            <a:pPr algn="l"/>
+            <a:r>
+              <a:rPr sz="750" b="0" i="0">
+                <a:solidFill>
+                  <a:srgbClr val="88CCFF"/>
+                </a:solidFill>
+              </a:rPr>
+              <a:t>@RequestMapping("/api/qim/sp/v1")
+// member/query · member/register 이미 구현
+// /api/ext/** forward도 동일 패턴 적용</a:t>
+            </a:r>
+          </a:p>
+        </p:txBody>
+      </p:sp>
+      <p:sp>
+        <p:nvSpPr>
+          <p:cNvPr id="62" name="Rectangle 61"/>
+          <p:cNvSpPr/>
+          <p:nvPr/>
+        </p:nvSpPr>
+        <p:spPr>
+          <a:xfrm>
+            <a:off x="6172200" y="4992624"/>
+            <a:ext cx="5212080" cy="1463040"/>
+          </a:xfrm>
+          <a:prstGeom prst="rect">
+            <a:avLst/>
+          </a:prstGeom>
+          <a:solidFill>
+            <a:srgbClr val="0D2344"/>
+          </a:solidFill>
+          <a:ln>
+            <a:noFill/>
+          </a:ln>
+        </p:spPr>
+        <p:style>
+          <a:lnRef idx="1">
+            <a:schemeClr val="accent1"/>
+          </a:lnRef>
+          <a:fillRef idx="3">
+            <a:schemeClr val="accent1"/>
+          </a:fillRef>
+          <a:effectRef idx="2">
+            <a:schemeClr val="accent1"/>
+          </a:effectRef>
+          <a:fontRef idx="minor">
+            <a:schemeClr val="lt1"/>
+          </a:fontRef>
+        </p:style>
+        <p:txBody>
+          <a:bodyPr rtlCol="0" anchor="ctr"/>
+          <a:lstStyle/>
+          <a:p>
+            <a:pPr algn="ctr"/>
+          </a:p>
+        </p:txBody>
+      </p:sp>
+      <p:sp>
+        <p:nvSpPr>
+          <p:cNvPr id="63" name="Rectangle 62"/>
+          <p:cNvSpPr/>
+          <p:nvPr/>
+        </p:nvSpPr>
+        <p:spPr>
+          <a:xfrm>
+            <a:off x="6172200" y="4992624"/>
+            <a:ext cx="347472" cy="1463040"/>
+          </a:xfrm>
+          <a:prstGeom prst="rect">
+            <a:avLst/>
+          </a:prstGeom>
+          <a:solidFill>
+            <a:srgbClr val="F58A07"/>
+          </a:solidFill>
+          <a:ln>
+            <a:noFill/>
+          </a:ln>
+        </p:spPr>
+        <p:style>
+          <a:lnRef idx="1">
+            <a:schemeClr val="accent1"/>
+          </a:lnRef>
+          <a:fillRef idx="3">
+            <a:schemeClr val="accent1"/>
+          </a:fillRef>
+          <a:effectRef idx="2">
+            <a:schemeClr val="accent1"/>
+          </a:effectRef>
+          <a:fontRef idx="minor">
+            <a:schemeClr val="lt1"/>
+          </a:fontRef>
+        </p:style>
+        <p:txBody>
+          <a:bodyPr rtlCol="0" anchor="ctr"/>
+          <a:lstStyle/>
+          <a:p>
+            <a:pPr algn="ctr"/>
+          </a:p>
+        </p:txBody>
+      </p:sp>
+      <p:sp>
+        <p:nvSpPr>
+          <p:cNvPr id="64" name="TextBox 63"/>
+          <p:cNvSpPr txBox="1"/>
+          <p:nvPr/>
+        </p:nvSpPr>
+        <p:spPr>
+          <a:xfrm>
+            <a:off x="6172200" y="5495544"/>
+            <a:ext cx="347472" cy="457200"/>
+          </a:xfrm>
+          <a:prstGeom prst="rect">
+            <a:avLst/>
+          </a:prstGeom>
+          <a:noFill/>
+        </p:spPr>
+        <p:txBody>
+          <a:bodyPr wrap="square">
+            <a:spAutoFit/>
+          </a:bodyPr>
+          <a:lstStyle/>
+          <a:p>
+            <a:pPr algn="ctr"/>
+            <a:r>
+              <a:rPr sz="1800" b="1" i="0">
+                <a:solidFill>
+                  <a:srgbClr val="FFFFFF"/>
+                </a:solidFill>
+              </a:rPr>
+              <a:t>③</a:t>
+            </a:r>
+          </a:p>
+        </p:txBody>
+      </p:sp>
+      <p:sp>
+        <p:nvSpPr>
+          <p:cNvPr id="65" name="TextBox 64"/>
+          <p:cNvSpPr txBox="1"/>
+          <p:nvPr/>
+        </p:nvSpPr>
+        <p:spPr>
+          <a:xfrm>
+            <a:off x="6583680" y="5047488"/>
+            <a:ext cx="4754880" cy="329184"/>
+          </a:xfrm>
+          <a:prstGeom prst="rect">
+            <a:avLst/>
+          </a:prstGeom>
+          <a:noFill/>
+        </p:spPr>
+        <p:txBody>
+          <a:bodyPr wrap="square">
+            <a:spAutoFit/>
+          </a:bodyPr>
+          <a:lstStyle/>
+          <a:p>
+            <a:pPr algn="l"/>
+            <a:r>
+              <a:rPr sz="1100" b="1" i="0">
+                <a:solidFill>
+                  <a:srgbClr val="F58A07"/>
+                </a:solidFill>
+              </a:rPr>
+              <a:t>Kafka — ido에 이미 구현 완료</a:t>
+            </a:r>
+          </a:p>
+        </p:txBody>
+      </p:sp>
+      <p:sp>
+        <p:nvSpPr>
+          <p:cNvPr id="66" name="TextBox 65"/>
+          <p:cNvSpPr txBox="1"/>
+          <p:nvPr/>
+        </p:nvSpPr>
+        <p:spPr>
+          <a:xfrm>
+            <a:off x="6583680" y="5404104"/>
+            <a:ext cx="4709160" cy="658368"/>
+          </a:xfrm>
+          <a:prstGeom prst="rect">
+            <a:avLst/>
+          </a:prstGeom>
+          <a:noFill/>
+        </p:spPr>
+        <p:txBody>
+          <a:bodyPr wrap="square">
+            <a:spAutoFit/>
+          </a:bodyPr>
+          <a:lstStyle/>
+          <a:p>
+            <a:pPr algn="l"/>
+            <a:r>
+              <a:rPr sz="950" b="0" i="0">
+                <a:solidFill>
+                  <a:srgbClr val="BBCCDD"/>
+                </a:solidFill>
+              </a:rPr>
+              <a:t>KafkaTemplate, Outbox 패턴이 ido에 이미 구현되어 있습니다.
+비동기 처리 전환 시 추가 인프라 설치 없이
+기존 구현을 재사용하면 됩니다.</a:t>
+            </a:r>
+          </a:p>
+        </p:txBody>
+      </p:sp>
+      <p:sp>
+        <p:nvSpPr>
+          <p:cNvPr id="67" name="Rectangle 66"/>
+          <p:cNvSpPr/>
+          <p:nvPr/>
+        </p:nvSpPr>
+        <p:spPr>
+          <a:xfrm>
+            <a:off x="6583680" y="6108192"/>
+            <a:ext cx="4709160" cy="310896"/>
+          </a:xfrm>
+          <a:prstGeom prst="rect">
+            <a:avLst/>
+          </a:prstGeom>
+          <a:solidFill>
+            <a:srgbClr val="040E1C"/>
+          </a:solidFill>
+          <a:ln>
+            <a:noFill/>
+          </a:ln>
+        </p:spPr>
+        <p:style>
+          <a:lnRef idx="1">
+            <a:schemeClr val="accent1"/>
+          </a:lnRef>
+          <a:fillRef idx="3">
+            <a:schemeClr val="accent1"/>
+          </a:fillRef>
+          <a:effectRef idx="2">
+            <a:schemeClr val="accent1"/>
+          </a:effectRef>
+          <a:fontRef idx="minor">
+            <a:schemeClr val="lt1"/>
+          </a:fontRef>
+        </p:style>
+        <p:txBody>
+          <a:bodyPr rtlCol="0" anchor="ctr"/>
+          <a:lstStyle/>
+          <a:p>
+            <a:pPr algn="ctr"/>
+          </a:p>
+        </p:txBody>
+      </p:sp>
+      <p:sp>
+        <p:nvSpPr>
+          <p:cNvPr id="68" name="TextBox 67"/>
+          <p:cNvSpPr txBox="1"/>
+          <p:nvPr/>
+        </p:nvSpPr>
+        <p:spPr>
+          <a:xfrm>
+            <a:off x="6620256" y="6126480"/>
+            <a:ext cx="4645152" cy="274320"/>
+          </a:xfrm>
+          <a:prstGeom prst="rect">
+            <a:avLst/>
+          </a:prstGeom>
+          <a:noFill/>
+        </p:spPr>
+        <p:txBody>
+          <a:bodyPr wrap="square">
+            <a:spAutoFit/>
+          </a:bodyPr>
+          <a:lstStyle/>
+          <a:p>
+            <a:pPr algn="l"/>
+            <a:r>
+              <a:rPr sz="750" b="0" i="0">
+                <a:solidFill>
+                  <a:srgbClr val="88CCFF"/>
+                </a:solidFill>
+              </a:rPr>
+              <a:t>// KeycloakOidcService.java — 이미 구현
+private final KafkaTemplate&lt;String,Object&gt; kafkaTemplate;
+// qsign.auth.events 발행 → Outbox 완성</a:t>
+            </a:r>
+          </a:p>
+        </p:txBody>
+      </p:sp>
+    </p:spTree>
+  </p:cSld>
+  <p:clrMapOvr>
+    <a:masterClrMapping/>
+  </p:clrMapOvr>
+</p:sld>
+</file>
+
+<file path=ppt/slides/slide12.xml><?xml version="1.0" encoding="utf-8"?>
+<p:sld xmlns:a="http://schemas.openxmlformats.org/drawingml/2006/main" xmlns:p="http://schemas.openxmlformats.org/presentationml/2006/main" xmlns:r="http://schemas.openxmlformats.org/officeDocument/2006/relationships">
+  <p:cSld>
+    <p:bg>
+      <p:bgPr>
+        <a:solidFill>
+          <a:srgbClr val="0F2D52"/>
+        </a:solidFill>
+        <a:effectLst/>
+      </p:bgPr>
+    </p:bg>
+    <p:spTree>
+      <p:nvGrpSpPr>
+        <p:cNvPr id="1" name=""/>
+        <p:cNvGrpSpPr/>
+        <p:nvPr/>
+      </p:nvGrpSpPr>
+      <p:grpSpPr/>
+      <p:sp>
+        <p:nvSpPr>
+          <p:cNvPr id="2" name="Rectangle 1"/>
+          <p:cNvSpPr/>
+          <p:nvPr/>
+        </p:nvSpPr>
+        <p:spPr>
+          <a:xfrm>
+            <a:off x="0" y="0"/>
+            <a:ext cx="411480" cy="6858000"/>
+          </a:xfrm>
+          <a:prstGeom prst="rect">
+            <a:avLst/>
+          </a:prstGeom>
+          <a:solidFill>
+            <a:srgbClr val="FFD700"/>
+          </a:solidFill>
+          <a:ln>
+            <a:noFill/>
+          </a:ln>
+        </p:spPr>
+        <p:style>
+          <a:lnRef idx="1">
+            <a:schemeClr val="accent1"/>
+          </a:lnRef>
+          <a:fillRef idx="3">
+            <a:schemeClr val="accent1"/>
+          </a:fillRef>
+          <a:effectRef idx="2">
+            <a:schemeClr val="accent1"/>
+          </a:effectRef>
+          <a:fontRef idx="minor">
+            <a:schemeClr val="lt1"/>
+          </a:fontRef>
+        </p:style>
+        <p:txBody>
+          <a:bodyPr rtlCol="0" anchor="ctr"/>
+          <a:lstStyle/>
+          <a:p>
+            <a:pPr algn="ctr"/>
+          </a:p>
+        </p:txBody>
+      </p:sp>
+      <p:sp>
+        <p:nvSpPr>
+          <p:cNvPr id="3" name="TextBox 2"/>
+          <p:cNvSpPr txBox="1"/>
+          <p:nvPr/>
+        </p:nvSpPr>
+        <p:spPr>
+          <a:xfrm>
+            <a:off x="731520" y="256032"/>
+            <a:ext cx="4572000" cy="411480"/>
+          </a:xfrm>
+          <a:prstGeom prst="rect">
+            <a:avLst/>
+          </a:prstGeom>
+          <a:noFill/>
+        </p:spPr>
+        <p:txBody>
+          <a:bodyPr wrap="square">
+            <a:spAutoFit/>
+          </a:bodyPr>
+          <a:lstStyle/>
+          <a:p>
+            <a:pPr algn="l"/>
+            <a:r>
+              <a:rPr sz="1200" b="1" i="0">
+                <a:solidFill>
+                  <a:srgbClr val="FFD700"/>
+                </a:solidFill>
+              </a:rPr>
+              <a:t>09  팀별 할 일</a:t>
+            </a:r>
+          </a:p>
+        </p:txBody>
+      </p:sp>
+      <p:sp>
+        <p:nvSpPr>
+          <p:cNvPr id="4" name="TextBox 3"/>
+          <p:cNvSpPr txBox="1"/>
+          <p:nvPr/>
+        </p:nvSpPr>
+        <p:spPr>
+          <a:xfrm>
+            <a:off x="731520" y="640080"/>
+            <a:ext cx="10972800" cy="594360"/>
+          </a:xfrm>
+          <a:prstGeom prst="rect">
+            <a:avLst/>
+          </a:prstGeom>
+          <a:noFill/>
+        </p:spPr>
+        <p:txBody>
+          <a:bodyPr wrap="square">
+            <a:spAutoFit/>
+          </a:bodyPr>
+          <a:lstStyle/>
+          <a:p>
+            <a:pPr algn="l"/>
+            <a:r>
+              <a:rPr sz="2600" b="1" i="0">
+                <a:solidFill>
+                  <a:srgbClr val="FFFFFF"/>
+                </a:solidFill>
+              </a:rPr>
+              <a:t>각 팀이 해야 할 일  —  Sprint 1주 이내 완료 가능</a:t>
+            </a:r>
+          </a:p>
+        </p:txBody>
+      </p:sp>
+      <p:sp>
+        <p:nvSpPr>
+          <p:cNvPr id="5" name="Rectangle 4"/>
+          <p:cNvSpPr/>
+          <p:nvPr/>
+        </p:nvSpPr>
+        <p:spPr>
+          <a:xfrm>
+            <a:off x="731520" y="1298448"/>
+            <a:ext cx="10698480" cy="45720"/>
+          </a:xfrm>
+          <a:prstGeom prst="rect">
+            <a:avLst/>
+          </a:prstGeom>
+          <a:solidFill>
+            <a:srgbClr val="2A4A7A"/>
+          </a:solidFill>
+          <a:ln>
+            <a:noFill/>
+          </a:ln>
+        </p:spPr>
+        <p:style>
+          <a:lnRef idx="1">
+            <a:schemeClr val="accent1"/>
+          </a:lnRef>
+          <a:fillRef idx="3">
+            <a:schemeClr val="accent1"/>
+          </a:fillRef>
+          <a:effectRef idx="2">
+            <a:schemeClr val="accent1"/>
+          </a:effectRef>
+          <a:fontRef idx="minor">
+            <a:schemeClr val="lt1"/>
+          </a:fontRef>
+        </p:style>
+        <p:txBody>
+          <a:bodyPr rtlCol="0" anchor="ctr"/>
+          <a:lstStyle/>
+          <a:p>
+            <a:pPr algn="ctr"/>
+          </a:p>
+        </p:txBody>
+      </p:sp>
+      <p:sp>
+        <p:nvSpPr>
+          <p:cNvPr id="6" name="Rectangle 5"/>
+          <p:cNvSpPr/>
+          <p:nvPr/>
+        </p:nvSpPr>
+        <p:spPr>
+          <a:xfrm>
+            <a:off x="731520" y="1444752"/>
+            <a:ext cx="5440680" cy="2578608"/>
+          </a:xfrm>
+          <a:prstGeom prst="rect">
+            <a:avLst/>
+          </a:prstGeom>
+          <a:solidFill>
+            <a:srgbClr val="0D2344"/>
+          </a:solidFill>
+          <a:ln>
+            <a:noFill/>
+          </a:ln>
+        </p:spPr>
+        <p:style>
+          <a:lnRef idx="1">
+            <a:schemeClr val="accent1"/>
+          </a:lnRef>
+          <a:fillRef idx="3">
+            <a:schemeClr val="accent1"/>
+          </a:fillRef>
+          <a:effectRef idx="2">
+            <a:schemeClr val="accent1"/>
+          </a:effectRef>
+          <a:fontRef idx="minor">
+            <a:schemeClr val="lt1"/>
+          </a:fontRef>
+        </p:style>
+        <p:txBody>
+          <a:bodyPr rtlCol="0" anchor="ctr"/>
+          <a:lstStyle/>
+          <a:p>
+            <a:pPr algn="ctr"/>
+          </a:p>
+        </p:txBody>
+      </p:sp>
+      <p:sp>
+        <p:nvSpPr>
+          <p:cNvPr id="7" name="Rectangle 6"/>
+          <p:cNvSpPr/>
+          <p:nvPr/>
+        </p:nvSpPr>
+        <p:spPr>
+          <a:xfrm>
+            <a:off x="731520" y="1444752"/>
+            <a:ext cx="5440680" cy="411480"/>
+          </a:xfrm>
+          <a:prstGeom prst="rect">
+            <a:avLst/>
+          </a:prstGeom>
+          <a:solidFill>
+            <a:srgbClr val="00AED6"/>
+          </a:solidFill>
+          <a:ln>
+            <a:noFill/>
+          </a:ln>
+        </p:spPr>
+        <p:style>
+          <a:lnRef idx="1">
+            <a:schemeClr val="accent1"/>
+          </a:lnRef>
+          <a:fillRef idx="3">
+            <a:schemeClr val="accent1"/>
+          </a:fillRef>
+          <a:effectRef idx="2">
+            <a:schemeClr val="accent1"/>
+          </a:effectRef>
+          <a:fontRef idx="minor">
+            <a:schemeClr val="lt1"/>
+          </a:fontRef>
+        </p:style>
+        <p:txBody>
+          <a:bodyPr rtlCol="0" anchor="ctr"/>
+          <a:lstStyle/>
+          <a:p>
+            <a:pPr algn="ctr"/>
+          </a:p>
+        </p:txBody>
+      </p:sp>
+      <p:sp>
+        <p:nvSpPr>
+          <p:cNvPr id="8" name="TextBox 7"/>
+          <p:cNvSpPr txBox="1"/>
+          <p:nvPr/>
+        </p:nvSpPr>
+        <p:spPr>
+          <a:xfrm>
+            <a:off x="731520" y="1444752"/>
+            <a:ext cx="3200400" cy="411480"/>
+          </a:xfrm>
+          <a:prstGeom prst="rect">
+            <a:avLst/>
+          </a:prstGeom>
+          <a:noFill/>
+        </p:spPr>
+        <p:txBody>
+          <a:bodyPr wrap="square">
+            <a:spAutoFit/>
+          </a:bodyPr>
+          <a:lstStyle/>
+          <a:p>
+            <a:pPr algn="l"/>
+            <a:r>
+              <a:rPr sz="1400" b="1" i="0">
+                <a:solidFill>
+                  <a:srgbClr val="FFFFFF"/>
+                </a:solidFill>
+              </a:rPr>
+              <a:t>FE 팀</a:t>
+            </a:r>
+          </a:p>
+        </p:txBody>
+      </p:sp>
+      <p:sp>
+        <p:nvSpPr>
+          <p:cNvPr id="9" name="Rectangle 8"/>
+          <p:cNvSpPr/>
+          <p:nvPr/>
+        </p:nvSpPr>
+        <p:spPr>
+          <a:xfrm>
+            <a:off x="4983480" y="1517904"/>
+            <a:ext cx="1115568" cy="274320"/>
+          </a:xfrm>
+          <a:prstGeom prst="rect">
+            <a:avLst/>
+          </a:prstGeom>
+          <a:solidFill>
+            <a:srgbClr val="000000"/>
+          </a:solidFill>
+          <a:ln>
+            <a:noFill/>
+          </a:ln>
+        </p:spPr>
+        <p:style>
+          <a:lnRef idx="1">
+            <a:schemeClr val="accent1"/>
+          </a:lnRef>
+          <a:fillRef idx="3">
+            <a:schemeClr val="accent1"/>
+          </a:fillRef>
+          <a:effectRef idx="2">
+            <a:schemeClr val="accent1"/>
+          </a:effectRef>
+          <a:fontRef idx="minor">
+            <a:schemeClr val="lt1"/>
+          </a:fontRef>
+        </p:style>
+        <p:txBody>
+          <a:bodyPr rtlCol="0" anchor="ctr"/>
+          <a:lstStyle/>
+          <a:p>
+            <a:pPr algn="ctr"/>
+          </a:p>
+        </p:txBody>
+      </p:sp>
+      <p:sp>
+        <p:nvSpPr>
+          <p:cNvPr id="10" name="TextBox 9"/>
+          <p:cNvSpPr txBox="1"/>
+          <p:nvPr/>
+        </p:nvSpPr>
+        <p:spPr>
+          <a:xfrm>
+            <a:off x="4983480" y="1517904"/>
+            <a:ext cx="1115568" cy="274320"/>
+          </a:xfrm>
+          <a:prstGeom prst="rect">
+            <a:avLst/>
+          </a:prstGeom>
+          <a:noFill/>
+        </p:spPr>
+        <p:txBody>
+          <a:bodyPr wrap="square">
+            <a:spAutoFit/>
+          </a:bodyPr>
+          <a:lstStyle/>
+          <a:p>
+            <a:pPr algn="ctr"/>
+            <a:r>
+              <a:rPr sz="950" b="1" i="0">
+                <a:solidFill>
+                  <a:srgbClr val="00AED6"/>
+                </a:solidFill>
+              </a:rPr>
+              <a:t>예상 ~3일</a:t>
+            </a:r>
+          </a:p>
+        </p:txBody>
+      </p:sp>
+      <p:sp>
+        <p:nvSpPr>
+          <p:cNvPr id="11" name="Rectangle 10"/>
+          <p:cNvSpPr/>
+          <p:nvPr/>
+        </p:nvSpPr>
+        <p:spPr>
+          <a:xfrm>
+            <a:off x="822960" y="1975104"/>
+            <a:ext cx="164592" cy="164592"/>
+          </a:xfrm>
+          <a:prstGeom prst="rect">
+            <a:avLst/>
+          </a:prstGeom>
+          <a:solidFill>
+            <a:srgbClr val="00AED6"/>
+          </a:solidFill>
+          <a:ln>
+            <a:noFill/>
+          </a:ln>
+        </p:spPr>
+        <p:style>
+          <a:lnRef idx="1">
+            <a:schemeClr val="accent1"/>
+          </a:lnRef>
+          <a:fillRef idx="3">
+            <a:schemeClr val="accent1"/>
+          </a:fillRef>
+          <a:effectRef idx="2">
+            <a:schemeClr val="accent1"/>
+          </a:effectRef>
+          <a:fontRef idx="minor">
+            <a:schemeClr val="lt1"/>
+          </a:fontRef>
+        </p:style>
+        <p:txBody>
+          <a:bodyPr rtlCol="0" anchor="ctr"/>
+          <a:lstStyle/>
+          <a:p>
+            <a:pPr algn="ctr"/>
+          </a:p>
+        </p:txBody>
+      </p:sp>
+      <p:sp>
+        <p:nvSpPr>
+          <p:cNvPr id="12" name="TextBox 11"/>
+          <p:cNvSpPr txBox="1"/>
+          <p:nvPr/>
+        </p:nvSpPr>
+        <p:spPr>
+          <a:xfrm>
+            <a:off x="1078992" y="1920240"/>
+            <a:ext cx="5010912" cy="256032"/>
+          </a:xfrm>
+          <a:prstGeom prst="rect">
+            <a:avLst/>
+          </a:prstGeom>
+          <a:noFill/>
+        </p:spPr>
+        <p:txBody>
+          <a:bodyPr wrap="square">
+            <a:spAutoFit/>
+          </a:bodyPr>
+          <a:lstStyle/>
+          <a:p>
+            <a:pPr algn="l"/>
+            <a:r>
+              <a:rPr sz="1000" b="1" i="0">
+                <a:solidFill>
+                  <a:srgbClr val="FFFFFF"/>
+                </a:solidFill>
+              </a:rPr>
+              <a:t>extInstance.ts  baseURL 환경변수 1줄 변경</a:t>
+            </a:r>
+          </a:p>
+        </p:txBody>
+      </p:sp>
+      <p:sp>
+        <p:nvSpPr>
+          <p:cNvPr id="13" name="TextBox 12"/>
+          <p:cNvSpPr txBox="1"/>
+          <p:nvPr/>
+        </p:nvSpPr>
+        <p:spPr>
+          <a:xfrm>
+            <a:off x="1078992" y="2176272"/>
+            <a:ext cx="5010912" cy="182880"/>
+          </a:xfrm>
+          <a:prstGeom prst="rect">
+            <a:avLst/>
+          </a:prstGeom>
+          <a:noFill/>
+        </p:spPr>
+        <p:txBody>
+          <a:bodyPr wrap="square">
+            <a:spAutoFit/>
+          </a:bodyPr>
+          <a:lstStyle/>
+          <a:p>
+            <a:pPr algn="l"/>
+            <a:r>
+              <a:rPr sz="850" b="0" i="0">
+                <a:solidFill>
+                  <a:srgbClr val="888899"/>
+                </a:solidFill>
+              </a:rPr>
+              <a:t>EXT_API_ENDPOINT → BE_API_ENDPOINT (ido 주소)</a:t>
+            </a:r>
+          </a:p>
+        </p:txBody>
+      </p:sp>
+      <p:sp>
+        <p:nvSpPr>
+          <p:cNvPr id="14" name="Rectangle 13"/>
+          <p:cNvSpPr/>
+          <p:nvPr/>
+        </p:nvSpPr>
+        <p:spPr>
+          <a:xfrm>
+            <a:off x="822960" y="2404872"/>
+            <a:ext cx="164592" cy="164592"/>
+          </a:xfrm>
+          <a:prstGeom prst="rect">
+            <a:avLst/>
+          </a:prstGeom>
+          <a:solidFill>
+            <a:srgbClr val="00AED6"/>
+          </a:solidFill>
+          <a:ln>
+            <a:noFill/>
+          </a:ln>
+        </p:spPr>
+        <p:style>
+          <a:lnRef idx="1">
+            <a:schemeClr val="accent1"/>
+          </a:lnRef>
+          <a:fillRef idx="3">
+            <a:schemeClr val="accent1"/>
+          </a:fillRef>
+          <a:effectRef idx="2">
+            <a:schemeClr val="accent1"/>
+          </a:effectRef>
+          <a:fontRef idx="minor">
+            <a:schemeClr val="lt1"/>
+          </a:fontRef>
+        </p:style>
+        <p:txBody>
+          <a:bodyPr rtlCol="0" anchor="ctr"/>
+          <a:lstStyle/>
+          <a:p>
+            <a:pPr algn="ctr"/>
+          </a:p>
+        </p:txBody>
+      </p:sp>
+      <p:sp>
+        <p:nvSpPr>
+          <p:cNvPr id="15" name="TextBox 14"/>
+          <p:cNvSpPr txBox="1"/>
+          <p:nvPr/>
+        </p:nvSpPr>
+        <p:spPr>
+          <a:xfrm>
+            <a:off x="1078992" y="2350008"/>
+            <a:ext cx="5010912" cy="256032"/>
+          </a:xfrm>
+          <a:prstGeom prst="rect">
+            <a:avLst/>
+          </a:prstGeom>
+          <a:noFill/>
+        </p:spPr>
+        <p:txBody>
+          <a:bodyPr wrap="square">
+            <a:spAutoFit/>
+          </a:bodyPr>
+          <a:lstStyle/>
+          <a:p>
+            <a:pPr algn="l"/>
+            <a:r>
+              <a:rPr sz="1000" b="1" i="0">
+                <a:solidFill>
+                  <a:srgbClr val="FFFFFF"/>
+                </a:solidFill>
+              </a:rPr>
+              <a:t>SKIP_AUTH=true 환경변수 제거 + Private.tsx 우회 코드 삭제</a:t>
+            </a:r>
+          </a:p>
+        </p:txBody>
+      </p:sp>
+      <p:sp>
+        <p:nvSpPr>
+          <p:cNvPr id="16" name="TextBox 15"/>
+          <p:cNvSpPr txBox="1"/>
+          <p:nvPr/>
+        </p:nvSpPr>
+        <p:spPr>
+          <a:xfrm>
+            <a:off x="1078992" y="2606040"/>
+            <a:ext cx="5010912" cy="182880"/>
+          </a:xfrm>
+          <a:prstGeom prst="rect">
+            <a:avLst/>
+          </a:prstGeom>
+          <a:noFill/>
+        </p:spPr>
+        <p:txBody>
+          <a:bodyPr wrap="square">
+            <a:spAutoFit/>
+          </a:bodyPr>
+          <a:lstStyle/>
+          <a:p>
+            <a:pPr algn="l"/>
+            <a:r>
+              <a:rPr sz="850" b="0" i="0">
+                <a:solidFill>
+                  <a:srgbClr val="888899"/>
+                </a:solidFill>
+              </a:rPr>
+              <a:t>lines 67, 109, 130 제거 — 정상 인증 흐름 활성</a:t>
+            </a:r>
+          </a:p>
+        </p:txBody>
+      </p:sp>
+      <p:sp>
+        <p:nvSpPr>
+          <p:cNvPr id="17" name="Rectangle 16"/>
+          <p:cNvSpPr/>
+          <p:nvPr/>
+        </p:nvSpPr>
+        <p:spPr>
+          <a:xfrm>
+            <a:off x="822960" y="2834640"/>
+            <a:ext cx="164592" cy="164592"/>
+          </a:xfrm>
+          <a:prstGeom prst="rect">
+            <a:avLst/>
+          </a:prstGeom>
+          <a:solidFill>
+            <a:srgbClr val="00AED6"/>
+          </a:solidFill>
+          <a:ln>
+            <a:noFill/>
+          </a:ln>
+        </p:spPr>
+        <p:style>
+          <a:lnRef idx="1">
+            <a:schemeClr val="accent1"/>
+          </a:lnRef>
+          <a:fillRef idx="3">
+            <a:schemeClr val="accent1"/>
+          </a:fillRef>
+          <a:effectRef idx="2">
+            <a:schemeClr val="accent1"/>
+          </a:effectRef>
+          <a:fontRef idx="minor">
+            <a:schemeClr val="lt1"/>
+          </a:fontRef>
+        </p:style>
+        <p:txBody>
+          <a:bodyPr rtlCol="0" anchor="ctr"/>
+          <a:lstStyle/>
+          <a:p>
+            <a:pPr algn="ctr"/>
+          </a:p>
+        </p:txBody>
+      </p:sp>
+      <p:sp>
+        <p:nvSpPr>
+          <p:cNvPr id="18" name="TextBox 17"/>
+          <p:cNvSpPr txBox="1"/>
+          <p:nvPr/>
+        </p:nvSpPr>
+        <p:spPr>
+          <a:xfrm>
+            <a:off x="1078992" y="2779776"/>
+            <a:ext cx="5010912" cy="256032"/>
+          </a:xfrm>
+          <a:prstGeom prst="rect">
+            <a:avLst/>
+          </a:prstGeom>
+          <a:noFill/>
+        </p:spPr>
+        <p:txBody>
+          <a:bodyPr wrap="square">
+            <a:spAutoFit/>
+          </a:bodyPr>
+          <a:lstStyle/>
+          <a:p>
+            <a:pPr algn="l"/>
+            <a:r>
+              <a:rPr sz="1000" b="1" i="0">
+                <a:solidFill>
+                  <a:srgbClr val="FFFFFF"/>
+                </a:solidFill>
+              </a:rPr>
+              <a:t>AES_GCM_KEY 환경변수 제거</a:t>
+            </a:r>
+          </a:p>
+        </p:txBody>
+      </p:sp>
+      <p:sp>
+        <p:nvSpPr>
+          <p:cNvPr id="19" name="TextBox 18"/>
+          <p:cNvSpPr txBox="1"/>
+          <p:nvPr/>
+        </p:nvSpPr>
+        <p:spPr>
+          <a:xfrm>
+            <a:off x="1078992" y="3035808"/>
+            <a:ext cx="5010912" cy="182880"/>
+          </a:xfrm>
+          <a:prstGeom prst="rect">
+            <a:avLst/>
+          </a:prstGeom>
+          <a:noFill/>
+        </p:spPr>
+        <p:txBody>
+          <a:bodyPr wrap="square">
+            <a:spAutoFit/>
+          </a:bodyPr>
+          <a:lstStyle/>
+          <a:p>
+            <a:pPr algn="l"/>
+            <a:r>
+              <a:rPr sz="850" b="0" i="0">
+                <a:solidFill>
+                  <a:srgbClr val="888899"/>
+                </a:solidFill>
+              </a:rPr>
+              <a:t>webpack DefinePlugin에서 삭제, CI 암호화는 BE 처리로 이관</a:t>
+            </a:r>
+          </a:p>
+        </p:txBody>
+      </p:sp>
+      <p:sp>
+        <p:nvSpPr>
+          <p:cNvPr id="20" name="Rectangle 19"/>
+          <p:cNvSpPr/>
+          <p:nvPr/>
+        </p:nvSpPr>
+        <p:spPr>
+          <a:xfrm>
+            <a:off x="822960" y="3264408"/>
+            <a:ext cx="164592" cy="164592"/>
+          </a:xfrm>
+          <a:prstGeom prst="rect">
+            <a:avLst/>
+          </a:prstGeom>
+          <a:solidFill>
+            <a:srgbClr val="00AED6"/>
+          </a:solidFill>
+          <a:ln>
+            <a:noFill/>
+          </a:ln>
+        </p:spPr>
+        <p:style>
+          <a:lnRef idx="1">
+            <a:schemeClr val="accent1"/>
+          </a:lnRef>
+          <a:fillRef idx="3">
+            <a:schemeClr val="accent1"/>
+          </a:fillRef>
+          <a:effectRef idx="2">
+            <a:schemeClr val="accent1"/>
+          </a:effectRef>
+          <a:fontRef idx="minor">
+            <a:schemeClr val="lt1"/>
+          </a:fontRef>
+        </p:style>
+        <p:txBody>
+          <a:bodyPr rtlCol="0" anchor="ctr"/>
+          <a:lstStyle/>
+          <a:p>
+            <a:pPr algn="ctr"/>
+          </a:p>
+        </p:txBody>
+      </p:sp>
+      <p:sp>
+        <p:nvSpPr>
+          <p:cNvPr id="21" name="TextBox 20"/>
+          <p:cNvSpPr txBox="1"/>
+          <p:nvPr/>
+        </p:nvSpPr>
+        <p:spPr>
+          <a:xfrm>
+            <a:off x="1078992" y="3209544"/>
+            <a:ext cx="5010912" cy="256032"/>
+          </a:xfrm>
+          <a:prstGeom prst="rect">
+            <a:avLst/>
+          </a:prstGeom>
+          <a:noFill/>
+        </p:spPr>
+        <p:txBody>
+          <a:bodyPr wrap="square">
+            <a:spAutoFit/>
+          </a:bodyPr>
+          <a:lstStyle/>
+          <a:p>
+            <a:pPr algn="l"/>
+            <a:r>
+              <a:rPr sz="1000" b="1" i="0">
+                <a:solidFill>
+                  <a:srgbClr val="FFFFFF"/>
+                </a:solidFill>
+              </a:rPr>
+              <a:t>Math.random() 임시비밀번호 → BE API 호출로 교체</a:t>
+            </a:r>
+          </a:p>
+        </p:txBody>
+      </p:sp>
+      <p:sp>
+        <p:nvSpPr>
+          <p:cNvPr id="22" name="TextBox 21"/>
+          <p:cNvSpPr txBox="1"/>
+          <p:nvPr/>
+        </p:nvSpPr>
+        <p:spPr>
+          <a:xfrm>
+            <a:off x="1078992" y="3465576"/>
+            <a:ext cx="5010912" cy="182880"/>
+          </a:xfrm>
+          <a:prstGeom prst="rect">
+            <a:avLst/>
+          </a:prstGeom>
+          <a:noFill/>
+        </p:spPr>
+        <p:txBody>
+          <a:bodyPr wrap="square">
+            <a:spAutoFit/>
+          </a:bodyPr>
+          <a:lstStyle/>
+          <a:p>
+            <a:pPr algn="l"/>
+            <a:r>
+              <a:rPr sz="850" b="0" i="0">
+                <a:solidFill>
+                  <a:srgbClr val="888899"/>
+                </a:solidFill>
+              </a:rPr>
+              <a:t>Step5.tsx:73–76  →  GET /api/v1/auth/provision/temp-password</a:t>
+            </a:r>
+          </a:p>
+        </p:txBody>
+      </p:sp>
+      <p:sp>
+        <p:nvSpPr>
+          <p:cNvPr id="23" name="Rectangle 22"/>
+          <p:cNvSpPr/>
+          <p:nvPr/>
+        </p:nvSpPr>
+        <p:spPr>
+          <a:xfrm>
+            <a:off x="822960" y="3694176"/>
+            <a:ext cx="164592" cy="164592"/>
+          </a:xfrm>
+          <a:prstGeom prst="rect">
+            <a:avLst/>
+          </a:prstGeom>
+          <a:solidFill>
+            <a:srgbClr val="00AED6"/>
+          </a:solidFill>
+          <a:ln>
+            <a:noFill/>
+          </a:ln>
+        </p:spPr>
+        <p:style>
+          <a:lnRef idx="1">
+            <a:schemeClr val="accent1"/>
+          </a:lnRef>
+          <a:fillRef idx="3">
+            <a:schemeClr val="accent1"/>
+          </a:fillRef>
+          <a:effectRef idx="2">
+            <a:schemeClr val="accent1"/>
+          </a:effectRef>
+          <a:fontRef idx="minor">
+            <a:schemeClr val="lt1"/>
+          </a:fontRef>
+        </p:style>
+        <p:txBody>
+          <a:bodyPr rtlCol="0" anchor="ctr"/>
+          <a:lstStyle/>
+          <a:p>
+            <a:pPr algn="ctr"/>
+          </a:p>
+        </p:txBody>
+      </p:sp>
+      <p:sp>
+        <p:nvSpPr>
+          <p:cNvPr id="24" name="TextBox 23"/>
+          <p:cNvSpPr txBox="1"/>
+          <p:nvPr/>
+        </p:nvSpPr>
+        <p:spPr>
+          <a:xfrm>
+            <a:off x="1078992" y="3639312"/>
+            <a:ext cx="5010912" cy="256032"/>
+          </a:xfrm>
+          <a:prstGeom prst="rect">
+            <a:avLst/>
+          </a:prstGeom>
+          <a:noFill/>
+        </p:spPr>
+        <p:txBody>
+          <a:bodyPr wrap="square">
+            <a:spAutoFit/>
+          </a:bodyPr>
+          <a:lstStyle/>
+          <a:p>
+            <a:pPr algn="l"/>
+            <a:r>
+              <a:rPr sz="1000" b="1" i="0">
+                <a:solidFill>
+                  <a:srgbClr val="FFFFFF"/>
+                </a:solidFill>
+              </a:rPr>
+              <a:t>ConversionContext MOCK_MEMBER/MOCK_BUSINESS 초기값 제거</a:t>
+            </a:r>
+          </a:p>
+        </p:txBody>
+      </p:sp>
+      <p:sp>
+        <p:nvSpPr>
+          <p:cNvPr id="25" name="TextBox 24"/>
+          <p:cNvSpPr txBox="1"/>
+          <p:nvPr/>
+        </p:nvSpPr>
+        <p:spPr>
+          <a:xfrm>
+            <a:off x="1078992" y="3895344"/>
+            <a:ext cx="5010912" cy="182880"/>
+          </a:xfrm>
+          <a:prstGeom prst="rect">
+            <a:avLst/>
+          </a:prstGeom>
+          <a:noFill/>
+        </p:spPr>
+        <p:txBody>
+          <a:bodyPr wrap="square">
+            <a:spAutoFit/>
+          </a:bodyPr>
+          <a:lstStyle/>
+          <a:p>
+            <a:pPr algn="l"/>
+            <a:r>
+              <a:rPr sz="850" b="0" i="0">
+                <a:solidFill>
+                  <a:srgbClr val="888899"/>
+                </a:solidFill>
+              </a:rPr>
+              <a:t>INITIAL_DATA에서 '홍길동' 등 Mock 데이터 삭제</a:t>
+            </a:r>
+          </a:p>
+        </p:txBody>
+      </p:sp>
+      <p:sp>
+        <p:nvSpPr>
+          <p:cNvPr id="26" name="Rectangle 25"/>
+          <p:cNvSpPr/>
+          <p:nvPr/>
+        </p:nvSpPr>
+        <p:spPr>
+          <a:xfrm>
+            <a:off x="6355080" y="1444752"/>
+            <a:ext cx="5440680" cy="2578608"/>
+          </a:xfrm>
+          <a:prstGeom prst="rect">
+            <a:avLst/>
+          </a:prstGeom>
+          <a:solidFill>
+            <a:srgbClr val="0D2344"/>
+          </a:solidFill>
+          <a:ln>
+            <a:noFill/>
+          </a:ln>
+        </p:spPr>
+        <p:style>
+          <a:lnRef idx="1">
+            <a:schemeClr val="accent1"/>
+          </a:lnRef>
+          <a:fillRef idx="3">
+            <a:schemeClr val="accent1"/>
+          </a:fillRef>
+          <a:effectRef idx="2">
+            <a:schemeClr val="accent1"/>
+          </a:effectRef>
+          <a:fontRef idx="minor">
+            <a:schemeClr val="lt1"/>
+          </a:fontRef>
+        </p:style>
+        <p:txBody>
+          <a:bodyPr rtlCol="0" anchor="ctr"/>
+          <a:lstStyle/>
+          <a:p>
+            <a:pPr algn="ctr"/>
+          </a:p>
+        </p:txBody>
+      </p:sp>
+      <p:sp>
+        <p:nvSpPr>
+          <p:cNvPr id="27" name="Rectangle 26"/>
+          <p:cNvSpPr/>
+          <p:nvPr/>
+        </p:nvSpPr>
+        <p:spPr>
+          <a:xfrm>
+            <a:off x="6355080" y="1444752"/>
+            <a:ext cx="5440680" cy="411480"/>
+          </a:xfrm>
+          <a:prstGeom prst="rect">
+            <a:avLst/>
+          </a:prstGeom>
+          <a:solidFill>
+            <a:srgbClr val="F58A07"/>
+          </a:solidFill>
+          <a:ln>
+            <a:noFill/>
+          </a:ln>
+        </p:spPr>
+        <p:style>
+          <a:lnRef idx="1">
+            <a:schemeClr val="accent1"/>
+          </a:lnRef>
+          <a:fillRef idx="3">
+            <a:schemeClr val="accent1"/>
+          </a:fillRef>
+          <a:effectRef idx="2">
+            <a:schemeClr val="accent1"/>
+          </a:effectRef>
+          <a:fontRef idx="minor">
+            <a:schemeClr val="lt1"/>
+          </a:fontRef>
+        </p:style>
+        <p:txBody>
+          <a:bodyPr rtlCol="0" anchor="ctr"/>
+          <a:lstStyle/>
+          <a:p>
+            <a:pPr algn="ctr"/>
+          </a:p>
+        </p:txBody>
+      </p:sp>
+      <p:sp>
+        <p:nvSpPr>
+          <p:cNvPr id="28" name="TextBox 27"/>
+          <p:cNvSpPr txBox="1"/>
+          <p:nvPr/>
+        </p:nvSpPr>
+        <p:spPr>
+          <a:xfrm>
+            <a:off x="6355080" y="1444752"/>
+            <a:ext cx="3200400" cy="411480"/>
+          </a:xfrm>
+          <a:prstGeom prst="rect">
+            <a:avLst/>
+          </a:prstGeom>
+          <a:noFill/>
+        </p:spPr>
+        <p:txBody>
+          <a:bodyPr wrap="square">
+            <a:spAutoFit/>
+          </a:bodyPr>
+          <a:lstStyle/>
+          <a:p>
+            <a:pPr algn="l"/>
+            <a:r>
+              <a:rPr sz="1400" b="1" i="0">
+                <a:solidFill>
+                  <a:srgbClr val="FFFFFF"/>
+                </a:solidFill>
+              </a:rPr>
+              <a:t>Q-IM 팀</a:t>
+            </a:r>
+          </a:p>
+        </p:txBody>
+      </p:sp>
+      <p:sp>
+        <p:nvSpPr>
+          <p:cNvPr id="29" name="Rectangle 28"/>
+          <p:cNvSpPr/>
+          <p:nvPr/>
+        </p:nvSpPr>
+        <p:spPr>
+          <a:xfrm>
+            <a:off x="10607040" y="1517904"/>
+            <a:ext cx="1115568" cy="274320"/>
+          </a:xfrm>
+          <a:prstGeom prst="rect">
+            <a:avLst/>
+          </a:prstGeom>
+          <a:solidFill>
+            <a:srgbClr val="000000"/>
+          </a:solidFill>
+          <a:ln>
+            <a:noFill/>
+          </a:ln>
+        </p:spPr>
+        <p:style>
+          <a:lnRef idx="1">
+            <a:schemeClr val="accent1"/>
+          </a:lnRef>
+          <a:fillRef idx="3">
+            <a:schemeClr val="accent1"/>
+          </a:fillRef>
+          <a:effectRef idx="2">
+            <a:schemeClr val="accent1"/>
+          </a:effectRef>
+          <a:fontRef idx="minor">
+            <a:schemeClr val="lt1"/>
+          </a:fontRef>
+        </p:style>
+        <p:txBody>
+          <a:bodyPr rtlCol="0" anchor="ctr"/>
+          <a:lstStyle/>
+          <a:p>
+            <a:pPr algn="ctr"/>
+          </a:p>
+        </p:txBody>
+      </p:sp>
+      <p:sp>
+        <p:nvSpPr>
+          <p:cNvPr id="30" name="TextBox 29"/>
+          <p:cNvSpPr txBox="1"/>
+          <p:nvPr/>
+        </p:nvSpPr>
+        <p:spPr>
+          <a:xfrm>
+            <a:off x="10607040" y="1517904"/>
+            <a:ext cx="1115568" cy="274320"/>
+          </a:xfrm>
+          <a:prstGeom prst="rect">
+            <a:avLst/>
+          </a:prstGeom>
+          <a:noFill/>
+        </p:spPr>
+        <p:txBody>
+          <a:bodyPr wrap="square">
+            <a:spAutoFit/>
+          </a:bodyPr>
+          <a:lstStyle/>
+          <a:p>
+            <a:pPr algn="ctr"/>
+            <a:r>
+              <a:rPr sz="950" b="1" i="0">
+                <a:solidFill>
+                  <a:srgbClr val="F58A07"/>
+                </a:solidFill>
+              </a:rPr>
+              <a:t>예상 ~1일</a:t>
+            </a:r>
+          </a:p>
+        </p:txBody>
+      </p:sp>
+      <p:sp>
+        <p:nvSpPr>
+          <p:cNvPr id="31" name="Rectangle 30"/>
+          <p:cNvSpPr/>
+          <p:nvPr/>
+        </p:nvSpPr>
+        <p:spPr>
+          <a:xfrm>
+            <a:off x="6446520" y="1975104"/>
+            <a:ext cx="164592" cy="164592"/>
+          </a:xfrm>
+          <a:prstGeom prst="rect">
+            <a:avLst/>
+          </a:prstGeom>
+          <a:solidFill>
+            <a:srgbClr val="F58A07"/>
+          </a:solidFill>
+          <a:ln>
+            <a:noFill/>
+          </a:ln>
+        </p:spPr>
+        <p:style>
+          <a:lnRef idx="1">
+            <a:schemeClr val="accent1"/>
+          </a:lnRef>
+          <a:fillRef idx="3">
+            <a:schemeClr val="accent1"/>
+          </a:fillRef>
+          <a:effectRef idx="2">
+            <a:schemeClr val="accent1"/>
+          </a:effectRef>
+          <a:fontRef idx="minor">
+            <a:schemeClr val="lt1"/>
+          </a:fontRef>
+        </p:style>
+        <p:txBody>
+          <a:bodyPr rtlCol="0" anchor="ctr"/>
+          <a:lstStyle/>
+          <a:p>
+            <a:pPr algn="ctr"/>
+          </a:p>
+        </p:txBody>
+      </p:sp>
+      <p:sp>
+        <p:nvSpPr>
+          <p:cNvPr id="32" name="TextBox 31"/>
+          <p:cNvSpPr txBox="1"/>
+          <p:nvPr/>
+        </p:nvSpPr>
+        <p:spPr>
+          <a:xfrm>
+            <a:off x="6702552" y="1920240"/>
+            <a:ext cx="5010912" cy="256032"/>
+          </a:xfrm>
+          <a:prstGeom prst="rect">
+            <a:avLst/>
+          </a:prstGeom>
+          <a:noFill/>
+        </p:spPr>
+        <p:txBody>
+          <a:bodyPr wrap="square">
+            <a:spAutoFit/>
+          </a:bodyPr>
+          <a:lstStyle/>
+          <a:p>
+            <a:pPr algn="l"/>
+            <a:r>
+              <a:rPr sz="1000" b="1" i="0">
+                <a:solidFill>
+                  <a:srgbClr val="FFFFFF"/>
+                </a:solidFill>
+              </a:rPr>
+              <a:t>기존 Q-IM API 엔드포인트 명세 공유</a:t>
+            </a:r>
+          </a:p>
+        </p:txBody>
+      </p:sp>
+      <p:sp>
+        <p:nvSpPr>
+          <p:cNvPr id="33" name="TextBox 32"/>
+          <p:cNvSpPr txBox="1"/>
+          <p:nvPr/>
+        </p:nvSpPr>
+        <p:spPr>
+          <a:xfrm>
+            <a:off x="6702552" y="2176272"/>
+            <a:ext cx="5010912" cy="182880"/>
+          </a:xfrm>
+          <a:prstGeom prst="rect">
+            <a:avLst/>
+          </a:prstGeom>
+          <a:noFill/>
+        </p:spPr>
+        <p:txBody>
+          <a:bodyPr wrap="square">
+            <a:spAutoFit/>
+          </a:bodyPr>
+          <a:lstStyle/>
+          <a:p>
+            <a:pPr algn="l"/>
+            <a:r>
+              <a:rPr sz="850" b="0" i="0">
+                <a:solidFill>
+                  <a:srgbClr val="888899"/>
+                </a:solidFill>
+              </a:rPr>
+              <a:t>ido proxy forward 설정 시 경로·파라미터 확인용</a:t>
+            </a:r>
+          </a:p>
+        </p:txBody>
+      </p:sp>
+      <p:sp>
+        <p:nvSpPr>
+          <p:cNvPr id="34" name="Rectangle 33"/>
+          <p:cNvSpPr/>
+          <p:nvPr/>
+        </p:nvSpPr>
+        <p:spPr>
+          <a:xfrm>
+            <a:off x="6446520" y="2404872"/>
+            <a:ext cx="164592" cy="164592"/>
+          </a:xfrm>
+          <a:prstGeom prst="rect">
+            <a:avLst/>
+          </a:prstGeom>
+          <a:solidFill>
+            <a:srgbClr val="F58A07"/>
+          </a:solidFill>
+          <a:ln>
+            <a:noFill/>
+          </a:ln>
+        </p:spPr>
+        <p:style>
+          <a:lnRef idx="1">
+            <a:schemeClr val="accent1"/>
+          </a:lnRef>
+          <a:fillRef idx="3">
+            <a:schemeClr val="accent1"/>
+          </a:fillRef>
+          <a:effectRef idx="2">
+            <a:schemeClr val="accent1"/>
+          </a:effectRef>
+          <a:fontRef idx="minor">
+            <a:schemeClr val="lt1"/>
+          </a:fontRef>
+        </p:style>
+        <p:txBody>
+          <a:bodyPr rtlCol="0" anchor="ctr"/>
+          <a:lstStyle/>
+          <a:p>
+            <a:pPr algn="ctr"/>
+          </a:p>
+        </p:txBody>
+      </p:sp>
+      <p:sp>
+        <p:nvSpPr>
+          <p:cNvPr id="35" name="TextBox 34"/>
+          <p:cNvSpPr txBox="1"/>
+          <p:nvPr/>
+        </p:nvSpPr>
+        <p:spPr>
+          <a:xfrm>
+            <a:off x="6702552" y="2350008"/>
+            <a:ext cx="5010912" cy="256032"/>
+          </a:xfrm>
+          <a:prstGeom prst="rect">
+            <a:avLst/>
+          </a:prstGeom>
+          <a:noFill/>
+        </p:spPr>
+        <p:txBody>
+          <a:bodyPr wrap="square">
+            <a:spAutoFit/>
+          </a:bodyPr>
+          <a:lstStyle/>
+          <a:p>
+            <a:pPr algn="l"/>
+            <a:r>
+              <a:rPr sz="1000" b="1" i="0">
+                <a:solidFill>
+                  <a:srgbClr val="FFFFFF"/>
+                </a:solidFill>
+              </a:rPr>
+              <a:t>관리자 기능 이관 검토·확인</a:t>
+            </a:r>
+          </a:p>
+        </p:txBody>
+      </p:sp>
+      <p:sp>
+        <p:nvSpPr>
+          <p:cNvPr id="36" name="TextBox 35"/>
+          <p:cNvSpPr txBox="1"/>
+          <p:nvPr/>
+        </p:nvSpPr>
+        <p:spPr>
+          <a:xfrm>
+            <a:off x="6702552" y="2606040"/>
+            <a:ext cx="5010912" cy="182880"/>
+          </a:xfrm>
+          <a:prstGeom prst="rect">
+            <a:avLst/>
+          </a:prstGeom>
+          <a:noFill/>
+        </p:spPr>
+        <p:txBody>
+          <a:bodyPr wrap="square">
+            <a:spAutoFit/>
+          </a:bodyPr>
+          <a:lstStyle/>
+          <a:p>
+            <a:pPr algn="l"/>
+            <a:r>
+              <a:rPr sz="850" b="0" i="0">
+                <a:solidFill>
+                  <a:srgbClr val="888899"/>
+                </a:solidFill>
+              </a:rPr>
+              <a:t>ido AgencyAdminController 9개 API와 기존 관리자 기능 대조</a:t>
+            </a:r>
+          </a:p>
+        </p:txBody>
+      </p:sp>
+      <p:sp>
+        <p:nvSpPr>
+          <p:cNvPr id="37" name="Rectangle 36"/>
+          <p:cNvSpPr/>
+          <p:nvPr/>
+        </p:nvSpPr>
+        <p:spPr>
+          <a:xfrm>
+            <a:off x="6446520" y="2834640"/>
+            <a:ext cx="164592" cy="164592"/>
+          </a:xfrm>
+          <a:prstGeom prst="rect">
+            <a:avLst/>
+          </a:prstGeom>
+          <a:solidFill>
+            <a:srgbClr val="F58A07"/>
+          </a:solidFill>
+          <a:ln>
+            <a:noFill/>
+          </a:ln>
+        </p:spPr>
+        <p:style>
+          <a:lnRef idx="1">
+            <a:schemeClr val="accent1"/>
+          </a:lnRef>
+          <a:fillRef idx="3">
+            <a:schemeClr val="accent1"/>
+          </a:fillRef>
+          <a:effectRef idx="2">
+            <a:schemeClr val="accent1"/>
+          </a:effectRef>
+          <a:fontRef idx="minor">
+            <a:schemeClr val="lt1"/>
+          </a:fontRef>
+        </p:style>
+        <p:txBody>
+          <a:bodyPr rtlCol="0" anchor="ctr"/>
+          <a:lstStyle/>
+          <a:p>
+            <a:pPr algn="ctr"/>
+          </a:p>
+        </p:txBody>
+      </p:sp>
+      <p:sp>
+        <p:nvSpPr>
+          <p:cNvPr id="38" name="TextBox 37"/>
+          <p:cNvSpPr txBox="1"/>
+          <p:nvPr/>
+        </p:nvSpPr>
+        <p:spPr>
+          <a:xfrm>
+            <a:off x="6702552" y="2779776"/>
+            <a:ext cx="5010912" cy="256032"/>
+          </a:xfrm>
+          <a:prstGeom prst="rect">
+            <a:avLst/>
+          </a:prstGeom>
+          <a:noFill/>
+        </p:spPr>
+        <p:txBody>
+          <a:bodyPr wrap="square">
+            <a:spAutoFit/>
+          </a:bodyPr>
+          <a:lstStyle/>
+          <a:p>
+            <a:pPr algn="l"/>
+            <a:r>
+              <a:rPr sz="1000" b="1" i="0">
+                <a:solidFill>
+                  <a:srgbClr val="FFFFFF"/>
+                </a:solidFill>
+              </a:rPr>
+              <a:t>내부 코드 변경 없음 — 검토·승인만</a:t>
+            </a:r>
+          </a:p>
+        </p:txBody>
+      </p:sp>
+      <p:sp>
+        <p:nvSpPr>
+          <p:cNvPr id="39" name="TextBox 38"/>
+          <p:cNvSpPr txBox="1"/>
+          <p:nvPr/>
+        </p:nvSpPr>
+        <p:spPr>
+          <a:xfrm>
+            <a:off x="6702552" y="3035808"/>
+            <a:ext cx="5010912" cy="182880"/>
+          </a:xfrm>
+          <a:prstGeom prst="rect">
+            <a:avLst/>
+          </a:prstGeom>
+          <a:noFill/>
+        </p:spPr>
+        <p:txBody>
+          <a:bodyPr wrap="square">
+            <a:spAutoFit/>
+          </a:bodyPr>
+          <a:lstStyle/>
+          <a:p>
+            <a:pPr algn="l"/>
+            <a:r>
+              <a:rPr sz="850" b="0" i="0">
+                <a:solidFill>
+                  <a:srgbClr val="888899"/>
+                </a:solidFill>
+              </a:rPr>
+              <a:t>Q-IM 비즈니스 로직은 그대로 유지</a:t>
+            </a:r>
+          </a:p>
+        </p:txBody>
+      </p:sp>
+      <p:sp>
+        <p:nvSpPr>
+          <p:cNvPr id="40" name="Rectangle 39"/>
+          <p:cNvSpPr/>
+          <p:nvPr/>
+        </p:nvSpPr>
+        <p:spPr>
+          <a:xfrm>
+            <a:off x="731520" y="4160520"/>
+            <a:ext cx="5440680" cy="2578608"/>
+          </a:xfrm>
+          <a:prstGeom prst="rect">
+            <a:avLst/>
+          </a:prstGeom>
+          <a:solidFill>
+            <a:srgbClr val="0D2344"/>
+          </a:solidFill>
+          <a:ln>
+            <a:noFill/>
+          </a:ln>
+        </p:spPr>
+        <p:style>
+          <a:lnRef idx="1">
+            <a:schemeClr val="accent1"/>
+          </a:lnRef>
+          <a:fillRef idx="3">
+            <a:schemeClr val="accent1"/>
+          </a:fillRef>
+          <a:effectRef idx="2">
+            <a:schemeClr val="accent1"/>
+          </a:effectRef>
+          <a:fontRef idx="minor">
+            <a:schemeClr val="lt1"/>
+          </a:fontRef>
+        </p:style>
+        <p:txBody>
+          <a:bodyPr rtlCol="0" anchor="ctr"/>
+          <a:lstStyle/>
+          <a:p>
+            <a:pPr algn="ctr"/>
+          </a:p>
+        </p:txBody>
+      </p:sp>
+      <p:sp>
+        <p:nvSpPr>
+          <p:cNvPr id="41" name="Rectangle 40"/>
+          <p:cNvSpPr/>
+          <p:nvPr/>
+        </p:nvSpPr>
+        <p:spPr>
+          <a:xfrm>
+            <a:off x="731520" y="4160520"/>
+            <a:ext cx="5440680" cy="411480"/>
+          </a:xfrm>
+          <a:prstGeom prst="rect">
+            <a:avLst/>
+          </a:prstGeom>
+          <a:solidFill>
+            <a:srgbClr val="1A5CBF"/>
+          </a:solidFill>
+          <a:ln>
+            <a:noFill/>
+          </a:ln>
+        </p:spPr>
+        <p:style>
+          <a:lnRef idx="1">
+            <a:schemeClr val="accent1"/>
+          </a:lnRef>
+          <a:fillRef idx="3">
+            <a:schemeClr val="accent1"/>
+          </a:fillRef>
+          <a:effectRef idx="2">
+            <a:schemeClr val="accent1"/>
+          </a:effectRef>
+          <a:fontRef idx="minor">
+            <a:schemeClr val="lt1"/>
+          </a:fontRef>
+        </p:style>
+        <p:txBody>
+          <a:bodyPr rtlCol="0" anchor="ctr"/>
+          <a:lstStyle/>
+          <a:p>
+            <a:pPr algn="ctr"/>
+          </a:p>
+        </p:txBody>
+      </p:sp>
+      <p:sp>
+        <p:nvSpPr>
+          <p:cNvPr id="42" name="TextBox 41"/>
+          <p:cNvSpPr txBox="1"/>
+          <p:nvPr/>
+        </p:nvSpPr>
+        <p:spPr>
+          <a:xfrm>
+            <a:off x="731520" y="4160520"/>
+            <a:ext cx="3200400" cy="411480"/>
+          </a:xfrm>
+          <a:prstGeom prst="rect">
+            <a:avLst/>
+          </a:prstGeom>
+          <a:noFill/>
+        </p:spPr>
+        <p:txBody>
+          <a:bodyPr wrap="square">
+            <a:spAutoFit/>
+          </a:bodyPr>
+          <a:lstStyle/>
+          <a:p>
+            <a:pPr algn="l"/>
+            <a:r>
+              <a:rPr sz="1400" b="1" i="0">
+                <a:solidFill>
+                  <a:srgbClr val="FFFFFF"/>
+                </a:solidFill>
+              </a:rPr>
+              <a:t>ido / BE 팀</a:t>
+            </a:r>
+          </a:p>
+        </p:txBody>
+      </p:sp>
+      <p:sp>
+        <p:nvSpPr>
+          <p:cNvPr id="43" name="Rectangle 42"/>
+          <p:cNvSpPr/>
+          <p:nvPr/>
+        </p:nvSpPr>
+        <p:spPr>
+          <a:xfrm>
+            <a:off x="4983480" y="4233672"/>
+            <a:ext cx="1115568" cy="274320"/>
+          </a:xfrm>
+          <a:prstGeom prst="rect">
+            <a:avLst/>
+          </a:prstGeom>
+          <a:solidFill>
+            <a:srgbClr val="000000"/>
+          </a:solidFill>
+          <a:ln>
+            <a:noFill/>
+          </a:ln>
+        </p:spPr>
+        <p:style>
+          <a:lnRef idx="1">
+            <a:schemeClr val="accent1"/>
+          </a:lnRef>
+          <a:fillRef idx="3">
+            <a:schemeClr val="accent1"/>
+          </a:fillRef>
+          <a:effectRef idx="2">
+            <a:schemeClr val="accent1"/>
+          </a:effectRef>
+          <a:fontRef idx="minor">
+            <a:schemeClr val="lt1"/>
+          </a:fontRef>
+        </p:style>
+        <p:txBody>
+          <a:bodyPr rtlCol="0" anchor="ctr"/>
+          <a:lstStyle/>
+          <a:p>
+            <a:pPr algn="ctr"/>
+          </a:p>
+        </p:txBody>
+      </p:sp>
+      <p:sp>
+        <p:nvSpPr>
+          <p:cNvPr id="44" name="TextBox 43"/>
+          <p:cNvSpPr txBox="1"/>
+          <p:nvPr/>
+        </p:nvSpPr>
+        <p:spPr>
+          <a:xfrm>
+            <a:off x="4983480" y="4233672"/>
+            <a:ext cx="1115568" cy="274320"/>
+          </a:xfrm>
+          <a:prstGeom prst="rect">
+            <a:avLst/>
+          </a:prstGeom>
+          <a:noFill/>
+        </p:spPr>
+        <p:txBody>
+          <a:bodyPr wrap="square">
+            <a:spAutoFit/>
+          </a:bodyPr>
+          <a:lstStyle/>
+          <a:p>
+            <a:pPr algn="ctr"/>
+            <a:r>
+              <a:rPr sz="950" b="1" i="0">
+                <a:solidFill>
+                  <a:srgbClr val="1A5CBF"/>
+                </a:solidFill>
+              </a:rPr>
+              <a:t>예상 ~5일</a:t>
+            </a:r>
+          </a:p>
+        </p:txBody>
+      </p:sp>
+      <p:sp>
+        <p:nvSpPr>
+          <p:cNvPr id="45" name="Rectangle 44"/>
+          <p:cNvSpPr/>
+          <p:nvPr/>
+        </p:nvSpPr>
+        <p:spPr>
+          <a:xfrm>
+            <a:off x="822960" y="4690872"/>
+            <a:ext cx="164592" cy="164592"/>
+          </a:xfrm>
+          <a:prstGeom prst="rect">
+            <a:avLst/>
+          </a:prstGeom>
+          <a:solidFill>
+            <a:srgbClr val="1A5CBF"/>
+          </a:solidFill>
+          <a:ln>
+            <a:noFill/>
+          </a:ln>
+        </p:spPr>
+        <p:style>
+          <a:lnRef idx="1">
+            <a:schemeClr val="accent1"/>
+          </a:lnRef>
+          <a:fillRef idx="3">
+            <a:schemeClr val="accent1"/>
+          </a:fillRef>
+          <a:effectRef idx="2">
+            <a:schemeClr val="accent1"/>
+          </a:effectRef>
+          <a:fontRef idx="minor">
+            <a:schemeClr val="lt1"/>
+          </a:fontRef>
+        </p:style>
+        <p:txBody>
+          <a:bodyPr rtlCol="0" anchor="ctr"/>
+          <a:lstStyle/>
+          <a:p>
+            <a:pPr algn="ctr"/>
+          </a:p>
+        </p:txBody>
+      </p:sp>
+      <p:sp>
+        <p:nvSpPr>
+          <p:cNvPr id="46" name="TextBox 45"/>
+          <p:cNvSpPr txBox="1"/>
+          <p:nvPr/>
+        </p:nvSpPr>
+        <p:spPr>
+          <a:xfrm>
+            <a:off x="1078992" y="4636008"/>
+            <a:ext cx="5010912" cy="256032"/>
+          </a:xfrm>
+          <a:prstGeom prst="rect">
+            <a:avLst/>
+          </a:prstGeom>
+          <a:noFill/>
+        </p:spPr>
+        <p:txBody>
+          <a:bodyPr wrap="square">
+            <a:spAutoFit/>
+          </a:bodyPr>
+          <a:lstStyle/>
+          <a:p>
+            <a:pPr algn="l"/>
+            <a:r>
+              <a:rPr sz="1000" b="1" i="0">
+                <a:solidFill>
+                  <a:srgbClr val="FFFFFF"/>
+                </a:solidFill>
+              </a:rPr>
+              <a:t>/api/ext/** → Q-IM forward proxy 라우팅 추가</a:t>
+            </a:r>
+          </a:p>
+        </p:txBody>
+      </p:sp>
+      <p:sp>
+        <p:nvSpPr>
+          <p:cNvPr id="47" name="TextBox 46"/>
+          <p:cNvSpPr txBox="1"/>
+          <p:nvPr/>
+        </p:nvSpPr>
+        <p:spPr>
+          <a:xfrm>
+            <a:off x="1078992" y="4892040"/>
+            <a:ext cx="5010912" cy="182880"/>
+          </a:xfrm>
+          <a:prstGeom prst="rect">
+            <a:avLst/>
+          </a:prstGeom>
+          <a:noFill/>
+        </p:spPr>
+        <p:txBody>
+          <a:bodyPr wrap="square">
+            <a:spAutoFit/>
+          </a:bodyPr>
+          <a:lstStyle/>
+          <a:p>
+            <a:pPr algn="l"/>
+            <a:r>
+              <a:rPr sz="850" b="0" i="0">
+                <a:solidFill>
+                  <a:srgbClr val="888899"/>
+                </a:solidFill>
+              </a:rPr>
+              <a:t>QimSpReceiverController 패턴 재사용 — 신규 패턴 불필요</a:t>
+            </a:r>
+          </a:p>
+        </p:txBody>
+      </p:sp>
+      <p:sp>
+        <p:nvSpPr>
+          <p:cNvPr id="48" name="Rectangle 47"/>
+          <p:cNvSpPr/>
+          <p:nvPr/>
+        </p:nvSpPr>
+        <p:spPr>
+          <a:xfrm>
+            <a:off x="822960" y="5120640"/>
+            <a:ext cx="164592" cy="164592"/>
+          </a:xfrm>
+          <a:prstGeom prst="rect">
+            <a:avLst/>
+          </a:prstGeom>
+          <a:solidFill>
+            <a:srgbClr val="1A5CBF"/>
+          </a:solidFill>
+          <a:ln>
+            <a:noFill/>
+          </a:ln>
+        </p:spPr>
+        <p:style>
+          <a:lnRef idx="1">
+            <a:schemeClr val="accent1"/>
+          </a:lnRef>
+          <a:fillRef idx="3">
+            <a:schemeClr val="accent1"/>
+          </a:fillRef>
+          <a:effectRef idx="2">
+            <a:schemeClr val="accent1"/>
+          </a:effectRef>
+          <a:fontRef idx="minor">
+            <a:schemeClr val="lt1"/>
+          </a:fontRef>
+        </p:style>
+        <p:txBody>
+          <a:bodyPr rtlCol="0" anchor="ctr"/>
+          <a:lstStyle/>
+          <a:p>
+            <a:pPr algn="ctr"/>
+          </a:p>
+        </p:txBody>
+      </p:sp>
+      <p:sp>
+        <p:nvSpPr>
+          <p:cNvPr id="49" name="TextBox 48"/>
+          <p:cNvSpPr txBox="1"/>
+          <p:nvPr/>
+        </p:nvSpPr>
+        <p:spPr>
+          <a:xfrm>
+            <a:off x="1078992" y="5065776"/>
+            <a:ext cx="5010912" cy="256032"/>
+          </a:xfrm>
+          <a:prstGeom prst="rect">
+            <a:avLst/>
+          </a:prstGeom>
+          <a:noFill/>
+        </p:spPr>
+        <p:txBody>
+          <a:bodyPr wrap="square">
+            <a:spAutoFit/>
+          </a:bodyPr>
+          <a:lstStyle/>
+          <a:p>
+            <a:pPr algn="l"/>
+            <a:r>
+              <a:rPr sz="1000" b="1" i="0">
+                <a:solidFill>
+                  <a:srgbClr val="FFFFFF"/>
+                </a:solidFill>
+              </a:rPr>
+              <a:t>extInstance 26개 API forward 설정 구현</a:t>
+            </a:r>
+          </a:p>
+        </p:txBody>
+      </p:sp>
+      <p:sp>
+        <p:nvSpPr>
+          <p:cNvPr id="50" name="TextBox 49"/>
+          <p:cNvSpPr txBox="1"/>
+          <p:nvPr/>
+        </p:nvSpPr>
+        <p:spPr>
+          <a:xfrm>
+            <a:off x="1078992" y="5321808"/>
+            <a:ext cx="5010912" cy="182880"/>
+          </a:xfrm>
+          <a:prstGeom prst="rect">
+            <a:avLst/>
+          </a:prstGeom>
+          <a:noFill/>
+        </p:spPr>
+        <p:txBody>
+          <a:bodyPr wrap="square">
+            <a:spAutoFit/>
+          </a:bodyPr>
+          <a:lstStyle/>
+          <a:p>
+            <a:pPr algn="l"/>
+            <a:r>
+              <a:rPr sz="850" b="0" i="0">
+                <a:solidFill>
+                  <a:srgbClr val="888899"/>
+                </a:solidFill>
+              </a:rPr>
+              <a:t>경로 매핑·헤더 forwarding·X-API-Key 전달</a:t>
+            </a:r>
+          </a:p>
+        </p:txBody>
+      </p:sp>
+      <p:sp>
+        <p:nvSpPr>
+          <p:cNvPr id="51" name="Rectangle 50"/>
+          <p:cNvSpPr/>
+          <p:nvPr/>
+        </p:nvSpPr>
+        <p:spPr>
+          <a:xfrm>
+            <a:off x="822960" y="5550408"/>
+            <a:ext cx="164592" cy="164592"/>
+          </a:xfrm>
+          <a:prstGeom prst="rect">
+            <a:avLst/>
+          </a:prstGeom>
+          <a:solidFill>
+            <a:srgbClr val="1A5CBF"/>
+          </a:solidFill>
+          <a:ln>
+            <a:noFill/>
+          </a:ln>
+        </p:spPr>
+        <p:style>
+          <a:lnRef idx="1">
+            <a:schemeClr val="accent1"/>
+          </a:lnRef>
+          <a:fillRef idx="3">
+            <a:schemeClr val="accent1"/>
+          </a:fillRef>
+          <a:effectRef idx="2">
+            <a:schemeClr val="accent1"/>
+          </a:effectRef>
+          <a:fontRef idx="minor">
+            <a:schemeClr val="lt1"/>
+          </a:fontRef>
+        </p:style>
+        <p:txBody>
+          <a:bodyPr rtlCol="0" anchor="ctr"/>
+          <a:lstStyle/>
+          <a:p>
+            <a:pPr algn="ctr"/>
+          </a:p>
+        </p:txBody>
+      </p:sp>
+      <p:sp>
+        <p:nvSpPr>
+          <p:cNvPr id="52" name="TextBox 51"/>
+          <p:cNvSpPr txBox="1"/>
+          <p:nvPr/>
+        </p:nvSpPr>
+        <p:spPr>
+          <a:xfrm>
+            <a:off x="1078992" y="5495544"/>
+            <a:ext cx="5010912" cy="256032"/>
+          </a:xfrm>
+          <a:prstGeom prst="rect">
+            <a:avLst/>
+          </a:prstGeom>
+          <a:noFill/>
+        </p:spPr>
+        <p:txBody>
+          <a:bodyPr wrap="square">
+            <a:spAutoFit/>
+          </a:bodyPr>
+          <a:lstStyle/>
+          <a:p>
+            <a:pPr algn="l"/>
+            <a:r>
+              <a:rPr sz="1000" b="1" i="0">
+                <a:solidFill>
+                  <a:srgbClr val="FFFFFF"/>
+                </a:solidFill>
+              </a:rPr>
+              <a:t>GET /api/v1/auth/provision/temp-password 엔드포인트 확인</a:t>
+            </a:r>
+          </a:p>
+        </p:txBody>
+      </p:sp>
+      <p:sp>
+        <p:nvSpPr>
+          <p:cNvPr id="53" name="TextBox 52"/>
+          <p:cNvSpPr txBox="1"/>
+          <p:nvPr/>
+        </p:nvSpPr>
+        <p:spPr>
+          <a:xfrm>
+            <a:off x="1078992" y="5751576"/>
+            <a:ext cx="5010912" cy="182880"/>
+          </a:xfrm>
+          <a:prstGeom prst="rect">
+            <a:avLst/>
+          </a:prstGeom>
+          <a:noFill/>
+        </p:spPr>
+        <p:txBody>
+          <a:bodyPr wrap="square">
+            <a:spAutoFit/>
+          </a:bodyPr>
+          <a:lstStyle/>
+          <a:p>
+            <a:pPr algn="l"/>
+            <a:r>
+              <a:rPr sz="850" b="0" i="0">
+                <a:solidFill>
+                  <a:srgbClr val="888899"/>
+                </a:solidFill>
+              </a:rPr>
+              <a:t>SecurePasswordGenerator 연결 — 이미 구현 완료</a:t>
+            </a:r>
+          </a:p>
+        </p:txBody>
+      </p:sp>
+      <p:sp>
+        <p:nvSpPr>
+          <p:cNvPr id="54" name="Rectangle 53"/>
+          <p:cNvSpPr/>
+          <p:nvPr/>
+        </p:nvSpPr>
+        <p:spPr>
+          <a:xfrm>
+            <a:off x="822960" y="5980176"/>
+            <a:ext cx="164592" cy="164592"/>
+          </a:xfrm>
+          <a:prstGeom prst="rect">
+            <a:avLst/>
+          </a:prstGeom>
+          <a:solidFill>
+            <a:srgbClr val="1A5CBF"/>
+          </a:solidFill>
+          <a:ln>
+            <a:noFill/>
+          </a:ln>
+        </p:spPr>
+        <p:style>
+          <a:lnRef idx="1">
+            <a:schemeClr val="accent1"/>
+          </a:lnRef>
+          <a:fillRef idx="3">
+            <a:schemeClr val="accent1"/>
+          </a:fillRef>
+          <a:effectRef idx="2">
+            <a:schemeClr val="accent1"/>
+          </a:effectRef>
+          <a:fontRef idx="minor">
+            <a:schemeClr val="lt1"/>
+          </a:fontRef>
+        </p:style>
+        <p:txBody>
+          <a:bodyPr rtlCol="0" anchor="ctr"/>
+          <a:lstStyle/>
+          <a:p>
+            <a:pPr algn="ctr"/>
+          </a:p>
+        </p:txBody>
+      </p:sp>
+      <p:sp>
+        <p:nvSpPr>
+          <p:cNvPr id="55" name="TextBox 54"/>
+          <p:cNvSpPr txBox="1"/>
+          <p:nvPr/>
+        </p:nvSpPr>
+        <p:spPr>
+          <a:xfrm>
+            <a:off x="1078992" y="5925312"/>
+            <a:ext cx="5010912" cy="256032"/>
+          </a:xfrm>
+          <a:prstGeom prst="rect">
+            <a:avLst/>
+          </a:prstGeom>
+          <a:noFill/>
+        </p:spPr>
+        <p:txBody>
+          <a:bodyPr wrap="square">
+            <a:spAutoFit/>
+          </a:bodyPr>
+          <a:lstStyle/>
+          <a:p>
+            <a:pPr algn="l"/>
+            <a:r>
+              <a:rPr sz="1000" b="1" i="0">
+                <a:solidFill>
+                  <a:srgbClr val="FFFFFF"/>
+                </a:solidFill>
+              </a:rPr>
+              <a:t>FE → ido 단일 경로 E2E 통합 테스트</a:t>
+            </a:r>
+          </a:p>
+        </p:txBody>
+      </p:sp>
+      <p:sp>
+        <p:nvSpPr>
+          <p:cNvPr id="56" name="TextBox 55"/>
+          <p:cNvSpPr txBox="1"/>
+          <p:nvPr/>
+        </p:nvSpPr>
+        <p:spPr>
+          <a:xfrm>
+            <a:off x="1078992" y="6181344"/>
+            <a:ext cx="5010912" cy="182880"/>
+          </a:xfrm>
+          <a:prstGeom prst="rect">
+            <a:avLst/>
+          </a:prstGeom>
+          <a:noFill/>
+        </p:spPr>
+        <p:txBody>
+          <a:bodyPr wrap="square">
+            <a:spAutoFit/>
+          </a:bodyPr>
+          <a:lstStyle/>
+          <a:p>
+            <a:pPr algn="l"/>
+            <a:r>
+              <a:rPr sz="850" b="0" i="0">
+                <a:solidFill>
+                  <a:srgbClr val="888899"/>
+                </a:solidFill>
+              </a:rPr>
+              <a:t>extInstance 제거 후 beInstance 단일 흐름 검증</a:t>
+            </a:r>
+          </a:p>
+        </p:txBody>
+      </p:sp>
+      <p:sp>
+        <p:nvSpPr>
+          <p:cNvPr id="57" name="Rectangle 56"/>
+          <p:cNvSpPr/>
+          <p:nvPr/>
+        </p:nvSpPr>
+        <p:spPr>
+          <a:xfrm>
+            <a:off x="822960" y="6409944"/>
+            <a:ext cx="164592" cy="164592"/>
+          </a:xfrm>
+          <a:prstGeom prst="rect">
+            <a:avLst/>
+          </a:prstGeom>
+          <a:solidFill>
+            <a:srgbClr val="1A5CBF"/>
+          </a:solidFill>
+          <a:ln>
+            <a:noFill/>
+          </a:ln>
+        </p:spPr>
+        <p:style>
+          <a:lnRef idx="1">
+            <a:schemeClr val="accent1"/>
+          </a:lnRef>
+          <a:fillRef idx="3">
+            <a:schemeClr val="accent1"/>
+          </a:fillRef>
+          <a:effectRef idx="2">
+            <a:schemeClr val="accent1"/>
+          </a:effectRef>
+          <a:fontRef idx="minor">
+            <a:schemeClr val="lt1"/>
+          </a:fontRef>
+        </p:style>
+        <p:txBody>
+          <a:bodyPr rtlCol="0" anchor="ctr"/>
+          <a:lstStyle/>
+          <a:p>
+            <a:pPr algn="ctr"/>
+          </a:p>
+        </p:txBody>
+      </p:sp>
+      <p:sp>
+        <p:nvSpPr>
+          <p:cNvPr id="58" name="TextBox 57"/>
+          <p:cNvSpPr txBox="1"/>
+          <p:nvPr/>
+        </p:nvSpPr>
+        <p:spPr>
+          <a:xfrm>
+            <a:off x="1078992" y="6355080"/>
+            <a:ext cx="5010912" cy="256032"/>
+          </a:xfrm>
+          <a:prstGeom prst="rect">
+            <a:avLst/>
+          </a:prstGeom>
+          <a:noFill/>
+        </p:spPr>
+        <p:txBody>
+          <a:bodyPr wrap="square">
+            <a:spAutoFit/>
+          </a:bodyPr>
+          <a:lstStyle/>
+          <a:p>
+            <a:pPr algn="l"/>
+            <a:r>
+              <a:rPr sz="1000" b="1" i="0">
+                <a:solidFill>
+                  <a:srgbClr val="FFFFFF"/>
+                </a:solidFill>
+              </a:rPr>
+              <a:t>AgencyAdminController API 문서화</a:t>
+            </a:r>
+          </a:p>
+        </p:txBody>
+      </p:sp>
+      <p:sp>
+        <p:nvSpPr>
+          <p:cNvPr id="59" name="TextBox 58"/>
+          <p:cNvSpPr txBox="1"/>
+          <p:nvPr/>
+        </p:nvSpPr>
+        <p:spPr>
+          <a:xfrm>
+            <a:off x="1078992" y="6611112"/>
+            <a:ext cx="5010912" cy="182880"/>
+          </a:xfrm>
+          <a:prstGeom prst="rect">
+            <a:avLst/>
+          </a:prstGeom>
+          <a:noFill/>
+        </p:spPr>
+        <p:txBody>
+          <a:bodyPr wrap="square">
+            <a:spAutoFit/>
+          </a:bodyPr>
+          <a:lstStyle/>
+          <a:p>
+            <a:pPr algn="l"/>
+            <a:r>
+              <a:rPr sz="850" b="0" i="0">
+                <a:solidFill>
+                  <a:srgbClr val="888899"/>
+                </a:solidFill>
+              </a:rPr>
+              <a:t>Q-IM 관리자 UI 연동을 위한 API 스펙 공유</a:t>
+            </a:r>
+          </a:p>
+        </p:txBody>
+      </p:sp>
+      <p:sp>
+        <p:nvSpPr>
+          <p:cNvPr id="60" name="Rectangle 59"/>
+          <p:cNvSpPr/>
+          <p:nvPr/>
+        </p:nvSpPr>
+        <p:spPr>
+          <a:xfrm>
+            <a:off x="6355080" y="4160520"/>
+            <a:ext cx="5440680" cy="2578608"/>
+          </a:xfrm>
+          <a:prstGeom prst="rect">
+            <a:avLst/>
+          </a:prstGeom>
+          <a:solidFill>
+            <a:srgbClr val="0D2344"/>
+          </a:solidFill>
+          <a:ln>
+            <a:noFill/>
+          </a:ln>
+        </p:spPr>
+        <p:style>
+          <a:lnRef idx="1">
+            <a:schemeClr val="accent1"/>
+          </a:lnRef>
+          <a:fillRef idx="3">
+            <a:schemeClr val="accent1"/>
+          </a:fillRef>
+          <a:effectRef idx="2">
+            <a:schemeClr val="accent1"/>
+          </a:effectRef>
+          <a:fontRef idx="minor">
+            <a:schemeClr val="lt1"/>
+          </a:fontRef>
+        </p:style>
+        <p:txBody>
+          <a:bodyPr rtlCol="0" anchor="ctr"/>
+          <a:lstStyle/>
+          <a:p>
+            <a:pPr algn="ctr"/>
+          </a:p>
+        </p:txBody>
+      </p:sp>
+      <p:sp>
+        <p:nvSpPr>
+          <p:cNvPr id="61" name="Rectangle 60"/>
+          <p:cNvSpPr/>
+          <p:nvPr/>
+        </p:nvSpPr>
+        <p:spPr>
+          <a:xfrm>
+            <a:off x="6355080" y="4160520"/>
+            <a:ext cx="5440680" cy="411480"/>
+          </a:xfrm>
+          <a:prstGeom prst="rect">
+            <a:avLst/>
+          </a:prstGeom>
+          <a:solidFill>
+            <a:srgbClr val="888899"/>
+          </a:solidFill>
+          <a:ln>
+            <a:noFill/>
+          </a:ln>
+        </p:spPr>
+        <p:style>
+          <a:lnRef idx="1">
+            <a:schemeClr val="accent1"/>
+          </a:lnRef>
+          <a:fillRef idx="3">
+            <a:schemeClr val="accent1"/>
+          </a:fillRef>
+          <a:effectRef idx="2">
+            <a:schemeClr val="accent1"/>
+          </a:effectRef>
+          <a:fontRef idx="minor">
+            <a:schemeClr val="lt1"/>
+          </a:fontRef>
+        </p:style>
+        <p:txBody>
+          <a:bodyPr rtlCol="0" anchor="ctr"/>
+          <a:lstStyle/>
+          <a:p>
+            <a:pPr algn="ctr"/>
+          </a:p>
+        </p:txBody>
+      </p:sp>
+      <p:sp>
+        <p:nvSpPr>
+          <p:cNvPr id="62" name="TextBox 61"/>
+          <p:cNvSpPr txBox="1"/>
+          <p:nvPr/>
+        </p:nvSpPr>
+        <p:spPr>
+          <a:xfrm>
+            <a:off x="6355080" y="4160520"/>
+            <a:ext cx="3200400" cy="411480"/>
+          </a:xfrm>
+          <a:prstGeom prst="rect">
+            <a:avLst/>
+          </a:prstGeom>
+          <a:noFill/>
+        </p:spPr>
+        <p:txBody>
+          <a:bodyPr wrap="square">
+            <a:spAutoFit/>
+          </a:bodyPr>
+          <a:lstStyle/>
+          <a:p>
+            <a:pPr algn="l"/>
+            <a:r>
+              <a:rPr sz="1400" b="1" i="0">
+                <a:solidFill>
+                  <a:srgbClr val="FFFFFF"/>
+                </a:solidFill>
+              </a:rPr>
+              <a:t>인프라 팀</a:t>
+            </a:r>
+          </a:p>
+        </p:txBody>
+      </p:sp>
+      <p:sp>
+        <p:nvSpPr>
+          <p:cNvPr id="63" name="Rectangle 62"/>
+          <p:cNvSpPr/>
+          <p:nvPr/>
+        </p:nvSpPr>
+        <p:spPr>
+          <a:xfrm>
+            <a:off x="10607040" y="4233672"/>
+            <a:ext cx="1115568" cy="274320"/>
+          </a:xfrm>
+          <a:prstGeom prst="rect">
+            <a:avLst/>
+          </a:prstGeom>
+          <a:solidFill>
+            <a:srgbClr val="000000"/>
+          </a:solidFill>
+          <a:ln>
+            <a:noFill/>
+          </a:ln>
+        </p:spPr>
+        <p:style>
+          <a:lnRef idx="1">
+            <a:schemeClr val="accent1"/>
+          </a:lnRef>
+          <a:fillRef idx="3">
+            <a:schemeClr val="accent1"/>
+          </a:fillRef>
+          <a:effectRef idx="2">
+            <a:schemeClr val="accent1"/>
+          </a:effectRef>
+          <a:fontRef idx="minor">
+            <a:schemeClr val="lt1"/>
+          </a:fontRef>
+        </p:style>
+        <p:txBody>
+          <a:bodyPr rtlCol="0" anchor="ctr"/>
+          <a:lstStyle/>
+          <a:p>
+            <a:pPr algn="ctr"/>
+          </a:p>
+        </p:txBody>
+      </p:sp>
+      <p:sp>
+        <p:nvSpPr>
+          <p:cNvPr id="64" name="TextBox 63"/>
+          <p:cNvSpPr txBox="1"/>
+          <p:nvPr/>
+        </p:nvSpPr>
+        <p:spPr>
+          <a:xfrm>
+            <a:off x="10607040" y="4233672"/>
+            <a:ext cx="1115568" cy="274320"/>
+          </a:xfrm>
+          <a:prstGeom prst="rect">
+            <a:avLst/>
+          </a:prstGeom>
+          <a:noFill/>
+        </p:spPr>
+        <p:txBody>
+          <a:bodyPr wrap="square">
+            <a:spAutoFit/>
+          </a:bodyPr>
+          <a:lstStyle/>
+          <a:p>
+            <a:pPr algn="ctr"/>
+            <a:r>
+              <a:rPr sz="950" b="1" i="0">
+                <a:solidFill>
+                  <a:srgbClr val="888899"/>
+                </a:solidFill>
+              </a:rPr>
+              <a:t>예상 ~1일</a:t>
+            </a:r>
+          </a:p>
+        </p:txBody>
+      </p:sp>
+      <p:sp>
+        <p:nvSpPr>
+          <p:cNvPr id="65" name="Rectangle 64"/>
+          <p:cNvSpPr/>
+          <p:nvPr/>
+        </p:nvSpPr>
+        <p:spPr>
+          <a:xfrm>
+            <a:off x="6446520" y="4690872"/>
+            <a:ext cx="164592" cy="164592"/>
+          </a:xfrm>
+          <a:prstGeom prst="rect">
+            <a:avLst/>
+          </a:prstGeom>
+          <a:solidFill>
+            <a:srgbClr val="888899"/>
+          </a:solidFill>
+          <a:ln>
+            <a:noFill/>
+          </a:ln>
+        </p:spPr>
+        <p:style>
+          <a:lnRef idx="1">
+            <a:schemeClr val="accent1"/>
+          </a:lnRef>
+          <a:fillRef idx="3">
+            <a:schemeClr val="accent1"/>
+          </a:fillRef>
+          <a:effectRef idx="2">
+            <a:schemeClr val="accent1"/>
+          </a:effectRef>
+          <a:fontRef idx="minor">
+            <a:schemeClr val="lt1"/>
+          </a:fontRef>
+        </p:style>
+        <p:txBody>
+          <a:bodyPr rtlCol="0" anchor="ctr"/>
+          <a:lstStyle/>
+          <a:p>
+            <a:pPr algn="ctr"/>
+          </a:p>
+        </p:txBody>
+      </p:sp>
+      <p:sp>
+        <p:nvSpPr>
+          <p:cNvPr id="66" name="TextBox 65"/>
+          <p:cNvSpPr txBox="1"/>
+          <p:nvPr/>
+        </p:nvSpPr>
+        <p:spPr>
+          <a:xfrm>
+            <a:off x="6702552" y="4636008"/>
+            <a:ext cx="5010912" cy="256032"/>
+          </a:xfrm>
+          <a:prstGeom prst="rect">
+            <a:avLst/>
+          </a:prstGeom>
+          <a:noFill/>
+        </p:spPr>
+        <p:txBody>
+          <a:bodyPr wrap="square">
+            <a:spAutoFit/>
+          </a:bodyPr>
+          <a:lstStyle/>
+          <a:p>
+            <a:pPr algn="l"/>
+            <a:r>
+              <a:rPr sz="1000" b="1" i="0">
+                <a:solidFill>
+                  <a:srgbClr val="FFFFFF"/>
+                </a:solidFill>
+              </a:rPr>
+              <a:t>webpack proxy 설정 변경</a:t>
+            </a:r>
+          </a:p>
+        </p:txBody>
+      </p:sp>
+      <p:sp>
+        <p:nvSpPr>
+          <p:cNvPr id="67" name="TextBox 66"/>
+          <p:cNvSpPr txBox="1"/>
+          <p:nvPr/>
+        </p:nvSpPr>
+        <p:spPr>
+          <a:xfrm>
+            <a:off x="6702552" y="4892040"/>
+            <a:ext cx="5010912" cy="182880"/>
+          </a:xfrm>
+          <a:prstGeom prst="rect">
+            <a:avLst/>
+          </a:prstGeom>
+          <a:noFill/>
+        </p:spPr>
+        <p:txBody>
+          <a:bodyPr wrap="square">
+            <a:spAutoFit/>
+          </a:bodyPr>
+          <a:lstStyle/>
+          <a:p>
+            <a:pPr algn="l"/>
+            <a:r>
+              <a:rPr sz="850" b="0" i="0">
+                <a:solidFill>
+                  <a:srgbClr val="888899"/>
+                </a:solidFill>
+              </a:rPr>
+              <a:t>/api/ext 타겟을 Q-IM → ido로 변경</a:t>
+            </a:r>
+          </a:p>
+        </p:txBody>
+      </p:sp>
+      <p:sp>
+        <p:nvSpPr>
+          <p:cNvPr id="68" name="Rectangle 67"/>
+          <p:cNvSpPr/>
+          <p:nvPr/>
+        </p:nvSpPr>
+        <p:spPr>
+          <a:xfrm>
+            <a:off x="6446520" y="5120640"/>
+            <a:ext cx="164592" cy="164592"/>
+          </a:xfrm>
+          <a:prstGeom prst="rect">
+            <a:avLst/>
+          </a:prstGeom>
+          <a:solidFill>
+            <a:srgbClr val="888899"/>
+          </a:solidFill>
+          <a:ln>
+            <a:noFill/>
+          </a:ln>
+        </p:spPr>
+        <p:style>
+          <a:lnRef idx="1">
+            <a:schemeClr val="accent1"/>
+          </a:lnRef>
+          <a:fillRef idx="3">
+            <a:schemeClr val="accent1"/>
+          </a:fillRef>
+          <a:effectRef idx="2">
+            <a:schemeClr val="accent1"/>
+          </a:effectRef>
+          <a:fontRef idx="minor">
+            <a:schemeClr val="lt1"/>
+          </a:fontRef>
+        </p:style>
+        <p:txBody>
+          <a:bodyPr rtlCol="0" anchor="ctr"/>
+          <a:lstStyle/>
+          <a:p>
+            <a:pPr algn="ctr"/>
+          </a:p>
+        </p:txBody>
+      </p:sp>
+      <p:sp>
+        <p:nvSpPr>
+          <p:cNvPr id="69" name="TextBox 68"/>
+          <p:cNvSpPr txBox="1"/>
+          <p:nvPr/>
+        </p:nvSpPr>
+        <p:spPr>
+          <a:xfrm>
+            <a:off x="6702552" y="5065776"/>
+            <a:ext cx="5010912" cy="256032"/>
+          </a:xfrm>
+          <a:prstGeom prst="rect">
+            <a:avLst/>
+          </a:prstGeom>
+          <a:noFill/>
+        </p:spPr>
+        <p:txBody>
+          <a:bodyPr wrap="square">
+            <a:spAutoFit/>
+          </a:bodyPr>
+          <a:lstStyle/>
+          <a:p>
+            <a:pPr algn="l"/>
+            <a:r>
+              <a:rPr sz="1000" b="1" i="0">
+                <a:solidFill>
+                  <a:srgbClr val="FFFFFF"/>
+                </a:solidFill>
+              </a:rPr>
+              <a:t>K8s ConfigMap 환경변수 업데이트</a:t>
+            </a:r>
+          </a:p>
+        </p:txBody>
+      </p:sp>
+      <p:sp>
+        <p:nvSpPr>
+          <p:cNvPr id="70" name="TextBox 69"/>
+          <p:cNvSpPr txBox="1"/>
+          <p:nvPr/>
+        </p:nvSpPr>
+        <p:spPr>
+          <a:xfrm>
+            <a:off x="6702552" y="5321808"/>
+            <a:ext cx="5010912" cy="182880"/>
+          </a:xfrm>
+          <a:prstGeom prst="rect">
+            <a:avLst/>
+          </a:prstGeom>
+          <a:noFill/>
+        </p:spPr>
+        <p:txBody>
+          <a:bodyPr wrap="square">
+            <a:spAutoFit/>
+          </a:bodyPr>
+          <a:lstStyle/>
+          <a:p>
+            <a:pPr algn="l"/>
+            <a:r>
+              <a:rPr sz="850" b="0" i="0">
+                <a:solidFill>
+                  <a:srgbClr val="888899"/>
+                </a:solidFill>
+              </a:rPr>
+              <a:t>EXT_API_ENDPOINT 제거, SKIP_AUTH 제거, AES_GCM_KEY 제거</a:t>
+            </a:r>
+          </a:p>
+        </p:txBody>
+      </p:sp>
+      <p:sp>
+        <p:nvSpPr>
+          <p:cNvPr id="71" name="Rectangle 70"/>
+          <p:cNvSpPr/>
+          <p:nvPr/>
+        </p:nvSpPr>
+        <p:spPr>
+          <a:xfrm>
+            <a:off x="6446520" y="5550408"/>
+            <a:ext cx="164592" cy="164592"/>
+          </a:xfrm>
+          <a:prstGeom prst="rect">
+            <a:avLst/>
+          </a:prstGeom>
+          <a:solidFill>
+            <a:srgbClr val="888899"/>
+          </a:solidFill>
+          <a:ln>
+            <a:noFill/>
+          </a:ln>
+        </p:spPr>
+        <p:style>
+          <a:lnRef idx="1">
+            <a:schemeClr val="accent1"/>
+          </a:lnRef>
+          <a:fillRef idx="3">
+            <a:schemeClr val="accent1"/>
+          </a:fillRef>
+          <a:effectRef idx="2">
+            <a:schemeClr val="accent1"/>
+          </a:effectRef>
+          <a:fontRef idx="minor">
+            <a:schemeClr val="lt1"/>
+          </a:fontRef>
+        </p:style>
+        <p:txBody>
+          <a:bodyPr rtlCol="0" anchor="ctr"/>
+          <a:lstStyle/>
+          <a:p>
+            <a:pPr algn="ctr"/>
+          </a:p>
+        </p:txBody>
+      </p:sp>
+      <p:sp>
+        <p:nvSpPr>
+          <p:cNvPr id="72" name="TextBox 71"/>
+          <p:cNvSpPr txBox="1"/>
+          <p:nvPr/>
+        </p:nvSpPr>
+        <p:spPr>
+          <a:xfrm>
+            <a:off x="6702552" y="5495544"/>
+            <a:ext cx="5010912" cy="256032"/>
+          </a:xfrm>
+          <a:prstGeom prst="rect">
+            <a:avLst/>
+          </a:prstGeom>
+          <a:noFill/>
+        </p:spPr>
+        <p:txBody>
+          <a:bodyPr wrap="square">
+            <a:spAutoFit/>
+          </a:bodyPr>
+          <a:lstStyle/>
+          <a:p>
+            <a:pPr algn="l"/>
+            <a:r>
+              <a:rPr sz="1000" b="1" i="0">
+                <a:solidFill>
+                  <a:srgbClr val="FFFFFF"/>
+                </a:solidFill>
+              </a:rPr>
+              <a:t>개발 환경 재배포 및 동작 확인</a:t>
+            </a:r>
+          </a:p>
+        </p:txBody>
+      </p:sp>
+      <p:sp>
+        <p:nvSpPr>
+          <p:cNvPr id="73" name="TextBox 72"/>
+          <p:cNvSpPr txBox="1"/>
+          <p:nvPr/>
+        </p:nvSpPr>
+        <p:spPr>
+          <a:xfrm>
+            <a:off x="6702552" y="5751576"/>
+            <a:ext cx="5010912" cy="182880"/>
+          </a:xfrm>
+          <a:prstGeom prst="rect">
+            <a:avLst/>
+          </a:prstGeom>
+          <a:noFill/>
+        </p:spPr>
+        <p:txBody>
+          <a:bodyPr wrap="square">
+            <a:spAutoFit/>
+          </a:bodyPr>
+          <a:lstStyle/>
+          <a:p>
+            <a:pPr algn="l"/>
+            <a:r>
+              <a:rPr sz="850" b="0" i="0">
+                <a:solidFill>
+                  <a:srgbClr val="888899"/>
+                </a:solidFill>
+              </a:rPr>
+              <a:t>ido Pod 재시작 후 26개 API 경로 연결 검증</a:t>
+            </a:r>
+          </a:p>
+        </p:txBody>
+      </p:sp>
+      <p:sp>
+        <p:nvSpPr>
+          <p:cNvPr id="74" name="Rectangle 73"/>
+          <p:cNvSpPr/>
+          <p:nvPr/>
+        </p:nvSpPr>
+        <p:spPr>
+          <a:xfrm>
+            <a:off x="731520" y="6565392"/>
+            <a:ext cx="10698480" cy="219456"/>
+          </a:xfrm>
+          <a:prstGeom prst="rect">
+            <a:avLst/>
+          </a:prstGeom>
+          <a:solidFill>
+            <a:srgbClr val="002A00"/>
+          </a:solidFill>
+          <a:ln>
+            <a:noFill/>
+          </a:ln>
+        </p:spPr>
+        <p:style>
+          <a:lnRef idx="1">
+            <a:schemeClr val="accent1"/>
+          </a:lnRef>
+          <a:fillRef idx="3">
+            <a:schemeClr val="accent1"/>
+          </a:fillRef>
+          <a:effectRef idx="2">
+            <a:schemeClr val="accent1"/>
+          </a:effectRef>
+          <a:fontRef idx="minor">
+            <a:schemeClr val="lt1"/>
+          </a:fontRef>
+        </p:style>
+        <p:txBody>
+          <a:bodyPr rtlCol="0" anchor="ctr"/>
+          <a:lstStyle/>
+          <a:p>
+            <a:pPr algn="ctr"/>
+          </a:p>
+        </p:txBody>
+      </p:sp>
+      <p:sp>
+        <p:nvSpPr>
+          <p:cNvPr id="75" name="TextBox 74"/>
+          <p:cNvSpPr txBox="1"/>
+          <p:nvPr/>
+        </p:nvSpPr>
+        <p:spPr>
+          <a:xfrm>
+            <a:off x="777240" y="6565392"/>
+            <a:ext cx="10607040" cy="219456"/>
+          </a:xfrm>
+          <a:prstGeom prst="rect">
+            <a:avLst/>
+          </a:prstGeom>
+          <a:noFill/>
+        </p:spPr>
+        <p:txBody>
+          <a:bodyPr wrap="square">
+            <a:spAutoFit/>
+          </a:bodyPr>
+          <a:lstStyle/>
+          <a:p>
+            <a:pPr algn="ctr"/>
+            <a:r>
+              <a:rPr sz="1000" b="1" i="0">
+                <a:solidFill>
+                  <a:srgbClr val="00B072"/>
+                </a:solidFill>
+              </a:rPr>
+              <a:t>전체 총 개발 소요: FE 3일 + Q-IM 1일 + ido/BE 5일 + 인프라 1일  =  최대 10 person-days  |  팀 간 순차 의존성 없음 — 병렬 진행 가능</a:t>
             </a:r>
           </a:p>
         </p:txBody>
